--- a/usecases/ai_pipeline 2/docs/Responsible_AI_LLMOps.pptx
+++ b/usecases/ai_pipeline 2/docs/Responsible_AI_LLMOps.pptx
@@ -5960,7 +5960,7 @@
                 </a:solidFill>
                 <a:latin typeface="Segoe UI"/>
               </a:rPr>
-              <a:t>WORKED EXAMPLES</a:t>
+              <a:t>WORKED EXAMPLE</a:t>
             </a:r>
           </a:p>
           <a:p>
@@ -5976,7 +5976,7 @@
                 </a:solidFill>
                 <a:latin typeface="Segoe UI"/>
               </a:rPr>
-              <a:t>Fairness and transparency, made concrete</a:t>
+              <a:t>Transparency on a real call — every score has its evidence</a:t>
             </a:r>
           </a:p>
         </p:txBody>
@@ -5989,8 +5989,195 @@
         </p:nvSpPr>
         <p:spPr>
           <a:xfrm>
-            <a:off x="640080" y="1828800"/>
-            <a:ext cx="5486400" cy="3657600"/>
+            <a:off x="640080" y="1737360"/>
+            <a:ext cx="6126480" cy="4069080"/>
+          </a:xfrm>
+          <a:prstGeom prst="roundRect">
+            <a:avLst/>
+          </a:prstGeom>
+          <a:solidFill>
+            <a:srgbClr val="F3F1EA"/>
+          </a:solidFill>
+          <a:ln w="9525">
+            <a:solidFill>
+              <a:srgbClr val="D9DFE5"/>
+            </a:solidFill>
+          </a:ln>
+          <a:effectLst/>
+        </p:spPr>
+        <p:style>
+          <a:lnRef idx="1">
+            <a:schemeClr val="accent1"/>
+          </a:lnRef>
+          <a:fillRef idx="3">
+            <a:schemeClr val="accent1"/>
+          </a:fillRef>
+          <a:effectRef idx="2">
+            <a:schemeClr val="accent1"/>
+          </a:effectRef>
+          <a:fontRef idx="minor">
+            <a:schemeClr val="lt1"/>
+          </a:fontRef>
+        </p:style>
+        <p:txBody>
+          <a:bodyPr rtlCol="0" anchor="ctr" wrap="square" lIns="146304" rIns="128016" tIns="118872" bIns="91440"/>
+          <a:lstStyle/>
+          <a:p>
+            <a:pPr algn="ctr">
+              <a:spcAft>
+                <a:spcPts val="700"/>
+              </a:spcAft>
+            </a:pPr>
+            <a:r>
+              <a:rPr sz="1250" b="1">
+                <a:solidFill>
+                  <a:srgbClr val="0A5B55"/>
+                </a:solidFill>
+                <a:latin typeface="Segoe UI"/>
+              </a:rPr>
+              <a:t>MOCK CALL TRANSCRIPT — APIX example (illustrative)</a:t>
+            </a:r>
+          </a:p>
+          <a:p>
+            <a:pPr>
+              <a:spcAft>
+                <a:spcPts val="300"/>
+              </a:spcAft>
+            </a:pPr>
+            <a:r>
+              <a:rPr sz="1150" b="0">
+                <a:solidFill>
+                  <a:srgbClr val="1A1F27"/>
+                </a:solidFill>
+                <a:latin typeface="Consolas"/>
+              </a:rPr>
+              <a:t>[10] Cust : My phone died right before an</a:t>
+            </a:r>
+          </a:p>
+          <a:p>
+            <a:pPr>
+              <a:spcAft>
+                <a:spcPts val="300"/>
+              </a:spcAft>
+            </a:pPr>
+            <a:r>
+              <a:rPr sz="1150" b="0">
+                <a:solidFill>
+                  <a:srgbClr val="1A1F27"/>
+                </a:solidFill>
+                <a:latin typeface="Consolas"/>
+              </a:rPr>
+              <a:t>            important call. I'm really stressed.</a:t>
+            </a:r>
+          </a:p>
+          <a:p>
+            <a:pPr>
+              <a:spcAft>
+                <a:spcPts val="300"/>
+              </a:spcAft>
+            </a:pPr>
+            <a:r>
+              <a:rPr sz="1150" b="0">
+                <a:solidFill>
+                  <a:srgbClr val="1A1F27"/>
+                </a:solidFill>
+                <a:latin typeface="Consolas"/>
+              </a:rPr>
+              <a:t>[11] Agent: I completely understand how</a:t>
+            </a:r>
+          </a:p>
+          <a:p>
+            <a:pPr>
+              <a:spcAft>
+                <a:spcPts val="300"/>
+              </a:spcAft>
+            </a:pPr>
+            <a:r>
+              <a:rPr sz="1150" b="0">
+                <a:solidFill>
+                  <a:srgbClr val="1A1F27"/>
+                </a:solidFill>
+                <a:latin typeface="Consolas"/>
+              </a:rPr>
+              <a:t>            frustrating that is — let me sort</a:t>
+            </a:r>
+          </a:p>
+          <a:p>
+            <a:pPr>
+              <a:spcAft>
+                <a:spcPts val="300"/>
+              </a:spcAft>
+            </a:pPr>
+            <a:r>
+              <a:rPr sz="1150" b="0">
+                <a:solidFill>
+                  <a:srgbClr val="1A1F27"/>
+                </a:solidFill>
+                <a:latin typeface="Consolas"/>
+              </a:rPr>
+              <a:t>            this out for you right now.</a:t>
+            </a:r>
+          </a:p>
+          <a:p>
+            <a:pPr>
+              <a:spcAft>
+                <a:spcPts val="300"/>
+              </a:spcAft>
+            </a:pPr>
+            <a:r>
+              <a:rPr sz="1150" b="0">
+                <a:solidFill>
+                  <a:srgbClr val="1A1F27"/>
+                </a:solidFill>
+                <a:latin typeface="Consolas"/>
+              </a:rPr>
+              <a:t>[12] Agent: I've fast-tracked a replacement for</a:t>
+            </a:r>
+          </a:p>
+          <a:p>
+            <a:pPr>
+              <a:spcAft>
+                <a:spcPts val="300"/>
+              </a:spcAft>
+            </a:pPr>
+            <a:r>
+              <a:rPr sz="1150" b="0">
+                <a:solidFill>
+                  <a:srgbClr val="1A1F27"/>
+                </a:solidFill>
+                <a:latin typeface="Consolas"/>
+              </a:rPr>
+              <a:t>            tomorrow and added a credit.</a:t>
+            </a:r>
+          </a:p>
+          <a:p>
+            <a:pPr>
+              <a:spcAft>
+                <a:spcPts val="300"/>
+              </a:spcAft>
+            </a:pPr>
+            <a:r>
+              <a:rPr sz="1150" b="0">
+                <a:solidFill>
+                  <a:srgbClr val="1A1F27"/>
+                </a:solidFill>
+                <a:latin typeface="Consolas"/>
+              </a:rPr>
+              <a:t>[13] Cust : Thank you, that really helps.</a:t>
+            </a:r>
+          </a:p>
+        </p:txBody>
+      </p:sp>
+      <p:sp>
+        <p:nvSpPr>
+          <p:cNvPr id="5" name="Rounded Rectangle 4"/>
+          <p:cNvSpPr/>
+          <p:nvPr/>
+        </p:nvSpPr>
+        <p:spPr>
+          <a:xfrm>
+            <a:off x="6949440" y="1737360"/>
+            <a:ext cx="4617720" cy="4069080"/>
           </a:xfrm>
           <a:prstGeom prst="roundRect">
             <a:avLst/>
@@ -6035,7 +6222,7 @@
                 </a:solidFill>
                 <a:latin typeface="Segoe UI"/>
               </a:rPr>
-              <a:t>FAIRNESS CHECK · language-proficiency score</a:t>
+              <a:t>WHAT RESPONSIBLE AI ADDS</a:t>
             </a:r>
           </a:p>
           <a:p>
@@ -6051,7 +6238,7 @@
                 </a:solidFill>
                 <a:latin typeface="Segoe UI"/>
               </a:rPr>
-              <a:t>Compare average scores by group:</a:t>
+              <a:t>The pipeline scores this call:</a:t>
             </a:r>
           </a:p>
           <a:p>
@@ -6067,7 +6254,7 @@
                 </a:solidFill>
                 <a:latin typeface="Consolas"/>
               </a:rPr>
-              <a:t>native speakers      : 0.86</a:t>
+              <a:t>empathy    = 0.9   ← line 11</a:t>
             </a:r>
           </a:p>
           <a:p>
@@ -6083,7 +6270,7 @@
                 </a:solidFill>
                 <a:latin typeface="Consolas"/>
               </a:rPr>
-              <a:t>non-native speakers  : 0.71</a:t>
+              <a:t>ownership  = yes   ← line 12</a:t>
             </a:r>
           </a:p>
           <a:p>
@@ -6095,11 +6282,11 @@
             <a:r>
               <a:rPr sz="1150" b="0">
                 <a:solidFill>
-                  <a:srgbClr val="A96E12"/>
+                  <a:srgbClr val="0A5B55"/>
                 </a:solidFill>
                 <a:latin typeface="Consolas"/>
               </a:rPr>
-              <a:t>gap                  : 0.15  → review</a:t>
+              <a:t>experience = Good  ← line 13</a:t>
             </a:r>
           </a:p>
           <a:p>
@@ -6127,11 +6314,11 @@
             <a:r>
               <a:rPr sz="1150" b="0">
                 <a:solidFill>
-                  <a:srgbClr val="535C6A"/>
+                  <a:srgbClr val="2E8B5E"/>
                 </a:solidFill>
                 <a:latin typeface="Segoe UI"/>
               </a:rPr>
-              <a:t>A gap isn't proof of bias — but we LOOK,</a:t>
+              <a:t>Transparency — the agent sees the</a:t>
             </a:r>
           </a:p>
           <a:p>
@@ -6147,66 +6334,7 @@
                 </a:solidFill>
                 <a:latin typeface="Segoe UI"/>
               </a:rPr>
-              <a:t>measure, and explain it, not assume.</a:t>
-            </a:r>
-          </a:p>
-        </p:txBody>
-      </p:sp>
-      <p:sp>
-        <p:nvSpPr>
-          <p:cNvPr id="5" name="Rounded Rectangle 4"/>
-          <p:cNvSpPr/>
-          <p:nvPr/>
-        </p:nvSpPr>
-        <p:spPr>
-          <a:xfrm>
-            <a:off x="6355080" y="1828800"/>
-            <a:ext cx="5212080" cy="3657600"/>
-          </a:xfrm>
-          <a:prstGeom prst="roundRect">
-            <a:avLst/>
-          </a:prstGeom>
-          <a:solidFill>
-            <a:srgbClr val="E1F0EE"/>
-          </a:solidFill>
-          <a:ln w="9525">
-            <a:solidFill>
-              <a:srgbClr val="D9DFE5"/>
-            </a:solidFill>
-          </a:ln>
-          <a:effectLst/>
-        </p:spPr>
-        <p:style>
-          <a:lnRef idx="1">
-            <a:schemeClr val="accent1"/>
-          </a:lnRef>
-          <a:fillRef idx="3">
-            <a:schemeClr val="accent1"/>
-          </a:fillRef>
-          <a:effectRef idx="2">
-            <a:schemeClr val="accent1"/>
-          </a:effectRef>
-          <a:fontRef idx="minor">
-            <a:schemeClr val="lt1"/>
-          </a:fontRef>
-        </p:style>
-        <p:txBody>
-          <a:bodyPr rtlCol="0" anchor="ctr" wrap="square" lIns="146304" rIns="128016" tIns="118872" bIns="91440"/>
-          <a:lstStyle/>
-          <a:p>
-            <a:pPr algn="ctr">
-              <a:spcAft>
-                <a:spcPts val="700"/>
-              </a:spcAft>
-            </a:pPr>
-            <a:r>
-              <a:rPr sz="1250" b="1">
-                <a:solidFill>
-                  <a:srgbClr val="0E7C74"/>
-                </a:solidFill>
-                <a:latin typeface="Segoe UI"/>
-              </a:rPr>
-              <a:t>TRANSPARENCY · a score with its evidence</a:t>
+              <a:t>exact lines behind each score.</a:t>
             </a:r>
           </a:p>
           <a:p>
@@ -6218,11 +6346,11 @@
             <a:r>
               <a:rPr sz="1150" b="0">
                 <a:solidFill>
-                  <a:srgbClr val="0A5B55"/>
-                </a:solidFill>
-                <a:latin typeface="Consolas"/>
+                  <a:srgbClr val="2E8B5E"/>
+                </a:solidFill>
+                <a:latin typeface="Segoe UI"/>
               </a:rPr>
-              <a:t>empathy = 0.9</a:t>
+              <a:t>Contestable — if they disagree they</a:t>
             </a:r>
           </a:p>
           <a:p>
@@ -6238,87 +6366,7 @@
                 </a:solidFill>
                 <a:latin typeface="Segoe UI"/>
               </a:rPr>
-              <a:t>because, on call #4471:</a:t>
-            </a:r>
-          </a:p>
-          <a:p>
-            <a:pPr>
-              <a:spcAft>
-                <a:spcPts val="300"/>
-              </a:spcAft>
-            </a:pPr>
-            <a:r>
-              <a:rPr sz="1150" b="0">
-                <a:solidFill>
-                  <a:srgbClr val="0A5B55"/>
-                </a:solidFill>
-                <a:latin typeface="Consolas"/>
-              </a:rPr>
-              <a:t>  “I completely understand,</a:t>
-            </a:r>
-          </a:p>
-          <a:p>
-            <a:pPr>
-              <a:spcAft>
-                <a:spcPts val="300"/>
-              </a:spcAft>
-            </a:pPr>
-            <a:r>
-              <a:rPr sz="1150" b="0">
-                <a:solidFill>
-                  <a:srgbClr val="0A5B55"/>
-                </a:solidFill>
-                <a:latin typeface="Consolas"/>
-              </a:rPr>
-              <a:t>   let me sort this for you.”</a:t>
-            </a:r>
-          </a:p>
-          <a:p>
-            <a:pPr>
-              <a:spcAft>
-                <a:spcPts val="300"/>
-              </a:spcAft>
-            </a:pPr>
-            <a:r>
-              <a:rPr sz="1150" b="0">
-                <a:solidFill>
-                  <a:srgbClr val="535C6A"/>
-                </a:solidFill>
-                <a:latin typeface="Segoe UI"/>
-              </a:rPr>
-              <a:t>  (lines 12–14)</a:t>
-            </a:r>
-          </a:p>
-          <a:p>
-            <a:pPr>
-              <a:spcAft>
-                <a:spcPts val="300"/>
-              </a:spcAft>
-            </a:pPr>
-            <a:r>
-              <a:rPr sz="1150" b="0">
-                <a:solidFill>
-                  <a:srgbClr val="1A1F27"/>
-                </a:solidFill>
-                <a:latin typeface="Segoe UI"/>
-              </a:rPr>
-              <a:t/>
-            </a:r>
-          </a:p>
-          <a:p>
-            <a:pPr>
-              <a:spcAft>
-                <a:spcPts val="300"/>
-              </a:spcAft>
-            </a:pPr>
-            <a:r>
-              <a:rPr sz="1150" b="0">
-                <a:solidFill>
-                  <a:srgbClr val="2E8B5E"/>
-                </a:solidFill>
-                <a:latin typeface="Segoe UI"/>
-              </a:rPr>
-              <a:t>The agent can see WHY — and challenge it.</a:t>
+              <a:t>can challenge it, evidence in view.</a:t>
             </a:r>
           </a:p>
         </p:txBody>
@@ -6331,7 +6379,7 @@
         </p:nvSpPr>
         <p:spPr>
           <a:xfrm>
-            <a:off x="640080" y="5806440"/>
+            <a:off x="640080" y="5943600"/>
             <a:ext cx="10927080" cy="749808"/>
           </a:xfrm>
           <a:prstGeom prst="roundRect">
@@ -6369,13 +6417,13 @@
               </a:spcAft>
             </a:pPr>
             <a:r>
-              <a:rPr sz="1400" b="1">
+              <a:rPr sz="1250" b="1">
                 <a:solidFill>
                   <a:srgbClr val="0A5B55"/>
                 </a:solidFill>
                 <a:latin typeface="Segoe UI"/>
               </a:rPr>
-              <a:t>Responsible AI turns “trust us” into “here is the check, the number, and the evidence.”</a:t>
+              <a:t>No score without evidence — plus a fairness check on top (native vs non-native averages 0.86 vs 0.71 → flagged for review). That is what makes AI that evaluates people defensible.</a:t>
             </a:r>
           </a:p>
         </p:txBody>

--- a/usecases/ai_pipeline 2/docs/Responsible_AI_LLMOps.pptx
+++ b/usecases/ai_pipeline 2/docs/Responsible_AI_LLMOps.pptx
@@ -3118,7 +3118,7 @@
             <a:avLst/>
           </a:prstGeom>
           <a:solidFill>
-            <a:srgbClr val="0E7C74"/>
+            <a:srgbClr val="16324F"/>
           </a:solidFill>
           <a:ln>
             <a:noFill/>
@@ -3177,7 +3177,7 @@
             <a:r>
               <a:rPr sz="1350" b="1">
                 <a:solidFill>
-                  <a:srgbClr val="0E7C74"/>
+                  <a:srgbClr val="16324F"/>
                 </a:solidFill>
                 <a:latin typeface="Segoe UI"/>
               </a:rPr>
@@ -3193,7 +3193,7 @@
             <a:r>
               <a:rPr sz="3700" b="1">
                 <a:solidFill>
-                  <a:srgbClr val="1A1F27"/>
+                  <a:srgbClr val="1C2733"/>
                 </a:solidFill>
                 <a:latin typeface="Segoe UI"/>
               </a:rPr>
@@ -3209,7 +3209,7 @@
             <a:r>
               <a:rPr sz="3700" b="1">
                 <a:solidFill>
-                  <a:srgbClr val="1A1F27"/>
+                  <a:srgbClr val="1C2733"/>
                 </a:solidFill>
                 <a:latin typeface="Segoe UI"/>
               </a:rPr>
@@ -3225,7 +3225,7 @@
             <a:r>
               <a:rPr sz="1700" b="0">
                 <a:solidFill>
-                  <a:srgbClr val="535C6A"/>
+                  <a:srgbClr val="566573"/>
                 </a:solidFill>
                 <a:latin typeface="Segoe UI"/>
               </a:rPr>
@@ -3264,7 +3264,7 @@
             <a:r>
               <a:rPr sz="1250" b="0">
                 <a:solidFill>
-                  <a:srgbClr val="8A93A1"/>
+                  <a:srgbClr val="93A0AD"/>
                 </a:solidFill>
                 <a:latin typeface="Segoe UI"/>
               </a:rPr>
@@ -3314,7 +3314,7 @@
             <a:avLst/>
           </a:prstGeom>
           <a:solidFill>
-            <a:srgbClr val="0E7C74"/>
+            <a:srgbClr val="16324F"/>
           </a:solidFill>
           <a:ln>
             <a:noFill/>
@@ -3373,7 +3373,7 @@
             <a:r>
               <a:rPr sz="1200" b="1">
                 <a:solidFill>
-                  <a:srgbClr val="0E7C74"/>
+                  <a:srgbClr val="16324F"/>
                 </a:solidFill>
                 <a:latin typeface="Segoe UI"/>
               </a:rPr>
@@ -3389,7 +3389,7 @@
             <a:r>
               <a:rPr sz="2500" b="1">
                 <a:solidFill>
-                  <a:srgbClr val="1A1F27"/>
+                  <a:srgbClr val="1C2733"/>
                 </a:solidFill>
                 <a:latin typeface="Segoe UI"/>
               </a:rPr>
@@ -3428,7 +3428,7 @@
             <a:r>
               <a:rPr sz="1400" b="0">
                 <a:solidFill>
-                  <a:srgbClr val="535C6A"/>
+                  <a:srgbClr val="566573"/>
                 </a:solidFill>
                 <a:latin typeface="Segoe UI"/>
               </a:rPr>
@@ -3439,7 +3439,7 @@
       </p:sp>
       <p:sp>
         <p:nvSpPr>
-          <p:cNvPr id="5" name="Rounded Rectangle 4"/>
+          <p:cNvPr id="5" name="Rectangle 4"/>
           <p:cNvSpPr/>
           <p:nvPr/>
         </p:nvSpPr>
@@ -3448,15 +3448,15 @@
             <a:off x="640080" y="2331720"/>
             <a:ext cx="5486400" cy="3108960"/>
           </a:xfrm>
-          <a:prstGeom prst="roundRect">
+          <a:prstGeom prst="rect">
             <a:avLst/>
           </a:prstGeom>
           <a:solidFill>
-            <a:srgbClr val="E1F0EE"/>
+            <a:srgbClr val="EAEEF2"/>
           </a:solidFill>
           <a:ln w="9525">
             <a:solidFill>
-              <a:srgbClr val="D9DFE5"/>
+              <a:srgbClr val="D5DBE1"/>
             </a:solidFill>
           </a:ln>
           <a:effectLst/>
@@ -3487,7 +3487,7 @@
             <a:r>
               <a:rPr sz="1250" b="1">
                 <a:solidFill>
-                  <a:srgbClr val="0E7C74"/>
+                  <a:srgbClr val="16324F"/>
                 </a:solidFill>
                 <a:latin typeface="Segoe UI"/>
               </a:rPr>
@@ -3503,7 +3503,7 @@
             <a:r>
               <a:rPr sz="1150" b="0">
                 <a:solidFill>
-                  <a:srgbClr val="535C6A"/>
+                  <a:srgbClr val="566573"/>
                 </a:solidFill>
                 <a:latin typeface="Segoe UI"/>
               </a:rPr>
@@ -3519,7 +3519,7 @@
             <a:r>
               <a:rPr sz="1150" b="0">
                 <a:solidFill>
-                  <a:srgbClr val="535C6A"/>
+                  <a:srgbClr val="566573"/>
                 </a:solidFill>
                 <a:latin typeface="Segoe UI"/>
               </a:rPr>
@@ -3535,7 +3535,7 @@
             <a:r>
               <a:rPr sz="1150" b="0">
                 <a:solidFill>
-                  <a:srgbClr val="535C6A"/>
+                  <a:srgbClr val="566573"/>
                 </a:solidFill>
                 <a:latin typeface="Segoe UI"/>
               </a:rPr>
@@ -3551,7 +3551,7 @@
             <a:r>
               <a:rPr sz="1150" b="0">
                 <a:solidFill>
-                  <a:srgbClr val="1A1F27"/>
+                  <a:srgbClr val="1C2733"/>
                 </a:solidFill>
                 <a:latin typeface="Segoe UI"/>
               </a:rPr>
@@ -3567,7 +3567,7 @@
             <a:r>
               <a:rPr sz="1150" b="0">
                 <a:solidFill>
-                  <a:srgbClr val="0A5B55"/>
+                  <a:srgbClr val="122A42"/>
                 </a:solidFill>
                 <a:latin typeface="Segoe UI"/>
               </a:rPr>
@@ -3578,7 +3578,7 @@
       </p:sp>
       <p:sp>
         <p:nvSpPr>
-          <p:cNvPr id="6" name="Rounded Rectangle 5"/>
+          <p:cNvPr id="6" name="Rectangle 5"/>
           <p:cNvSpPr/>
           <p:nvPr/>
         </p:nvSpPr>
@@ -3587,15 +3587,15 @@
             <a:off x="6355080" y="2331720"/>
             <a:ext cx="5212080" cy="3108960"/>
           </a:xfrm>
-          <a:prstGeom prst="roundRect">
+          <a:prstGeom prst="rect">
             <a:avLst/>
           </a:prstGeom>
           <a:solidFill>
-            <a:srgbClr val="E4F3EB"/>
+            <a:srgbClr val="E8F0EA"/>
           </a:solidFill>
           <a:ln w="9525">
             <a:solidFill>
-              <a:srgbClr val="D9DFE5"/>
+              <a:srgbClr val="D5DBE1"/>
             </a:solidFill>
           </a:ln>
           <a:effectLst/>
@@ -3626,7 +3626,7 @@
             <a:r>
               <a:rPr sz="1250" b="1">
                 <a:solidFill>
-                  <a:srgbClr val="2E8B5E"/>
+                  <a:srgbClr val="2F6E4E"/>
                 </a:solidFill>
                 <a:latin typeface="Segoe UI"/>
               </a:rPr>
@@ -3642,7 +3642,7 @@
             <a:r>
               <a:rPr sz="1150" b="0">
                 <a:solidFill>
-                  <a:srgbClr val="535C6A"/>
+                  <a:srgbClr val="566573"/>
                 </a:solidFill>
                 <a:latin typeface="Segoe UI"/>
               </a:rPr>
@@ -3658,7 +3658,7 @@
             <a:r>
               <a:rPr sz="1150" b="0">
                 <a:solidFill>
-                  <a:srgbClr val="535C6A"/>
+                  <a:srgbClr val="566573"/>
                 </a:solidFill>
                 <a:latin typeface="Segoe UI"/>
               </a:rPr>
@@ -3674,7 +3674,7 @@
             <a:r>
               <a:rPr sz="1150" b="0">
                 <a:solidFill>
-                  <a:srgbClr val="535C6A"/>
+                  <a:srgbClr val="566573"/>
                 </a:solidFill>
                 <a:latin typeface="Segoe UI"/>
               </a:rPr>
@@ -3690,7 +3690,7 @@
             <a:r>
               <a:rPr sz="1150" b="0">
                 <a:solidFill>
-                  <a:srgbClr val="1A1F27"/>
+                  <a:srgbClr val="1C2733"/>
                 </a:solidFill>
                 <a:latin typeface="Segoe UI"/>
               </a:rPr>
@@ -3706,7 +3706,7 @@
             <a:r>
               <a:rPr sz="1150" b="0">
                 <a:solidFill>
-                  <a:srgbClr val="2E8B5E"/>
+                  <a:srgbClr val="2F6E4E"/>
                 </a:solidFill>
                 <a:latin typeface="Segoe UI"/>
               </a:rPr>
@@ -3717,7 +3717,7 @@
       </p:sp>
       <p:sp>
         <p:nvSpPr>
-          <p:cNvPr id="7" name="Rounded Rectangle 6"/>
+          <p:cNvPr id="7" name="Rectangle 6"/>
           <p:cNvSpPr/>
           <p:nvPr/>
         </p:nvSpPr>
@@ -3726,11 +3726,11 @@
             <a:off x="640080" y="5806440"/>
             <a:ext cx="10927080" cy="749808"/>
           </a:xfrm>
-          <a:prstGeom prst="roundRect">
+          <a:prstGeom prst="rect">
             <a:avLst/>
           </a:prstGeom>
           <a:solidFill>
-            <a:srgbClr val="E1F0EE"/>
+            <a:srgbClr val="EAEEF2"/>
           </a:solidFill>
           <a:ln>
             <a:noFill/>
@@ -3763,7 +3763,7 @@
             <a:r>
               <a:rPr sz="1400" b="1">
                 <a:solidFill>
-                  <a:srgbClr val="0A5B55"/>
+                  <a:srgbClr val="122A42"/>
                 </a:solidFill>
                 <a:latin typeface="Segoe UI"/>
               </a:rPr>
@@ -3813,7 +3813,7 @@
             <a:avLst/>
           </a:prstGeom>
           <a:solidFill>
-            <a:srgbClr val="0E7C74"/>
+            <a:srgbClr val="16324F"/>
           </a:solidFill>
           <a:ln>
             <a:noFill/>
@@ -3872,7 +3872,7 @@
             <a:r>
               <a:rPr sz="1200" b="1">
                 <a:solidFill>
-                  <a:srgbClr val="0E7C74"/>
+                  <a:srgbClr val="16324F"/>
                 </a:solidFill>
                 <a:latin typeface="Segoe UI"/>
               </a:rPr>
@@ -3888,7 +3888,7 @@
             <a:r>
               <a:rPr sz="2500" b="1">
                 <a:solidFill>
-                  <a:srgbClr val="1A1F27"/>
+                  <a:srgbClr val="1C2733"/>
                 </a:solidFill>
                 <a:latin typeface="Segoe UI"/>
               </a:rPr>
@@ -3939,7 +3939,7 @@
                   </a:txBody>
                   <a:tcPr anchor="ctr" marL="91440" marR="54864" marT="18288" marB="18288">
                     <a:solidFill>
-                      <a:srgbClr val="0E7C74"/>
+                      <a:srgbClr val="16324F"/>
                     </a:solidFill>
                   </a:tcPr>
                 </a:tc>
@@ -3961,7 +3961,7 @@
                   </a:txBody>
                   <a:tcPr anchor="ctr" marL="91440" marR="54864" marT="18288" marB="18288">
                     <a:solidFill>
-                      <a:srgbClr val="0E7C74"/>
+                      <a:srgbClr val="16324F"/>
                     </a:solidFill>
                   </a:tcPr>
                 </a:tc>
@@ -3983,7 +3983,7 @@
                   </a:txBody>
                   <a:tcPr anchor="ctr" marL="91440" marR="54864" marT="18288" marB="18288">
                     <a:solidFill>
-                      <a:srgbClr val="0E7C74"/>
+                      <a:srgbClr val="16324F"/>
                     </a:solidFill>
                   </a:tcPr>
                 </a:tc>
@@ -3997,7 +3997,7 @@
                       <a:r>
                         <a:rPr sz="1250" b="1">
                           <a:solidFill>
-                            <a:srgbClr val="1A1F27"/>
+                            <a:srgbClr val="1C2733"/>
                           </a:solidFill>
                           <a:latin typeface="Segoe UI"/>
                         </a:rPr>
@@ -4019,7 +4019,7 @@
                       <a:r>
                         <a:rPr sz="1250" b="0">
                           <a:solidFill>
-                            <a:srgbClr val="535C6A"/>
+                            <a:srgbClr val="566573"/>
                           </a:solidFill>
                           <a:latin typeface="Segoe UI"/>
                         </a:rPr>
@@ -4041,7 +4041,7 @@
                       <a:r>
                         <a:rPr sz="1250" b="0">
                           <a:solidFill>
-                            <a:srgbClr val="535C6A"/>
+                            <a:srgbClr val="566573"/>
                           </a:solidFill>
                           <a:latin typeface="Segoe UI"/>
                         </a:rPr>
@@ -4065,7 +4065,7 @@
                       <a:r>
                         <a:rPr sz="1250" b="1">
                           <a:solidFill>
-                            <a:srgbClr val="1A1F27"/>
+                            <a:srgbClr val="1C2733"/>
                           </a:solidFill>
                           <a:latin typeface="Segoe UI"/>
                         </a:rPr>
@@ -4075,7 +4075,7 @@
                   </a:txBody>
                   <a:tcPr anchor="ctr" marL="91440" marR="54864" marT="18288" marB="18288">
                     <a:solidFill>
-                      <a:srgbClr val="F7F9F8"/>
+                      <a:srgbClr val="F6F8FA"/>
                     </a:solidFill>
                   </a:tcPr>
                 </a:tc>
@@ -4087,7 +4087,7 @@
                       <a:r>
                         <a:rPr sz="1250" b="0">
                           <a:solidFill>
-                            <a:srgbClr val="535C6A"/>
+                            <a:srgbClr val="566573"/>
                           </a:solidFill>
                           <a:latin typeface="Segoe UI"/>
                         </a:rPr>
@@ -4097,7 +4097,7 @@
                   </a:txBody>
                   <a:tcPr anchor="ctr" marL="91440" marR="54864" marT="18288" marB="18288">
                     <a:solidFill>
-                      <a:srgbClr val="F7F9F8"/>
+                      <a:srgbClr val="F6F8FA"/>
                     </a:solidFill>
                   </a:tcPr>
                 </a:tc>
@@ -4109,7 +4109,7 @@
                       <a:r>
                         <a:rPr sz="1250" b="0">
                           <a:solidFill>
-                            <a:srgbClr val="535C6A"/>
+                            <a:srgbClr val="566573"/>
                           </a:solidFill>
                           <a:latin typeface="Segoe UI"/>
                         </a:rPr>
@@ -4119,7 +4119,7 @@
                   </a:txBody>
                   <a:tcPr anchor="ctr" marL="91440" marR="54864" marT="18288" marB="18288">
                     <a:solidFill>
-                      <a:srgbClr val="F7F9F8"/>
+                      <a:srgbClr val="F6F8FA"/>
                     </a:solidFill>
                   </a:tcPr>
                 </a:tc>
@@ -4133,7 +4133,7 @@
                       <a:r>
                         <a:rPr sz="1250" b="1">
                           <a:solidFill>
-                            <a:srgbClr val="1A1F27"/>
+                            <a:srgbClr val="1C2733"/>
                           </a:solidFill>
                           <a:latin typeface="Segoe UI"/>
                         </a:rPr>
@@ -4155,7 +4155,7 @@
                       <a:r>
                         <a:rPr sz="1250" b="0">
                           <a:solidFill>
-                            <a:srgbClr val="535C6A"/>
+                            <a:srgbClr val="566573"/>
                           </a:solidFill>
                           <a:latin typeface="Segoe UI"/>
                         </a:rPr>
@@ -4177,7 +4177,7 @@
                       <a:r>
                         <a:rPr sz="1250" b="0">
                           <a:solidFill>
-                            <a:srgbClr val="535C6A"/>
+                            <a:srgbClr val="566573"/>
                           </a:solidFill>
                           <a:latin typeface="Segoe UI"/>
                         </a:rPr>
@@ -4201,7 +4201,7 @@
                       <a:r>
                         <a:rPr sz="1250" b="1">
                           <a:solidFill>
-                            <a:srgbClr val="1A1F27"/>
+                            <a:srgbClr val="1C2733"/>
                           </a:solidFill>
                           <a:latin typeface="Segoe UI"/>
                         </a:rPr>
@@ -4211,7 +4211,7 @@
                   </a:txBody>
                   <a:tcPr anchor="ctr" marL="91440" marR="54864" marT="18288" marB="18288">
                     <a:solidFill>
-                      <a:srgbClr val="F7F9F8"/>
+                      <a:srgbClr val="F6F8FA"/>
                     </a:solidFill>
                   </a:tcPr>
                 </a:tc>
@@ -4223,7 +4223,7 @@
                       <a:r>
                         <a:rPr sz="1250" b="0">
                           <a:solidFill>
-                            <a:srgbClr val="535C6A"/>
+                            <a:srgbClr val="566573"/>
                           </a:solidFill>
                           <a:latin typeface="Segoe UI"/>
                         </a:rPr>
@@ -4233,7 +4233,7 @@
                   </a:txBody>
                   <a:tcPr anchor="ctr" marL="91440" marR="54864" marT="18288" marB="18288">
                     <a:solidFill>
-                      <a:srgbClr val="F7F9F8"/>
+                      <a:srgbClr val="F6F8FA"/>
                     </a:solidFill>
                   </a:tcPr>
                 </a:tc>
@@ -4245,7 +4245,7 @@
                       <a:r>
                         <a:rPr sz="1250" b="0">
                           <a:solidFill>
-                            <a:srgbClr val="535C6A"/>
+                            <a:srgbClr val="566573"/>
                           </a:solidFill>
                           <a:latin typeface="Segoe UI"/>
                         </a:rPr>
@@ -4255,7 +4255,7 @@
                   </a:txBody>
                   <a:tcPr anchor="ctr" marL="91440" marR="54864" marT="18288" marB="18288">
                     <a:solidFill>
-                      <a:srgbClr val="F7F9F8"/>
+                      <a:srgbClr val="F6F8FA"/>
                     </a:solidFill>
                   </a:tcPr>
                 </a:tc>
@@ -4269,7 +4269,7 @@
                       <a:r>
                         <a:rPr sz="1250" b="1">
                           <a:solidFill>
-                            <a:srgbClr val="1A1F27"/>
+                            <a:srgbClr val="1C2733"/>
                           </a:solidFill>
                           <a:latin typeface="Segoe UI"/>
                         </a:rPr>
@@ -4291,7 +4291,7 @@
                       <a:r>
                         <a:rPr sz="1250" b="0">
                           <a:solidFill>
-                            <a:srgbClr val="535C6A"/>
+                            <a:srgbClr val="566573"/>
                           </a:solidFill>
                           <a:latin typeface="Segoe UI"/>
                         </a:rPr>
@@ -4313,7 +4313,7 @@
                       <a:r>
                         <a:rPr sz="1250" b="0">
                           <a:solidFill>
-                            <a:srgbClr val="535C6A"/>
+                            <a:srgbClr val="566573"/>
                           </a:solidFill>
                           <a:latin typeface="Segoe UI"/>
                         </a:rPr>
@@ -4337,7 +4337,7 @@
                       <a:r>
                         <a:rPr sz="1250" b="1">
                           <a:solidFill>
-                            <a:srgbClr val="1A1F27"/>
+                            <a:srgbClr val="1C2733"/>
                           </a:solidFill>
                           <a:latin typeface="Segoe UI"/>
                         </a:rPr>
@@ -4347,7 +4347,7 @@
                   </a:txBody>
                   <a:tcPr anchor="ctr" marL="91440" marR="54864" marT="18288" marB="18288">
                     <a:solidFill>
-                      <a:srgbClr val="F7F9F8"/>
+                      <a:srgbClr val="F6F8FA"/>
                     </a:solidFill>
                   </a:tcPr>
                 </a:tc>
@@ -4359,7 +4359,7 @@
                       <a:r>
                         <a:rPr sz="1250" b="0">
                           <a:solidFill>
-                            <a:srgbClr val="535C6A"/>
+                            <a:srgbClr val="566573"/>
                           </a:solidFill>
                           <a:latin typeface="Segoe UI"/>
                         </a:rPr>
@@ -4369,7 +4369,7 @@
                   </a:txBody>
                   <a:tcPr anchor="ctr" marL="91440" marR="54864" marT="18288" marB="18288">
                     <a:solidFill>
-                      <a:srgbClr val="F7F9F8"/>
+                      <a:srgbClr val="F6F8FA"/>
                     </a:solidFill>
                   </a:tcPr>
                 </a:tc>
@@ -4381,7 +4381,7 @@
                       <a:r>
                         <a:rPr sz="1250" b="0">
                           <a:solidFill>
-                            <a:srgbClr val="535C6A"/>
+                            <a:srgbClr val="566573"/>
                           </a:solidFill>
                           <a:latin typeface="Segoe UI"/>
                         </a:rPr>
@@ -4391,7 +4391,7 @@
                   </a:txBody>
                   <a:tcPr anchor="ctr" marL="91440" marR="54864" marT="18288" marB="18288">
                     <a:solidFill>
-                      <a:srgbClr val="F7F9F8"/>
+                      <a:srgbClr val="F6F8FA"/>
                     </a:solidFill>
                   </a:tcPr>
                 </a:tc>
@@ -4441,7 +4441,7 @@
             <a:avLst/>
           </a:prstGeom>
           <a:solidFill>
-            <a:srgbClr val="0E7C74"/>
+            <a:srgbClr val="16324F"/>
           </a:solidFill>
           <a:ln>
             <a:noFill/>
@@ -4500,7 +4500,7 @@
             <a:r>
               <a:rPr sz="1200" b="1">
                 <a:solidFill>
-                  <a:srgbClr val="0E7C74"/>
+                  <a:srgbClr val="16324F"/>
                 </a:solidFill>
                 <a:latin typeface="Segoe UI"/>
               </a:rPr>
@@ -4516,7 +4516,7 @@
             <a:r>
               <a:rPr sz="2500" b="1">
                 <a:solidFill>
-                  <a:srgbClr val="1A1F27"/>
+                  <a:srgbClr val="1C2733"/>
                 </a:solidFill>
                 <a:latin typeface="Segoe UI"/>
               </a:rPr>
@@ -4567,7 +4567,7 @@
                   </a:txBody>
                   <a:tcPr anchor="ctr" marL="91440" marR="54864" marT="18288" marB="18288">
                     <a:solidFill>
-                      <a:srgbClr val="0E7C74"/>
+                      <a:srgbClr val="16324F"/>
                     </a:solidFill>
                   </a:tcPr>
                 </a:tc>
@@ -4589,7 +4589,7 @@
                   </a:txBody>
                   <a:tcPr anchor="ctr" marL="91440" marR="54864" marT="18288" marB="18288">
                     <a:solidFill>
-                      <a:srgbClr val="0E7C74"/>
+                      <a:srgbClr val="16324F"/>
                     </a:solidFill>
                   </a:tcPr>
                 </a:tc>
@@ -4611,7 +4611,7 @@
                   </a:txBody>
                   <a:tcPr anchor="ctr" marL="91440" marR="54864" marT="18288" marB="18288">
                     <a:solidFill>
-                      <a:srgbClr val="0E7C74"/>
+                      <a:srgbClr val="16324F"/>
                     </a:solidFill>
                   </a:tcPr>
                 </a:tc>
@@ -4625,7 +4625,7 @@
                       <a:r>
                         <a:rPr sz="1300" b="1">
                           <a:solidFill>
-                            <a:srgbClr val="1A1F27"/>
+                            <a:srgbClr val="1C2733"/>
                           </a:solidFill>
                           <a:latin typeface="Segoe UI"/>
                         </a:rPr>
@@ -4647,7 +4647,7 @@
                       <a:r>
                         <a:rPr sz="1300" b="0">
                           <a:solidFill>
-                            <a:srgbClr val="535C6A"/>
+                            <a:srgbClr val="566573"/>
                           </a:solidFill>
                           <a:latin typeface="Segoe UI"/>
                         </a:rPr>
@@ -4669,7 +4669,7 @@
                       <a:r>
                         <a:rPr sz="1300" b="0">
                           <a:solidFill>
-                            <a:srgbClr val="535C6A"/>
+                            <a:srgbClr val="566573"/>
                           </a:solidFill>
                           <a:latin typeface="Segoe UI"/>
                         </a:rPr>
@@ -4693,7 +4693,7 @@
                       <a:r>
                         <a:rPr sz="1300" b="1">
                           <a:solidFill>
-                            <a:srgbClr val="1A1F27"/>
+                            <a:srgbClr val="1C2733"/>
                           </a:solidFill>
                           <a:latin typeface="Segoe UI"/>
                         </a:rPr>
@@ -4703,7 +4703,7 @@
                   </a:txBody>
                   <a:tcPr anchor="ctr" marL="91440" marR="54864" marT="18288" marB="18288">
                     <a:solidFill>
-                      <a:srgbClr val="F7F9F8"/>
+                      <a:srgbClr val="F6F8FA"/>
                     </a:solidFill>
                   </a:tcPr>
                 </a:tc>
@@ -4715,7 +4715,7 @@
                       <a:r>
                         <a:rPr sz="1300" b="0">
                           <a:solidFill>
-                            <a:srgbClr val="535C6A"/>
+                            <a:srgbClr val="566573"/>
                           </a:solidFill>
                           <a:latin typeface="Segoe UI"/>
                         </a:rPr>
@@ -4725,7 +4725,7 @@
                   </a:txBody>
                   <a:tcPr anchor="ctr" marL="91440" marR="54864" marT="18288" marB="18288">
                     <a:solidFill>
-                      <a:srgbClr val="F7F9F8"/>
+                      <a:srgbClr val="F6F8FA"/>
                     </a:solidFill>
                   </a:tcPr>
                 </a:tc>
@@ -4737,7 +4737,7 @@
                       <a:r>
                         <a:rPr sz="1300" b="0">
                           <a:solidFill>
-                            <a:srgbClr val="535C6A"/>
+                            <a:srgbClr val="566573"/>
                           </a:solidFill>
                           <a:latin typeface="Segoe UI"/>
                         </a:rPr>
@@ -4747,7 +4747,7 @@
                   </a:txBody>
                   <a:tcPr anchor="ctr" marL="91440" marR="54864" marT="18288" marB="18288">
                     <a:solidFill>
-                      <a:srgbClr val="F7F9F8"/>
+                      <a:srgbClr val="F6F8FA"/>
                     </a:solidFill>
                   </a:tcPr>
                 </a:tc>
@@ -4758,7 +4758,7 @@
       </p:graphicFrame>
       <p:sp>
         <p:nvSpPr>
-          <p:cNvPr id="5" name="Rounded Rectangle 4"/>
+          <p:cNvPr id="5" name="Rectangle 4"/>
           <p:cNvSpPr/>
           <p:nvPr/>
         </p:nvSpPr>
@@ -4767,11 +4767,11 @@
             <a:off x="640080" y="3566160"/>
             <a:ext cx="10927080" cy="914400"/>
           </a:xfrm>
-          <a:prstGeom prst="roundRect">
+          <a:prstGeom prst="rect">
             <a:avLst/>
           </a:prstGeom>
           <a:solidFill>
-            <a:srgbClr val="E1F0EE"/>
+            <a:srgbClr val="EAEEF2"/>
           </a:solidFill>
           <a:ln>
             <a:noFill/>
@@ -4804,7 +4804,7 @@
             <a:r>
               <a:rPr sz="1350" b="1">
                 <a:solidFill>
-                  <a:srgbClr val="0A5B55"/>
+                  <a:srgbClr val="122A42"/>
                 </a:solidFill>
                 <a:latin typeface="Segoe UI"/>
               </a:rPr>
@@ -4815,7 +4815,7 @@
       </p:sp>
       <p:sp>
         <p:nvSpPr>
-          <p:cNvPr id="6" name="Rounded Rectangle 5"/>
+          <p:cNvPr id="6" name="Rectangle 5"/>
           <p:cNvSpPr/>
           <p:nvPr/>
         </p:nvSpPr>
@@ -4824,15 +4824,15 @@
             <a:off x="640080" y="4709160"/>
             <a:ext cx="10927080" cy="1417320"/>
           </a:xfrm>
-          <a:prstGeom prst="roundRect">
+          <a:prstGeom prst="rect">
             <a:avLst/>
           </a:prstGeom>
           <a:solidFill>
-            <a:srgbClr val="E1F0EE"/>
+            <a:srgbClr val="EAEEF2"/>
           </a:solidFill>
           <a:ln w="9525">
             <a:solidFill>
-              <a:srgbClr val="D9DFE5"/>
+              <a:srgbClr val="D5DBE1"/>
             </a:solidFill>
           </a:ln>
           <a:effectLst/>
@@ -4863,7 +4863,7 @@
             <a:r>
               <a:rPr sz="1250" b="1">
                 <a:solidFill>
-                  <a:srgbClr val="0E7C74"/>
+                  <a:srgbClr val="16324F"/>
                 </a:solidFill>
                 <a:latin typeface="Segoe UI"/>
               </a:rPr>
@@ -4879,7 +4879,7 @@
             <a:r>
               <a:rPr sz="1150" b="0">
                 <a:solidFill>
-                  <a:srgbClr val="0A5B55"/>
+                  <a:srgbClr val="122A42"/>
                 </a:solidFill>
                 <a:latin typeface="Segoe UI"/>
               </a:rPr>
@@ -4895,7 +4895,7 @@
             <a:r>
               <a:rPr sz="1150" b="0">
                 <a:solidFill>
-                  <a:srgbClr val="535C6A"/>
+                  <a:srgbClr val="566573"/>
                 </a:solidFill>
                 <a:latin typeface="Segoe UI"/>
               </a:rPr>
@@ -4945,7 +4945,7 @@
             <a:avLst/>
           </a:prstGeom>
           <a:solidFill>
-            <a:srgbClr val="0E7C74"/>
+            <a:srgbClr val="16324F"/>
           </a:solidFill>
           <a:ln>
             <a:noFill/>
@@ -5004,7 +5004,7 @@
             <a:r>
               <a:rPr sz="1200" b="1">
                 <a:solidFill>
-                  <a:srgbClr val="0E7C74"/>
+                  <a:srgbClr val="16324F"/>
                 </a:solidFill>
                 <a:latin typeface="Segoe UI"/>
               </a:rPr>
@@ -5020,7 +5020,7 @@
             <a:r>
               <a:rPr sz="2500" b="1">
                 <a:solidFill>
-                  <a:srgbClr val="1A1F27"/>
+                  <a:srgbClr val="1C2733"/>
                 </a:solidFill>
                 <a:latin typeface="Segoe UI"/>
               </a:rPr>
@@ -5071,7 +5071,7 @@
                   </a:txBody>
                   <a:tcPr anchor="ctr" marL="91440" marR="54864" marT="18288" marB="18288">
                     <a:solidFill>
-                      <a:srgbClr val="0E7C74"/>
+                      <a:srgbClr val="16324F"/>
                     </a:solidFill>
                   </a:tcPr>
                 </a:tc>
@@ -5093,7 +5093,7 @@
                   </a:txBody>
                   <a:tcPr anchor="ctr" marL="91440" marR="54864" marT="18288" marB="18288">
                     <a:solidFill>
-                      <a:srgbClr val="0E7C74"/>
+                      <a:srgbClr val="16324F"/>
                     </a:solidFill>
                   </a:tcPr>
                 </a:tc>
@@ -5115,7 +5115,7 @@
                   </a:txBody>
                   <a:tcPr anchor="ctr" marL="91440" marR="54864" marT="18288" marB="18288">
                     <a:solidFill>
-                      <a:srgbClr val="0E7C74"/>
+                      <a:srgbClr val="16324F"/>
                     </a:solidFill>
                   </a:tcPr>
                 </a:tc>
@@ -5129,7 +5129,7 @@
                       <a:r>
                         <a:rPr sz="1200" b="1">
                           <a:solidFill>
-                            <a:srgbClr val="1A1F27"/>
+                            <a:srgbClr val="1C2733"/>
                           </a:solidFill>
                           <a:latin typeface="Segoe UI"/>
                         </a:rPr>
@@ -5151,7 +5151,7 @@
                       <a:r>
                         <a:rPr sz="1200" b="0">
                           <a:solidFill>
-                            <a:srgbClr val="535C6A"/>
+                            <a:srgbClr val="566573"/>
                           </a:solidFill>
                           <a:latin typeface="Segoe UI"/>
                         </a:rPr>
@@ -5173,7 +5173,7 @@
                       <a:r>
                         <a:rPr sz="1200" b="0">
                           <a:solidFill>
-                            <a:srgbClr val="535C6A"/>
+                            <a:srgbClr val="566573"/>
                           </a:solidFill>
                           <a:latin typeface="Segoe UI"/>
                         </a:rPr>
@@ -5197,7 +5197,7 @@
                       <a:r>
                         <a:rPr sz="1200" b="1">
                           <a:solidFill>
-                            <a:srgbClr val="1A1F27"/>
+                            <a:srgbClr val="1C2733"/>
                           </a:solidFill>
                           <a:latin typeface="Segoe UI"/>
                         </a:rPr>
@@ -5207,7 +5207,7 @@
                   </a:txBody>
                   <a:tcPr anchor="ctr" marL="91440" marR="54864" marT="18288" marB="18288">
                     <a:solidFill>
-                      <a:srgbClr val="F7F9F8"/>
+                      <a:srgbClr val="F6F8FA"/>
                     </a:solidFill>
                   </a:tcPr>
                 </a:tc>
@@ -5219,7 +5219,7 @@
                       <a:r>
                         <a:rPr sz="1200" b="0">
                           <a:solidFill>
-                            <a:srgbClr val="535C6A"/>
+                            <a:srgbClr val="566573"/>
                           </a:solidFill>
                           <a:latin typeface="Segoe UI"/>
                         </a:rPr>
@@ -5229,7 +5229,7 @@
                   </a:txBody>
                   <a:tcPr anchor="ctr" marL="91440" marR="54864" marT="18288" marB="18288">
                     <a:solidFill>
-                      <a:srgbClr val="F7F9F8"/>
+                      <a:srgbClr val="F6F8FA"/>
                     </a:solidFill>
                   </a:tcPr>
                 </a:tc>
@@ -5241,7 +5241,7 @@
                       <a:r>
                         <a:rPr sz="1200" b="0">
                           <a:solidFill>
-                            <a:srgbClr val="535C6A"/>
+                            <a:srgbClr val="566573"/>
                           </a:solidFill>
                           <a:latin typeface="Segoe UI"/>
                         </a:rPr>
@@ -5251,7 +5251,7 @@
                   </a:txBody>
                   <a:tcPr anchor="ctr" marL="91440" marR="54864" marT="18288" marB="18288">
                     <a:solidFill>
-                      <a:srgbClr val="F7F9F8"/>
+                      <a:srgbClr val="F6F8FA"/>
                     </a:solidFill>
                   </a:tcPr>
                 </a:tc>
@@ -5265,7 +5265,7 @@
                       <a:r>
                         <a:rPr sz="1200" b="1">
                           <a:solidFill>
-                            <a:srgbClr val="1A1F27"/>
+                            <a:srgbClr val="1C2733"/>
                           </a:solidFill>
                           <a:latin typeface="Segoe UI"/>
                         </a:rPr>
@@ -5287,7 +5287,7 @@
                       <a:r>
                         <a:rPr sz="1200" b="0">
                           <a:solidFill>
-                            <a:srgbClr val="535C6A"/>
+                            <a:srgbClr val="566573"/>
                           </a:solidFill>
                           <a:latin typeface="Segoe UI"/>
                         </a:rPr>
@@ -5309,7 +5309,7 @@
                       <a:r>
                         <a:rPr sz="1200" b="0">
                           <a:solidFill>
-                            <a:srgbClr val="535C6A"/>
+                            <a:srgbClr val="566573"/>
                           </a:solidFill>
                           <a:latin typeface="Segoe UI"/>
                         </a:rPr>
@@ -5333,7 +5333,7 @@
                       <a:r>
                         <a:rPr sz="1200" b="1">
                           <a:solidFill>
-                            <a:srgbClr val="1A1F27"/>
+                            <a:srgbClr val="1C2733"/>
                           </a:solidFill>
                           <a:latin typeface="Segoe UI"/>
                         </a:rPr>
@@ -5343,7 +5343,7 @@
                   </a:txBody>
                   <a:tcPr anchor="ctr" marL="91440" marR="54864" marT="18288" marB="18288">
                     <a:solidFill>
-                      <a:srgbClr val="F7F9F8"/>
+                      <a:srgbClr val="F6F8FA"/>
                     </a:solidFill>
                   </a:tcPr>
                 </a:tc>
@@ -5355,7 +5355,7 @@
                       <a:r>
                         <a:rPr sz="1200" b="0">
                           <a:solidFill>
-                            <a:srgbClr val="535C6A"/>
+                            <a:srgbClr val="566573"/>
                           </a:solidFill>
                           <a:latin typeface="Segoe UI"/>
                         </a:rPr>
@@ -5365,7 +5365,7 @@
                   </a:txBody>
                   <a:tcPr anchor="ctr" marL="91440" marR="54864" marT="18288" marB="18288">
                     <a:solidFill>
-                      <a:srgbClr val="F7F9F8"/>
+                      <a:srgbClr val="F6F8FA"/>
                     </a:solidFill>
                   </a:tcPr>
                 </a:tc>
@@ -5377,7 +5377,7 @@
                       <a:r>
                         <a:rPr sz="1200" b="0">
                           <a:solidFill>
-                            <a:srgbClr val="535C6A"/>
+                            <a:srgbClr val="566573"/>
                           </a:solidFill>
                           <a:latin typeface="Segoe UI"/>
                         </a:rPr>
@@ -5387,7 +5387,7 @@
                   </a:txBody>
                   <a:tcPr anchor="ctr" marL="91440" marR="54864" marT="18288" marB="18288">
                     <a:solidFill>
-                      <a:srgbClr val="F7F9F8"/>
+                      <a:srgbClr val="F6F8FA"/>
                     </a:solidFill>
                   </a:tcPr>
                 </a:tc>
@@ -5401,7 +5401,7 @@
                       <a:r>
                         <a:rPr sz="1200" b="1">
                           <a:solidFill>
-                            <a:srgbClr val="1A1F27"/>
+                            <a:srgbClr val="1C2733"/>
                           </a:solidFill>
                           <a:latin typeface="Segoe UI"/>
                         </a:rPr>
@@ -5423,7 +5423,7 @@
                       <a:r>
                         <a:rPr sz="1200" b="0">
                           <a:solidFill>
-                            <a:srgbClr val="535C6A"/>
+                            <a:srgbClr val="566573"/>
                           </a:solidFill>
                           <a:latin typeface="Segoe UI"/>
                         </a:rPr>
@@ -5445,7 +5445,7 @@
                       <a:r>
                         <a:rPr sz="1200" b="0">
                           <a:solidFill>
-                            <a:srgbClr val="535C6A"/>
+                            <a:srgbClr val="566573"/>
                           </a:solidFill>
                           <a:latin typeface="Segoe UI"/>
                         </a:rPr>
@@ -5469,7 +5469,7 @@
                       <a:r>
                         <a:rPr sz="1200" b="1">
                           <a:solidFill>
-                            <a:srgbClr val="1A1F27"/>
+                            <a:srgbClr val="1C2733"/>
                           </a:solidFill>
                           <a:latin typeface="Segoe UI"/>
                         </a:rPr>
@@ -5479,7 +5479,7 @@
                   </a:txBody>
                   <a:tcPr anchor="ctr" marL="91440" marR="54864" marT="18288" marB="18288">
                     <a:solidFill>
-                      <a:srgbClr val="F7F9F8"/>
+                      <a:srgbClr val="F6F8FA"/>
                     </a:solidFill>
                   </a:tcPr>
                 </a:tc>
@@ -5491,7 +5491,7 @@
                       <a:r>
                         <a:rPr sz="1200" b="0">
                           <a:solidFill>
-                            <a:srgbClr val="535C6A"/>
+                            <a:srgbClr val="566573"/>
                           </a:solidFill>
                           <a:latin typeface="Segoe UI"/>
                         </a:rPr>
@@ -5501,7 +5501,7 @@
                   </a:txBody>
                   <a:tcPr anchor="ctr" marL="91440" marR="54864" marT="18288" marB="18288">
                     <a:solidFill>
-                      <a:srgbClr val="F7F9F8"/>
+                      <a:srgbClr val="F6F8FA"/>
                     </a:solidFill>
                   </a:tcPr>
                 </a:tc>
@@ -5513,7 +5513,7 @@
                       <a:r>
                         <a:rPr sz="1200" b="0">
                           <a:solidFill>
-                            <a:srgbClr val="535C6A"/>
+                            <a:srgbClr val="566573"/>
                           </a:solidFill>
                           <a:latin typeface="Segoe UI"/>
                         </a:rPr>
@@ -5523,7 +5523,7 @@
                   </a:txBody>
                   <a:tcPr anchor="ctr" marL="91440" marR="54864" marT="18288" marB="18288">
                     <a:solidFill>
-                      <a:srgbClr val="F7F9F8"/>
+                      <a:srgbClr val="F6F8FA"/>
                     </a:solidFill>
                   </a:tcPr>
                 </a:tc>
@@ -5573,7 +5573,7 @@
             <a:avLst/>
           </a:prstGeom>
           <a:solidFill>
-            <a:srgbClr val="0E7C74"/>
+            <a:srgbClr val="16324F"/>
           </a:solidFill>
           <a:ln>
             <a:noFill/>
@@ -5632,7 +5632,7 @@
             <a:r>
               <a:rPr sz="1200" b="1">
                 <a:solidFill>
-                  <a:srgbClr val="0E7C74"/>
+                  <a:srgbClr val="16324F"/>
                 </a:solidFill>
                 <a:latin typeface="Segoe UI"/>
               </a:rPr>
@@ -5648,7 +5648,7 @@
             <a:r>
               <a:rPr sz="2500" b="1">
                 <a:solidFill>
-                  <a:srgbClr val="1A1F27"/>
+                  <a:srgbClr val="1C2733"/>
                 </a:solidFill>
                 <a:latin typeface="Segoe UI"/>
               </a:rPr>
@@ -5687,7 +5687,7 @@
             <a:r>
               <a:rPr sz="1400" b="0">
                 <a:solidFill>
-                  <a:srgbClr val="535C6A"/>
+                  <a:srgbClr val="566573"/>
                 </a:solidFill>
                 <a:latin typeface="Segoe UI"/>
               </a:rPr>
@@ -5726,7 +5726,7 @@
             <a:r>
               <a:rPr sz="1500" b="0">
                 <a:solidFill>
-                  <a:srgbClr val="1A1F27"/>
+                  <a:srgbClr val="1C2733"/>
                 </a:solidFill>
                 <a:latin typeface="Segoe UI"/>
               </a:rPr>
@@ -5742,7 +5742,7 @@
             <a:r>
               <a:rPr sz="1500" b="0">
                 <a:solidFill>
-                  <a:srgbClr val="1A1F27"/>
+                  <a:srgbClr val="1C2733"/>
                 </a:solidFill>
                 <a:latin typeface="Segoe UI"/>
               </a:rPr>
@@ -5758,7 +5758,7 @@
             <a:r>
               <a:rPr sz="1500" b="0">
                 <a:solidFill>
-                  <a:srgbClr val="1A1F27"/>
+                  <a:srgbClr val="1C2733"/>
                 </a:solidFill>
                 <a:latin typeface="Segoe UI"/>
               </a:rPr>
@@ -5774,7 +5774,7 @@
             <a:r>
               <a:rPr sz="1500" b="0">
                 <a:solidFill>
-                  <a:srgbClr val="1A1F27"/>
+                  <a:srgbClr val="1C2733"/>
                 </a:solidFill>
                 <a:latin typeface="Segoe UI"/>
               </a:rPr>
@@ -5790,7 +5790,7 @@
             <a:r>
               <a:rPr sz="1500" b="0">
                 <a:solidFill>
-                  <a:srgbClr val="1A1F27"/>
+                  <a:srgbClr val="1C2733"/>
                 </a:solidFill>
                 <a:latin typeface="Segoe UI"/>
               </a:rPr>
@@ -5801,7 +5801,7 @@
       </p:sp>
       <p:sp>
         <p:nvSpPr>
-          <p:cNvPr id="6" name="Rounded Rectangle 5"/>
+          <p:cNvPr id="6" name="Rectangle 5"/>
           <p:cNvSpPr/>
           <p:nvPr/>
         </p:nvSpPr>
@@ -5810,11 +5810,11 @@
             <a:off x="640080" y="5486400"/>
             <a:ext cx="10927080" cy="822960"/>
           </a:xfrm>
-          <a:prstGeom prst="roundRect">
+          <a:prstGeom prst="rect">
             <a:avLst/>
           </a:prstGeom>
           <a:solidFill>
-            <a:srgbClr val="E4F3EB"/>
+            <a:srgbClr val="E8F0EA"/>
           </a:solidFill>
           <a:ln>
             <a:noFill/>
@@ -5847,7 +5847,7 @@
             <a:r>
               <a:rPr sz="1400" b="1">
                 <a:solidFill>
-                  <a:srgbClr val="2E8B5E"/>
+                  <a:srgbClr val="2F6E4E"/>
                 </a:solidFill>
                 <a:latin typeface="Segoe UI"/>
               </a:rPr>
@@ -5897,7 +5897,7 @@
             <a:avLst/>
           </a:prstGeom>
           <a:solidFill>
-            <a:srgbClr val="0E7C74"/>
+            <a:srgbClr val="16324F"/>
           </a:solidFill>
           <a:ln>
             <a:noFill/>
@@ -5956,7 +5956,7 @@
             <a:r>
               <a:rPr sz="1200" b="1">
                 <a:solidFill>
-                  <a:srgbClr val="0E7C74"/>
+                  <a:srgbClr val="16324F"/>
                 </a:solidFill>
                 <a:latin typeface="Segoe UI"/>
               </a:rPr>
@@ -5972,7 +5972,7 @@
             <a:r>
               <a:rPr sz="2500" b="1">
                 <a:solidFill>
-                  <a:srgbClr val="1A1F27"/>
+                  <a:srgbClr val="1C2733"/>
                 </a:solidFill>
                 <a:latin typeface="Segoe UI"/>
               </a:rPr>
@@ -5983,7 +5983,7 @@
       </p:sp>
       <p:sp>
         <p:nvSpPr>
-          <p:cNvPr id="4" name="Rounded Rectangle 3"/>
+          <p:cNvPr id="4" name="Rectangle 3"/>
           <p:cNvSpPr/>
           <p:nvPr/>
         </p:nvSpPr>
@@ -5992,15 +5992,15 @@
             <a:off x="640080" y="1737360"/>
             <a:ext cx="6126480" cy="4069080"/>
           </a:xfrm>
-          <a:prstGeom prst="roundRect">
+          <a:prstGeom prst="rect">
             <a:avLst/>
           </a:prstGeom>
           <a:solidFill>
-            <a:srgbClr val="F3F1EA"/>
+            <a:srgbClr val="F3F1EC"/>
           </a:solidFill>
           <a:ln w="9525">
             <a:solidFill>
-              <a:srgbClr val="D9DFE5"/>
+              <a:srgbClr val="D5DBE1"/>
             </a:solidFill>
           </a:ln>
           <a:effectLst/>
@@ -6031,7 +6031,7 @@
             <a:r>
               <a:rPr sz="1250" b="1">
                 <a:solidFill>
-                  <a:srgbClr val="0A5B55"/>
+                  <a:srgbClr val="122A42"/>
                 </a:solidFill>
                 <a:latin typeface="Segoe UI"/>
               </a:rPr>
@@ -6047,7 +6047,7 @@
             <a:r>
               <a:rPr sz="1150" b="0">
                 <a:solidFill>
-                  <a:srgbClr val="1A1F27"/>
+                  <a:srgbClr val="1C2733"/>
                 </a:solidFill>
                 <a:latin typeface="Consolas"/>
               </a:rPr>
@@ -6063,7 +6063,7 @@
             <a:r>
               <a:rPr sz="1150" b="0">
                 <a:solidFill>
-                  <a:srgbClr val="1A1F27"/>
+                  <a:srgbClr val="1C2733"/>
                 </a:solidFill>
                 <a:latin typeface="Consolas"/>
               </a:rPr>
@@ -6079,7 +6079,7 @@
             <a:r>
               <a:rPr sz="1150" b="0">
                 <a:solidFill>
-                  <a:srgbClr val="1A1F27"/>
+                  <a:srgbClr val="1C2733"/>
                 </a:solidFill>
                 <a:latin typeface="Consolas"/>
               </a:rPr>
@@ -6095,7 +6095,7 @@
             <a:r>
               <a:rPr sz="1150" b="0">
                 <a:solidFill>
-                  <a:srgbClr val="1A1F27"/>
+                  <a:srgbClr val="1C2733"/>
                 </a:solidFill>
                 <a:latin typeface="Consolas"/>
               </a:rPr>
@@ -6111,7 +6111,7 @@
             <a:r>
               <a:rPr sz="1150" b="0">
                 <a:solidFill>
-                  <a:srgbClr val="1A1F27"/>
+                  <a:srgbClr val="1C2733"/>
                 </a:solidFill>
                 <a:latin typeface="Consolas"/>
               </a:rPr>
@@ -6127,7 +6127,7 @@
             <a:r>
               <a:rPr sz="1150" b="0">
                 <a:solidFill>
-                  <a:srgbClr val="1A1F27"/>
+                  <a:srgbClr val="1C2733"/>
                 </a:solidFill>
                 <a:latin typeface="Consolas"/>
               </a:rPr>
@@ -6143,7 +6143,7 @@
             <a:r>
               <a:rPr sz="1150" b="0">
                 <a:solidFill>
-                  <a:srgbClr val="1A1F27"/>
+                  <a:srgbClr val="1C2733"/>
                 </a:solidFill>
                 <a:latin typeface="Consolas"/>
               </a:rPr>
@@ -6159,7 +6159,7 @@
             <a:r>
               <a:rPr sz="1150" b="0">
                 <a:solidFill>
-                  <a:srgbClr val="1A1F27"/>
+                  <a:srgbClr val="1C2733"/>
                 </a:solidFill>
                 <a:latin typeface="Consolas"/>
               </a:rPr>
@@ -6170,7 +6170,7 @@
       </p:sp>
       <p:sp>
         <p:nvSpPr>
-          <p:cNvPr id="5" name="Rounded Rectangle 4"/>
+          <p:cNvPr id="5" name="Rectangle 4"/>
           <p:cNvSpPr/>
           <p:nvPr/>
         </p:nvSpPr>
@@ -6179,15 +6179,15 @@
             <a:off x="6949440" y="1737360"/>
             <a:ext cx="4617720" cy="4069080"/>
           </a:xfrm>
-          <a:prstGeom prst="roundRect">
+          <a:prstGeom prst="rect">
             <a:avLst/>
           </a:prstGeom>
           <a:solidFill>
-            <a:srgbClr val="E1F0EE"/>
+            <a:srgbClr val="EAEEF2"/>
           </a:solidFill>
           <a:ln w="9525">
             <a:solidFill>
-              <a:srgbClr val="D9DFE5"/>
+              <a:srgbClr val="D5DBE1"/>
             </a:solidFill>
           </a:ln>
           <a:effectLst/>
@@ -6218,7 +6218,7 @@
             <a:r>
               <a:rPr sz="1250" b="1">
                 <a:solidFill>
-                  <a:srgbClr val="0E7C74"/>
+                  <a:srgbClr val="16324F"/>
                 </a:solidFill>
                 <a:latin typeface="Segoe UI"/>
               </a:rPr>
@@ -6234,7 +6234,7 @@
             <a:r>
               <a:rPr sz="1150" b="0">
                 <a:solidFill>
-                  <a:srgbClr val="535C6A"/>
+                  <a:srgbClr val="566573"/>
                 </a:solidFill>
                 <a:latin typeface="Segoe UI"/>
               </a:rPr>
@@ -6250,7 +6250,7 @@
             <a:r>
               <a:rPr sz="1150" b="0">
                 <a:solidFill>
-                  <a:srgbClr val="0A5B55"/>
+                  <a:srgbClr val="122A42"/>
                 </a:solidFill>
                 <a:latin typeface="Consolas"/>
               </a:rPr>
@@ -6266,7 +6266,7 @@
             <a:r>
               <a:rPr sz="1150" b="0">
                 <a:solidFill>
-                  <a:srgbClr val="0A5B55"/>
+                  <a:srgbClr val="122A42"/>
                 </a:solidFill>
                 <a:latin typeface="Consolas"/>
               </a:rPr>
@@ -6282,7 +6282,7 @@
             <a:r>
               <a:rPr sz="1150" b="0">
                 <a:solidFill>
-                  <a:srgbClr val="0A5B55"/>
+                  <a:srgbClr val="122A42"/>
                 </a:solidFill>
                 <a:latin typeface="Consolas"/>
               </a:rPr>
@@ -6298,7 +6298,7 @@
             <a:r>
               <a:rPr sz="1150" b="0">
                 <a:solidFill>
-                  <a:srgbClr val="1A1F27"/>
+                  <a:srgbClr val="1C2733"/>
                 </a:solidFill>
                 <a:latin typeface="Segoe UI"/>
               </a:rPr>
@@ -6314,7 +6314,7 @@
             <a:r>
               <a:rPr sz="1150" b="0">
                 <a:solidFill>
-                  <a:srgbClr val="2E8B5E"/>
+                  <a:srgbClr val="2F6E4E"/>
                 </a:solidFill>
                 <a:latin typeface="Segoe UI"/>
               </a:rPr>
@@ -6330,7 +6330,7 @@
             <a:r>
               <a:rPr sz="1150" b="0">
                 <a:solidFill>
-                  <a:srgbClr val="535C6A"/>
+                  <a:srgbClr val="566573"/>
                 </a:solidFill>
                 <a:latin typeface="Segoe UI"/>
               </a:rPr>
@@ -6346,7 +6346,7 @@
             <a:r>
               <a:rPr sz="1150" b="0">
                 <a:solidFill>
-                  <a:srgbClr val="2E8B5E"/>
+                  <a:srgbClr val="2F6E4E"/>
                 </a:solidFill>
                 <a:latin typeface="Segoe UI"/>
               </a:rPr>
@@ -6362,7 +6362,7 @@
             <a:r>
               <a:rPr sz="1150" b="0">
                 <a:solidFill>
-                  <a:srgbClr val="535C6A"/>
+                  <a:srgbClr val="566573"/>
                 </a:solidFill>
                 <a:latin typeface="Segoe UI"/>
               </a:rPr>
@@ -6373,7 +6373,7 @@
       </p:sp>
       <p:sp>
         <p:nvSpPr>
-          <p:cNvPr id="6" name="Rounded Rectangle 5"/>
+          <p:cNvPr id="6" name="Rectangle 5"/>
           <p:cNvSpPr/>
           <p:nvPr/>
         </p:nvSpPr>
@@ -6382,11 +6382,11 @@
             <a:off x="640080" y="5943600"/>
             <a:ext cx="10927080" cy="749808"/>
           </a:xfrm>
-          <a:prstGeom prst="roundRect">
+          <a:prstGeom prst="rect">
             <a:avLst/>
           </a:prstGeom>
           <a:solidFill>
-            <a:srgbClr val="E1F0EE"/>
+            <a:srgbClr val="EAEEF2"/>
           </a:solidFill>
           <a:ln>
             <a:noFill/>
@@ -6419,7 +6419,7 @@
             <a:r>
               <a:rPr sz="1250" b="1">
                 <a:solidFill>
-                  <a:srgbClr val="0A5B55"/>
+                  <a:srgbClr val="122A42"/>
                 </a:solidFill>
                 <a:latin typeface="Segoe UI"/>
               </a:rPr>
@@ -6469,7 +6469,7 @@
             <a:avLst/>
           </a:prstGeom>
           <a:solidFill>
-            <a:srgbClr val="0E7C74"/>
+            <a:srgbClr val="16324F"/>
           </a:solidFill>
           <a:ln>
             <a:noFill/>
@@ -6528,7 +6528,7 @@
             <a:r>
               <a:rPr sz="1200" b="1">
                 <a:solidFill>
-                  <a:srgbClr val="0E7C74"/>
+                  <a:srgbClr val="16324F"/>
                 </a:solidFill>
                 <a:latin typeface="Segoe UI"/>
               </a:rPr>
@@ -6544,7 +6544,7 @@
             <a:r>
               <a:rPr sz="2500" b="1">
                 <a:solidFill>
-                  <a:srgbClr val="1A1F27"/>
+                  <a:srgbClr val="1C2733"/>
                 </a:solidFill>
                 <a:latin typeface="Segoe UI"/>
               </a:rPr>
@@ -6555,7 +6555,7 @@
       </p:sp>
       <p:sp>
         <p:nvSpPr>
-          <p:cNvPr id="4" name="Rounded Rectangle 3"/>
+          <p:cNvPr id="4" name="Rectangle 3"/>
           <p:cNvSpPr/>
           <p:nvPr/>
         </p:nvSpPr>
@@ -6564,15 +6564,15 @@
             <a:off x="640080" y="1828800"/>
             <a:ext cx="5486400" cy="2286000"/>
           </a:xfrm>
-          <a:prstGeom prst="roundRect">
+          <a:prstGeom prst="rect">
             <a:avLst/>
           </a:prstGeom>
           <a:solidFill>
-            <a:srgbClr val="F6ECD6"/>
+            <a:srgbClr val="F2EBDE"/>
           </a:solidFill>
           <a:ln w="9525">
             <a:solidFill>
-              <a:srgbClr val="D9DFE5"/>
+              <a:srgbClr val="D5DBE1"/>
             </a:solidFill>
           </a:ln>
           <a:effectLst/>
@@ -6603,7 +6603,7 @@
             <a:r>
               <a:rPr sz="1250" b="1">
                 <a:solidFill>
-                  <a:srgbClr val="A96E12"/>
+                  <a:srgbClr val="8A5A1B"/>
                 </a:solidFill>
                 <a:latin typeface="Segoe UI"/>
               </a:rPr>
@@ -6619,7 +6619,7 @@
             <a:r>
               <a:rPr sz="1150" b="0">
                 <a:solidFill>
-                  <a:srgbClr val="535C6A"/>
+                  <a:srgbClr val="566573"/>
                 </a:solidFill>
                 <a:latin typeface="Segoe UI"/>
               </a:rPr>
@@ -6635,7 +6635,7 @@
             <a:r>
               <a:rPr sz="1150" b="0">
                 <a:solidFill>
-                  <a:srgbClr val="535C6A"/>
+                  <a:srgbClr val="566573"/>
                 </a:solidFill>
                 <a:latin typeface="Segoe UI"/>
               </a:rPr>
@@ -6651,7 +6651,7 @@
             <a:r>
               <a:rPr sz="1150" b="0">
                 <a:solidFill>
-                  <a:srgbClr val="535C6A"/>
+                  <a:srgbClr val="566573"/>
                 </a:solidFill>
                 <a:latin typeface="Segoe UI"/>
               </a:rPr>
@@ -6662,7 +6662,7 @@
       </p:sp>
       <p:sp>
         <p:nvSpPr>
-          <p:cNvPr id="5" name="Rounded Rectangle 4"/>
+          <p:cNvPr id="5" name="Rectangle 4"/>
           <p:cNvSpPr/>
           <p:nvPr/>
         </p:nvSpPr>
@@ -6671,15 +6671,15 @@
             <a:off x="6355080" y="1828800"/>
             <a:ext cx="5212080" cy="2286000"/>
           </a:xfrm>
-          <a:prstGeom prst="roundRect">
+          <a:prstGeom prst="rect">
             <a:avLst/>
           </a:prstGeom>
           <a:solidFill>
-            <a:srgbClr val="E4F3EB"/>
+            <a:srgbClr val="E8F0EA"/>
           </a:solidFill>
           <a:ln w="9525">
             <a:solidFill>
-              <a:srgbClr val="D9DFE5"/>
+              <a:srgbClr val="D5DBE1"/>
             </a:solidFill>
           </a:ln>
           <a:effectLst/>
@@ -6710,7 +6710,7 @@
             <a:r>
               <a:rPr sz="1250" b="1">
                 <a:solidFill>
-                  <a:srgbClr val="2E8B5E"/>
+                  <a:srgbClr val="2F6E4E"/>
                 </a:solidFill>
                 <a:latin typeface="Segoe UI"/>
               </a:rPr>
@@ -6726,7 +6726,7 @@
             <a:r>
               <a:rPr sz="1150" b="0">
                 <a:solidFill>
-                  <a:srgbClr val="535C6A"/>
+                  <a:srgbClr val="566573"/>
                 </a:solidFill>
                 <a:latin typeface="Segoe UI"/>
               </a:rPr>
@@ -6742,7 +6742,7 @@
             <a:r>
               <a:rPr sz="1150" b="0">
                 <a:solidFill>
-                  <a:srgbClr val="535C6A"/>
+                  <a:srgbClr val="566573"/>
                 </a:solidFill>
                 <a:latin typeface="Segoe UI"/>
               </a:rPr>
@@ -6758,7 +6758,7 @@
             <a:r>
               <a:rPr sz="1150" b="0">
                 <a:solidFill>
-                  <a:srgbClr val="535C6A"/>
+                  <a:srgbClr val="566573"/>
                 </a:solidFill>
                 <a:latin typeface="Segoe UI"/>
               </a:rPr>
@@ -6808,7 +6808,7 @@
                   </a:txBody>
                   <a:tcPr anchor="ctr" marL="91440" marR="54864" marT="18288" marB="18288">
                     <a:solidFill>
-                      <a:srgbClr val="0E7C74"/>
+                      <a:srgbClr val="16324F"/>
                     </a:solidFill>
                   </a:tcPr>
                 </a:tc>
@@ -6830,7 +6830,7 @@
                   </a:txBody>
                   <a:tcPr anchor="ctr" marL="91440" marR="54864" marT="18288" marB="18288">
                     <a:solidFill>
-                      <a:srgbClr val="0E7C74"/>
+                      <a:srgbClr val="16324F"/>
                     </a:solidFill>
                   </a:tcPr>
                 </a:tc>
@@ -6844,7 +6844,7 @@
                       <a:r>
                         <a:rPr sz="1300" b="0">
                           <a:solidFill>
-                            <a:srgbClr val="535C6A"/>
+                            <a:srgbClr val="566573"/>
                           </a:solidFill>
                           <a:latin typeface="Segoe UI"/>
                         </a:rPr>
@@ -6866,7 +6866,7 @@
                       <a:r>
                         <a:rPr sz="1300" b="0">
                           <a:solidFill>
-                            <a:srgbClr val="535C6A"/>
+                            <a:srgbClr val="566573"/>
                           </a:solidFill>
                           <a:latin typeface="Segoe UI"/>
                         </a:rPr>
@@ -6890,7 +6890,7 @@
                       <a:r>
                         <a:rPr sz="1300" b="0">
                           <a:solidFill>
-                            <a:srgbClr val="535C6A"/>
+                            <a:srgbClr val="566573"/>
                           </a:solidFill>
                           <a:latin typeface="Segoe UI"/>
                         </a:rPr>
@@ -6900,7 +6900,7 @@
                   </a:txBody>
                   <a:tcPr anchor="ctr" marL="91440" marR="54864" marT="18288" marB="18288">
                     <a:solidFill>
-                      <a:srgbClr val="F7F9F8"/>
+                      <a:srgbClr val="F6F8FA"/>
                     </a:solidFill>
                   </a:tcPr>
                 </a:tc>
@@ -6912,7 +6912,7 @@
                       <a:r>
                         <a:rPr sz="1300" b="0">
                           <a:solidFill>
-                            <a:srgbClr val="535C6A"/>
+                            <a:srgbClr val="566573"/>
                           </a:solidFill>
                           <a:latin typeface="Segoe UI"/>
                         </a:rPr>
@@ -6922,7 +6922,7 @@
                   </a:txBody>
                   <a:tcPr anchor="ctr" marL="91440" marR="54864" marT="18288" marB="18288">
                     <a:solidFill>
-                      <a:srgbClr val="F7F9F8"/>
+                      <a:srgbClr val="F6F8FA"/>
                     </a:solidFill>
                   </a:tcPr>
                 </a:tc>
@@ -6936,7 +6936,7 @@
                       <a:r>
                         <a:rPr sz="1300" b="0">
                           <a:solidFill>
-                            <a:srgbClr val="535C6A"/>
+                            <a:srgbClr val="566573"/>
                           </a:solidFill>
                           <a:latin typeface="Segoe UI"/>
                         </a:rPr>
@@ -6958,7 +6958,7 @@
                       <a:r>
                         <a:rPr sz="1300" b="0">
                           <a:solidFill>
-                            <a:srgbClr val="535C6A"/>
+                            <a:srgbClr val="566573"/>
                           </a:solidFill>
                           <a:latin typeface="Segoe UI"/>
                         </a:rPr>
@@ -6982,7 +6982,7 @@
                       <a:r>
                         <a:rPr sz="1300" b="0">
                           <a:solidFill>
-                            <a:srgbClr val="535C6A"/>
+                            <a:srgbClr val="566573"/>
                           </a:solidFill>
                           <a:latin typeface="Segoe UI"/>
                         </a:rPr>
@@ -6992,7 +6992,7 @@
                   </a:txBody>
                   <a:tcPr anchor="ctr" marL="91440" marR="54864" marT="18288" marB="18288">
                     <a:solidFill>
-                      <a:srgbClr val="F7F9F8"/>
+                      <a:srgbClr val="F6F8FA"/>
                     </a:solidFill>
                   </a:tcPr>
                 </a:tc>
@@ -7004,7 +7004,7 @@
                       <a:r>
                         <a:rPr sz="1300" b="0">
                           <a:solidFill>
-                            <a:srgbClr val="535C6A"/>
+                            <a:srgbClr val="566573"/>
                           </a:solidFill>
                           <a:latin typeface="Segoe UI"/>
                         </a:rPr>
@@ -7014,7 +7014,7 @@
                   </a:txBody>
                   <a:tcPr anchor="ctr" marL="91440" marR="54864" marT="18288" marB="18288">
                     <a:solidFill>
-                      <a:srgbClr val="F7F9F8"/>
+                      <a:srgbClr val="F6F8FA"/>
                     </a:solidFill>
                   </a:tcPr>
                 </a:tc>

--- a/usecases/ai_pipeline 2/docs/Responsible_AI_LLMOps.pptx
+++ b/usecases/ai_pipeline 2/docs/Responsible_AI_LLMOps.pptx
@@ -13,6 +13,8 @@
     <p:sldId id="261" r:id="rId12"/>
     <p:sldId id="262" r:id="rId13"/>
     <p:sldId id="263" r:id="rId14"/>
+    <p:sldId id="264" r:id="rId15"/>
+    <p:sldId id="265" r:id="rId16"/>
   </p:sldIdLst>
   <p:sldSz cx="12191695" cy="6858000" type="screen4x3"/>
   <p:notesSz cx="6858000" cy="9144000"/>
@@ -3155,8 +3157,8 @@
         </p:nvSpPr>
         <p:spPr>
           <a:xfrm>
-            <a:off x="731520" y="1874519"/>
-            <a:ext cx="10881360" cy="3108960"/>
+            <a:off x="731520" y="1783080"/>
+            <a:ext cx="10881360" cy="3200400"/>
           </a:xfrm>
           <a:prstGeom prst="rect">
             <a:avLst/>
@@ -3171,17 +3173,49 @@
           <a:p>
             <a:pPr>
               <a:spcAft>
+                <a:spcPts val="1300"/>
+              </a:spcAft>
+            </a:pPr>
+            <a:r>
+              <a:rPr sz="1300" b="1">
+                <a:solidFill>
+                  <a:srgbClr val="16324F"/>
+                </a:solidFill>
+                <a:latin typeface="Segoe UI"/>
+              </a:rPr>
+              <a:t>LLMOps PLATFORM  ·  RESPONSIBLE AI</a:t>
+            </a:r>
+          </a:p>
+          <a:p>
+            <a:pPr>
+              <a:spcAft>
+                <a:spcPts val="0"/>
+              </a:spcAft>
+            </a:pPr>
+            <a:r>
+              <a:rPr sz="3400" b="1">
+                <a:solidFill>
+                  <a:srgbClr val="1C2733"/>
+                </a:solidFill>
+                <a:latin typeface="Segoe UI"/>
+              </a:rPr>
+              <a:t>Responsible AI for the</a:t>
+            </a:r>
+          </a:p>
+          <a:p>
+            <a:pPr>
+              <a:spcAft>
                 <a:spcPts val="1400"/>
               </a:spcAft>
             </a:pPr>
             <a:r>
-              <a:rPr sz="1350" b="1">
-                <a:solidFill>
-                  <a:srgbClr val="16324F"/>
-                </a:solidFill>
-                <a:latin typeface="Segoe UI"/>
-              </a:rPr>
-              <a:t>LLMOps PLATFORM  ·  RESPONSIBLE AI</a:t>
+              <a:rPr sz="3400" b="1">
+                <a:solidFill>
+                  <a:srgbClr val="1C2733"/>
+                </a:solidFill>
+                <a:latin typeface="Segoe UI"/>
+              </a:rPr>
+              <a:t>LLMOps platform</a:t>
             </a:r>
           </a:p>
           <a:p>
@@ -3191,45 +3225,13 @@
               </a:spcAft>
             </a:pPr>
             <a:r>
-              <a:rPr sz="3700" b="1">
-                <a:solidFill>
-                  <a:srgbClr val="1C2733"/>
-                </a:solidFill>
-                <a:latin typeface="Segoe UI"/>
-              </a:rPr>
-              <a:t>Responsible AI for the</a:t>
-            </a:r>
-          </a:p>
-          <a:p>
-            <a:pPr>
-              <a:spcAft>
-                <a:spcPts val="1500"/>
-              </a:spcAft>
-            </a:pPr>
-            <a:r>
-              <a:rPr sz="3700" b="1">
-                <a:solidFill>
-                  <a:srgbClr val="1C2733"/>
-                </a:solidFill>
-                <a:latin typeface="Segoe UI"/>
-              </a:rPr>
-              <a:t>LLMOps platform</a:t>
-            </a:r>
-          </a:p>
-          <a:p>
-            <a:pPr>
-              <a:spcAft>
-                <a:spcPts val="0"/>
-              </a:spcAft>
-            </a:pPr>
-            <a:r>
-              <a:rPr sz="1700" b="0">
+              <a:rPr sz="1600" b="0">
                 <a:solidFill>
                   <a:srgbClr val="566573"/>
                 </a:solidFill>
                 <a:latin typeface="Segoe UI"/>
               </a:rPr>
-              <a:t>The maturity layer that makes every AI use case on the platform trustworthy — shown with the APIX AI pipeline (our first use case) as the example.</a:t>
+              <a:t>What we have today, what Responsible AI adds, and how we'll build it — with the APIX AI pipeline as the example, and real transcripts as reference.</a:t>
             </a:r>
           </a:p>
         </p:txBody>
@@ -3242,7 +3244,7 @@
         </p:nvSpPr>
         <p:spPr>
           <a:xfrm>
-            <a:off x="731520" y="5897880"/>
+            <a:off x="731520" y="5943600"/>
             <a:ext cx="10881360" cy="640080"/>
           </a:xfrm>
           <a:prstGeom prst="rect">
@@ -3268,7 +3270,7 @@
                 </a:solidFill>
                 <a:latin typeface="Segoe UI"/>
               </a:rPr>
-              <a:t>One platform · many use cases · APIX is the first      Fair · Safe · Private · Clear · Human-controlled      9 Sep 2026</a:t>
+              <a:t>For: program &amp; business stakeholders, coaches, and the engineering team      9 Sep 2026</a:t>
             </a:r>
           </a:p>
         </p:txBody>
@@ -3281,7 +3283,7 @@
 </p:sld>
 </file>
 
-<file path=ppt/slides/slide2.xml><?xml version="1.0" encoding="utf-8"?>
+<file path=ppt/slides/slide10.xml><?xml version="1.0" encoding="utf-8"?>
 <p:sld xmlns:a="http://schemas.openxmlformats.org/drawingml/2006/main" xmlns:p="http://schemas.openxmlformats.org/presentationml/2006/main" xmlns:r="http://schemas.openxmlformats.org/officeDocument/2006/relationships">
   <p:cSld>
     <p:bg>
@@ -3351,8 +3353,8 @@
         </p:nvSpPr>
         <p:spPr>
           <a:xfrm>
-            <a:off x="640080" y="365760"/>
-            <a:ext cx="11247120" cy="1234440"/>
+            <a:off x="640080" y="347472"/>
+            <a:ext cx="11247120" cy="1188720"/>
           </a:xfrm>
           <a:prstGeom prst="rect">
             <a:avLst/>
@@ -3377,7 +3379,7 @@
                 </a:solidFill>
                 <a:latin typeface="Segoe UI"/>
               </a:rPr>
-              <a:t>THE FRAME</a:t>
+              <a:t>SUMMARY</a:t>
             </a:r>
           </a:p>
           <a:p>
@@ -3387,13 +3389,13 @@
               </a:spcAft>
             </a:pPr>
             <a:r>
-              <a:rPr sz="2500" b="1">
+              <a:rPr sz="2400" b="1">
                 <a:solidFill>
                   <a:srgbClr val="1C2733"/>
                 </a:solidFill>
                 <a:latin typeface="Segoe UI"/>
               </a:rPr>
-              <a:t>Responsible AI belongs to the platform, not one app</a:t>
+              <a:t>The essentials</a:t>
             </a:r>
           </a:p>
         </p:txBody>
@@ -3406,8 +3408,8 @@
         </p:nvSpPr>
         <p:spPr>
           <a:xfrm>
-            <a:off x="685800" y="1554480"/>
-            <a:ext cx="10881360" cy="548640"/>
+            <a:off x="685800" y="1920240"/>
+            <a:ext cx="10881360" cy="4206240"/>
           </a:xfrm>
           <a:prstGeom prst="rect">
             <a:avLst/>
@@ -3422,352 +3424,97 @@
           <a:p>
             <a:pPr>
               <a:spcAft>
-                <a:spcPts val="0"/>
-              </a:spcAft>
-            </a:pPr>
-            <a:r>
-              <a:rPr sz="1400" b="0">
-                <a:solidFill>
-                  <a:srgbClr val="566573"/>
-                </a:solidFill>
-                <a:latin typeface="Segoe UI"/>
-              </a:rPr>
-              <a:t>The LLMOps platform runs many AI use cases (APIX today; hiring intelligence, agent-assist, quality-scoring next). Responsible AI is a layer added once, on the platform — every use case inherits it.</a:t>
-            </a:r>
-          </a:p>
-        </p:txBody>
-      </p:sp>
-      <p:sp>
-        <p:nvSpPr>
-          <p:cNvPr id="5" name="Rectangle 4"/>
-          <p:cNvSpPr/>
-          <p:nvPr/>
-        </p:nvSpPr>
-        <p:spPr>
-          <a:xfrm>
-            <a:off x="640080" y="2331720"/>
-            <a:ext cx="5486400" cy="3108960"/>
-          </a:xfrm>
-          <a:prstGeom prst="rect">
-            <a:avLst/>
-          </a:prstGeom>
-          <a:solidFill>
-            <a:srgbClr val="EAEEF2"/>
-          </a:solidFill>
-          <a:ln w="9525">
-            <a:solidFill>
-              <a:srgbClr val="D5DBE1"/>
-            </a:solidFill>
-          </a:ln>
-          <a:effectLst/>
-        </p:spPr>
-        <p:style>
-          <a:lnRef idx="1">
-            <a:schemeClr val="accent1"/>
-          </a:lnRef>
-          <a:fillRef idx="3">
-            <a:schemeClr val="accent1"/>
-          </a:fillRef>
-          <a:effectRef idx="2">
-            <a:schemeClr val="accent1"/>
-          </a:effectRef>
-          <a:fontRef idx="minor">
-            <a:schemeClr val="lt1"/>
-          </a:fontRef>
-        </p:style>
-        <p:txBody>
-          <a:bodyPr rtlCol="0" anchor="ctr" wrap="square" lIns="146304" rIns="128016" tIns="118872" bIns="91440"/>
-          <a:lstStyle/>
-          <a:p>
-            <a:pPr algn="ctr">
-              <a:spcAft>
-                <a:spcPts val="700"/>
-              </a:spcAft>
-            </a:pPr>
-            <a:r>
-              <a:rPr sz="1250" b="1">
-                <a:solidFill>
-                  <a:srgbClr val="16324F"/>
-                </a:solidFill>
-                <a:latin typeface="Segoe UI"/>
-              </a:rPr>
-              <a:t>The platform makes AI  WORK</a:t>
-            </a:r>
-          </a:p>
-          <a:p>
-            <a:pPr>
-              <a:spcAft>
-                <a:spcPts val="300"/>
-              </a:spcAft>
-            </a:pPr>
-            <a:r>
-              <a:rPr sz="1150" b="0">
-                <a:solidFill>
-                  <a:srgbClr val="566573"/>
-                </a:solidFill>
-                <a:latin typeface="Segoe UI"/>
-              </a:rPr>
-              <a:t>Runs prompts &amp; models reliably</a:t>
-            </a:r>
-          </a:p>
-          <a:p>
-            <a:pPr>
-              <a:spcAft>
-                <a:spcPts val="300"/>
-              </a:spcAft>
-            </a:pPr>
-            <a:r>
-              <a:rPr sz="1150" b="0">
-                <a:solidFill>
-                  <a:srgbClr val="566573"/>
-                </a:solidFill>
-                <a:latin typeface="Segoe UI"/>
-              </a:rPr>
-              <a:t>Checks quality before release</a:t>
-            </a:r>
-          </a:p>
-          <a:p>
-            <a:pPr>
-              <a:spcAft>
-                <a:spcPts val="300"/>
-              </a:spcAft>
-            </a:pPr>
-            <a:r>
-              <a:rPr sz="1150" b="0">
-                <a:solidFill>
-                  <a:srgbClr val="566573"/>
-                </a:solidFill>
-                <a:latin typeface="Segoe UI"/>
-              </a:rPr>
-              <a:t>Monitors cost, speed, errors</a:t>
-            </a:r>
-          </a:p>
-          <a:p>
-            <a:pPr>
-              <a:spcAft>
-                <a:spcPts val="300"/>
-              </a:spcAft>
-            </a:pPr>
-            <a:r>
-              <a:rPr sz="1150" b="0">
+                <a:spcPts val="1500"/>
+              </a:spcAft>
+            </a:pPr>
+            <a:r>
+              <a:rPr sz="1550" b="0">
                 <a:solidFill>
                   <a:srgbClr val="1C2733"/>
                 </a:solidFill>
                 <a:latin typeface="Segoe UI"/>
               </a:rPr>
-              <a:t/>
-            </a:r>
-          </a:p>
-          <a:p>
-            <a:pPr>
-              <a:spcAft>
-                <a:spcPts val="300"/>
-              </a:spcAft>
-            </a:pPr>
-            <a:r>
-              <a:rPr sz="1150" b="0">
-                <a:solidFill>
-                  <a:srgbClr val="122A42"/>
-                </a:solidFill>
-                <a:latin typeface="Segoe UI"/>
-              </a:rPr>
-              <a:t>→ reliable</a:t>
-            </a:r>
-          </a:p>
-        </p:txBody>
-      </p:sp>
-      <p:sp>
-        <p:nvSpPr>
-          <p:cNvPr id="6" name="Rectangle 5"/>
-          <p:cNvSpPr/>
-          <p:nvPr/>
-        </p:nvSpPr>
-        <p:spPr>
-          <a:xfrm>
-            <a:off x="6355080" y="2331720"/>
-            <a:ext cx="5212080" cy="3108960"/>
-          </a:xfrm>
-          <a:prstGeom prst="rect">
-            <a:avLst/>
-          </a:prstGeom>
-          <a:solidFill>
-            <a:srgbClr val="E8F0EA"/>
-          </a:solidFill>
-          <a:ln w="9525">
-            <a:solidFill>
-              <a:srgbClr val="D5DBE1"/>
-            </a:solidFill>
-          </a:ln>
-          <a:effectLst/>
-        </p:spPr>
-        <p:style>
-          <a:lnRef idx="1">
-            <a:schemeClr val="accent1"/>
-          </a:lnRef>
-          <a:fillRef idx="3">
-            <a:schemeClr val="accent1"/>
-          </a:fillRef>
-          <a:effectRef idx="2">
-            <a:schemeClr val="accent1"/>
-          </a:effectRef>
-          <a:fontRef idx="minor">
-            <a:schemeClr val="lt1"/>
-          </a:fontRef>
-        </p:style>
-        <p:txBody>
-          <a:bodyPr rtlCol="0" anchor="ctr" wrap="square" lIns="146304" rIns="128016" tIns="118872" bIns="91440"/>
-          <a:lstStyle/>
-          <a:p>
-            <a:pPr algn="ctr">
-              <a:spcAft>
-                <a:spcPts val="700"/>
-              </a:spcAft>
-            </a:pPr>
-            <a:r>
-              <a:rPr sz="1250" b="1">
-                <a:solidFill>
-                  <a:srgbClr val="2F6E4E"/>
-                </a:solidFill>
-                <a:latin typeface="Segoe UI"/>
-              </a:rPr>
-              <a:t>Responsible AI makes AI  TRUSTED</a:t>
-            </a:r>
-          </a:p>
-          <a:p>
-            <a:pPr>
-              <a:spcAft>
-                <a:spcPts val="300"/>
-              </a:spcAft>
-            </a:pPr>
-            <a:r>
-              <a:rPr sz="1150" b="0">
-                <a:solidFill>
-                  <a:srgbClr val="566573"/>
-                </a:solidFill>
-                <a:latin typeface="Segoe UI"/>
-              </a:rPr>
-              <a:t>Fair · safe · private</a:t>
-            </a:r>
-          </a:p>
-          <a:p>
-            <a:pPr>
-              <a:spcAft>
-                <a:spcPts val="300"/>
-              </a:spcAft>
-            </a:pPr>
-            <a:r>
-              <a:rPr sz="1150" b="0">
-                <a:solidFill>
-                  <a:srgbClr val="566573"/>
-                </a:solidFill>
-                <a:latin typeface="Segoe UI"/>
-              </a:rPr>
-              <a:t>Explainable &amp; contestable</a:t>
-            </a:r>
-          </a:p>
-          <a:p>
-            <a:pPr>
-              <a:spcAft>
-                <a:spcPts val="300"/>
-              </a:spcAft>
-            </a:pPr>
-            <a:r>
-              <a:rPr sz="1150" b="0">
-                <a:solidFill>
-                  <a:srgbClr val="566573"/>
-                </a:solidFill>
-                <a:latin typeface="Segoe UI"/>
-              </a:rPr>
-              <a:t>Kept under human control</a:t>
-            </a:r>
-          </a:p>
-          <a:p>
-            <a:pPr>
-              <a:spcAft>
-                <a:spcPts val="300"/>
-              </a:spcAft>
-            </a:pPr>
-            <a:r>
-              <a:rPr sz="1150" b="0">
+              <a:t>1.  We have a working LLMOps platform. Responsible AI is the next layer on it.</a:t>
+            </a:r>
+          </a:p>
+          <a:p>
+            <a:pPr>
+              <a:spcAft>
+                <a:spcPts val="1500"/>
+              </a:spcAft>
+            </a:pPr>
+            <a:r>
+              <a:rPr sz="1550" b="0">
                 <a:solidFill>
                   <a:srgbClr val="1C2733"/>
                 </a:solidFill>
                 <a:latin typeface="Segoe UI"/>
               </a:rPr>
-              <a:t/>
-            </a:r>
-          </a:p>
-          <a:p>
-            <a:pPr>
-              <a:spcAft>
-                <a:spcPts val="300"/>
-              </a:spcAft>
-            </a:pPr>
-            <a:r>
-              <a:rPr sz="1150" b="0">
-                <a:solidFill>
-                  <a:srgbClr val="2F6E4E"/>
-                </a:solidFill>
-                <a:latin typeface="Segoe UI"/>
-              </a:rPr>
-              <a:t>→ trustworthy &amp; defensible</a:t>
-            </a:r>
-          </a:p>
-        </p:txBody>
-      </p:sp>
-      <p:sp>
-        <p:nvSpPr>
-          <p:cNvPr id="7" name="Rectangle 6"/>
-          <p:cNvSpPr/>
-          <p:nvPr/>
-        </p:nvSpPr>
-        <p:spPr>
-          <a:xfrm>
-            <a:off x="640080" y="5806440"/>
-            <a:ext cx="10927080" cy="749808"/>
-          </a:xfrm>
-          <a:prstGeom prst="rect">
-            <a:avLst/>
-          </a:prstGeom>
-          <a:solidFill>
-            <a:srgbClr val="EAEEF2"/>
-          </a:solidFill>
-          <a:ln>
-            <a:noFill/>
-          </a:ln>
-          <a:effectLst/>
-        </p:spPr>
-        <p:style>
-          <a:lnRef idx="1">
-            <a:schemeClr val="accent1"/>
-          </a:lnRef>
-          <a:fillRef idx="3">
-            <a:schemeClr val="accent1"/>
-          </a:fillRef>
-          <a:effectRef idx="2">
-            <a:schemeClr val="accent1"/>
-          </a:effectRef>
-          <a:fontRef idx="minor">
-            <a:schemeClr val="lt1"/>
-          </a:fontRef>
-        </p:style>
-        <p:txBody>
-          <a:bodyPr rtlCol="0" anchor="ctr" wrap="square" lIns="201168" rIns="201168"/>
-          <a:lstStyle/>
-          <a:p>
-            <a:pPr algn="ctr">
-              <a:spcAft>
-                <a:spcPts val="0"/>
-              </a:spcAft>
-            </a:pPr>
-            <a:r>
-              <a:rPr sz="1400" b="1">
-                <a:solidFill>
-                  <a:srgbClr val="122A42"/>
-                </a:solidFill>
-                <a:latin typeface="Segoe UI"/>
-              </a:rPr>
-              <a:t>The platform is built. Responsible AI is the next layer — added once and inherited by every use case, APIX included.</a:t>
+              <a:t>2.  It makes AI fair, safe, private, explainable and overseen — proven with checks.</a:t>
+            </a:r>
+          </a:p>
+          <a:p>
+            <a:pPr>
+              <a:spcAft>
+                <a:spcPts val="1500"/>
+              </a:spcAft>
+            </a:pPr>
+            <a:r>
+              <a:rPr sz="1550" b="0">
+                <a:solidFill>
+                  <a:srgbClr val="1C2733"/>
+                </a:solidFill>
+                <a:latin typeface="Segoe UI"/>
+              </a:rPr>
+              <a:t>3.  APIX is the example: it scores people, and already stores evidence + coach review.</a:t>
+            </a:r>
+          </a:p>
+          <a:p>
+            <a:pPr>
+              <a:spcAft>
+                <a:spcPts val="1500"/>
+              </a:spcAft>
+            </a:pPr>
+            <a:r>
+              <a:rPr sz="1550" b="0">
+                <a:solidFill>
+                  <a:srgbClr val="1C2733"/>
+                </a:solidFill>
+                <a:latin typeface="Segoe UI"/>
+              </a:rPr>
+              <a:t>4.  Each Responsible-AI point maps to a real check we can build on the pipeline.</a:t>
+            </a:r>
+          </a:p>
+          <a:p>
+            <a:pPr>
+              <a:spcAft>
+                <a:spcPts val="1500"/>
+              </a:spcAft>
+            </a:pPr>
+            <a:r>
+              <a:rPr sz="1550" b="0">
+                <a:solidFill>
+                  <a:srgbClr val="1C2733"/>
+                </a:solidFill>
+                <a:latin typeface="Segoe UI"/>
+              </a:rPr>
+              <a:t>5.  We start with evidence validators (Phase 1) and grow through fairness, safety, oversight.</a:t>
+            </a:r>
+          </a:p>
+          <a:p>
+            <a:pPr>
+              <a:spcAft>
+                <a:spcPts val="1500"/>
+              </a:spcAft>
+            </a:pPr>
+            <a:r>
+              <a:rPr sz="1550" b="0">
+                <a:solidFill>
+                  <a:srgbClr val="1C2733"/>
+                </a:solidFill>
+                <a:latin typeface="Segoe UI"/>
+              </a:rPr>
+              <a:t>6.  Clear owners: coaches, engineers, managers, compliance — and the agents it affects.</a:t>
             </a:r>
           </a:p>
         </p:txBody>
@@ -3780,7 +3527,7 @@
 </p:sld>
 </file>
 
-<file path=ppt/slides/slide3.xml><?xml version="1.0" encoding="utf-8"?>
+<file path=ppt/slides/slide2.xml><?xml version="1.0" encoding="utf-8"?>
 <p:sld xmlns:a="http://schemas.openxmlformats.org/drawingml/2006/main" xmlns:p="http://schemas.openxmlformats.org/presentationml/2006/main" xmlns:r="http://schemas.openxmlformats.org/officeDocument/2006/relationships">
   <p:cSld>
     <p:bg>
@@ -3850,8 +3597,8 @@
         </p:nvSpPr>
         <p:spPr>
           <a:xfrm>
-            <a:off x="640080" y="365760"/>
-            <a:ext cx="11247120" cy="1234440"/>
+            <a:off x="640080" y="347472"/>
+            <a:ext cx="11247120" cy="1188720"/>
           </a:xfrm>
           <a:prstGeom prst="rect">
             <a:avLst/>
@@ -3876,7 +3623,7 @@
                 </a:solidFill>
                 <a:latin typeface="Segoe UI"/>
               </a:rPr>
-              <a:t>WHAT IT IS</a:t>
+              <a:t>THE STARTING POINT</a:t>
             </a:r>
           </a:p>
           <a:p>
@@ -3886,520 +3633,480 @@
               </a:spcAft>
             </a:pPr>
             <a:r>
-              <a:rPr sz="2500" b="1">
+              <a:rPr sz="2400" b="1">
                 <a:solidFill>
                   <a:srgbClr val="1C2733"/>
                 </a:solidFill>
                 <a:latin typeface="Segoe UI"/>
               </a:rPr>
-              <a:t>Six commitments — with an example in a use case</a:t>
-            </a:r>
-          </a:p>
-        </p:txBody>
-      </p:sp>
-      <p:graphicFrame>
-        <p:nvGraphicFramePr>
-          <p:cNvPr id="4" name="Table 3"/>
-          <p:cNvGraphicFramePr>
-            <a:graphicFrameLocks noGrp="1"/>
-          </p:cNvGraphicFramePr>
+              <a:t>What we have today — and what Responsible AI adds</a:t>
+            </a:r>
+          </a:p>
+        </p:txBody>
+      </p:sp>
+      <p:sp>
+        <p:nvSpPr>
+          <p:cNvPr id="4" name="Rectangle 3"/>
+          <p:cNvSpPr/>
           <p:nvPr/>
-        </p:nvGraphicFramePr>
-        <p:xfrm>
-          <a:off x="640080" y="1828800"/>
-          <a:ext cx="10927080" cy="4224528"/>
-        </p:xfrm>
-        <a:graphic>
-          <a:graphicData uri="http://schemas.openxmlformats.org/drawingml/2006/table">
-            <a:tbl>
-              <a:tblPr firstRow="1">
-                <a:tableStyleId>{5C22544A-7EE6-4342-B048-85BDC9FD1C3A}</a:tableStyleId>
-              </a:tblPr>
-              <a:tblGrid>
-                <a:gridCol w="2286000"/>
-                <a:gridCol w="4023360"/>
-                <a:gridCol w="4617720"/>
-              </a:tblGrid>
-              <a:tr h="603504">
-                <a:tc>
-                  <a:txBody>
-                    <a:bodyPr wrap="square"/>
-                    <a:lstStyle/>
-                    <a:p>
-                      <a:r>
-                        <a:rPr sz="1100" b="1">
-                          <a:solidFill>
-                            <a:srgbClr val="FFFFFF"/>
-                          </a:solidFill>
-                          <a:latin typeface="Segoe UI"/>
-                        </a:rPr>
-                        <a:t>Commitment</a:t>
-                      </a:r>
-                    </a:p>
-                  </a:txBody>
-                  <a:tcPr anchor="ctr" marL="91440" marR="54864" marT="18288" marB="18288">
-                    <a:solidFill>
-                      <a:srgbClr val="16324F"/>
-                    </a:solidFill>
-                  </a:tcPr>
-                </a:tc>
-                <a:tc>
-                  <a:txBody>
-                    <a:bodyPr wrap="square"/>
-                    <a:lstStyle/>
-                    <a:p>
-                      <a:r>
-                        <a:rPr sz="1100" b="1">
-                          <a:solidFill>
-                            <a:srgbClr val="FFFFFF"/>
-                          </a:solidFill>
-                          <a:latin typeface="Segoe UI"/>
-                        </a:rPr>
-                        <a:t>In plain words</a:t>
-                      </a:r>
-                    </a:p>
-                  </a:txBody>
-                  <a:tcPr anchor="ctr" marL="91440" marR="54864" marT="18288" marB="18288">
-                    <a:solidFill>
-                      <a:srgbClr val="16324F"/>
-                    </a:solidFill>
-                  </a:tcPr>
-                </a:tc>
-                <a:tc>
-                  <a:txBody>
-                    <a:bodyPr wrap="square"/>
-                    <a:lstStyle/>
-                    <a:p>
-                      <a:r>
-                        <a:rPr sz="1100" b="1">
-                          <a:solidFill>
-                            <a:srgbClr val="FFFFFF"/>
-                          </a:solidFill>
-                          <a:latin typeface="Segoe UI"/>
-                        </a:rPr>
-                        <a:t>Example (in APIX)</a:t>
-                      </a:r>
-                    </a:p>
-                  </a:txBody>
-                  <a:tcPr anchor="ctr" marL="91440" marR="54864" marT="18288" marB="18288">
-                    <a:solidFill>
-                      <a:srgbClr val="16324F"/>
-                    </a:solidFill>
-                  </a:tcPr>
-                </a:tc>
-              </a:tr>
-              <a:tr h="603504">
-                <a:tc>
-                  <a:txBody>
-                    <a:bodyPr wrap="square"/>
-                    <a:lstStyle/>
-                    <a:p>
-                      <a:r>
-                        <a:rPr sz="1250" b="1">
-                          <a:solidFill>
-                            <a:srgbClr val="1C2733"/>
-                          </a:solidFill>
-                          <a:latin typeface="Segoe UI"/>
-                        </a:rPr>
-                        <a:t>Fairness</a:t>
-                      </a:r>
-                    </a:p>
-                  </a:txBody>
-                  <a:tcPr anchor="ctr" marL="91440" marR="54864" marT="18288" marB="18288">
-                    <a:solidFill>
-                      <a:srgbClr val="FFFFFF"/>
-                    </a:solidFill>
-                  </a:tcPr>
-                </a:tc>
-                <a:tc>
-                  <a:txBody>
-                    <a:bodyPr wrap="square"/>
-                    <a:lstStyle/>
-                    <a:p>
-                      <a:r>
-                        <a:rPr sz="1250" b="0">
-                          <a:solidFill>
-                            <a:srgbClr val="566573"/>
-                          </a:solidFill>
-                          <a:latin typeface="Segoe UI"/>
-                        </a:rPr>
-                        <a:t>Treats people evenly, no hidden bias</a:t>
-                      </a:r>
-                    </a:p>
-                  </a:txBody>
-                  <a:tcPr anchor="ctr" marL="91440" marR="54864" marT="18288" marB="18288">
-                    <a:solidFill>
-                      <a:srgbClr val="FFFFFF"/>
-                    </a:solidFill>
-                  </a:tcPr>
-                </a:tc>
-                <a:tc>
-                  <a:txBody>
-                    <a:bodyPr wrap="square"/>
-                    <a:lstStyle/>
-                    <a:p>
-                      <a:r>
-                        <a:rPr sz="1250" b="0">
-                          <a:solidFill>
-                            <a:srgbClr val="566573"/>
-                          </a:solidFill>
-                          <a:latin typeface="Segoe UI"/>
-                        </a:rPr>
-                        <a:t>Scores don't penalise accented agents</a:t>
-                      </a:r>
-                    </a:p>
-                  </a:txBody>
-                  <a:tcPr anchor="ctr" marL="91440" marR="54864" marT="18288" marB="18288">
-                    <a:solidFill>
-                      <a:srgbClr val="FFFFFF"/>
-                    </a:solidFill>
-                  </a:tcPr>
-                </a:tc>
-              </a:tr>
-              <a:tr h="603504">
-                <a:tc>
-                  <a:txBody>
-                    <a:bodyPr wrap="square"/>
-                    <a:lstStyle/>
-                    <a:p>
-                      <a:r>
-                        <a:rPr sz="1250" b="1">
-                          <a:solidFill>
-                            <a:srgbClr val="1C2733"/>
-                          </a:solidFill>
-                          <a:latin typeface="Segoe UI"/>
-                        </a:rPr>
-                        <a:t>Safety &amp; reliability</a:t>
-                      </a:r>
-                    </a:p>
-                  </a:txBody>
-                  <a:tcPr anchor="ctr" marL="91440" marR="54864" marT="18288" marB="18288">
-                    <a:solidFill>
-                      <a:srgbClr val="F6F8FA"/>
-                    </a:solidFill>
-                  </a:tcPr>
-                </a:tc>
-                <a:tc>
-                  <a:txBody>
-                    <a:bodyPr wrap="square"/>
-                    <a:lstStyle/>
-                    <a:p>
-                      <a:r>
-                        <a:rPr sz="1250" b="0">
-                          <a:solidFill>
-                            <a:srgbClr val="566573"/>
-                          </a:solidFill>
-                          <a:latin typeface="Segoe UI"/>
-                        </a:rPr>
-                        <a:t>Catches unsafe or wrong outputs</a:t>
-                      </a:r>
-                    </a:p>
-                  </a:txBody>
-                  <a:tcPr anchor="ctr" marL="91440" marR="54864" marT="18288" marB="18288">
-                    <a:solidFill>
-                      <a:srgbClr val="F6F8FA"/>
-                    </a:solidFill>
-                  </a:tcPr>
-                </a:tc>
-                <a:tc>
-                  <a:txBody>
-                    <a:bodyPr wrap="square"/>
-                    <a:lstStyle/>
-                    <a:p>
-                      <a:r>
-                        <a:rPr sz="1250" b="0">
-                          <a:solidFill>
-                            <a:srgbClr val="566573"/>
-                          </a:solidFill>
-                          <a:latin typeface="Segoe UI"/>
-                        </a:rPr>
-                        <a:t>An offensive output is flagged, not shown</a:t>
-                      </a:r>
-                    </a:p>
-                  </a:txBody>
-                  <a:tcPr anchor="ctr" marL="91440" marR="54864" marT="18288" marB="18288">
-                    <a:solidFill>
-                      <a:srgbClr val="F6F8FA"/>
-                    </a:solidFill>
-                  </a:tcPr>
-                </a:tc>
-              </a:tr>
-              <a:tr h="603504">
-                <a:tc>
-                  <a:txBody>
-                    <a:bodyPr wrap="square"/>
-                    <a:lstStyle/>
-                    <a:p>
-                      <a:r>
-                        <a:rPr sz="1250" b="1">
-                          <a:solidFill>
-                            <a:srgbClr val="1C2733"/>
-                          </a:solidFill>
-                          <a:latin typeface="Segoe UI"/>
-                        </a:rPr>
-                        <a:t>Privacy &amp; security</a:t>
-                      </a:r>
-                    </a:p>
-                  </a:txBody>
-                  <a:tcPr anchor="ctr" marL="91440" marR="54864" marT="18288" marB="18288">
-                    <a:solidFill>
-                      <a:srgbClr val="FFFFFF"/>
-                    </a:solidFill>
-                  </a:tcPr>
-                </a:tc>
-                <a:tc>
-                  <a:txBody>
-                    <a:bodyPr wrap="square"/>
-                    <a:lstStyle/>
-                    <a:p>
-                      <a:r>
-                        <a:rPr sz="1250" b="0">
-                          <a:solidFill>
-                            <a:srgbClr val="566573"/>
-                          </a:solidFill>
-                          <a:latin typeface="Segoe UI"/>
-                        </a:rPr>
-                        <a:t>Protects personal information</a:t>
-                      </a:r>
-                    </a:p>
-                  </a:txBody>
-                  <a:tcPr anchor="ctr" marL="91440" marR="54864" marT="18288" marB="18288">
-                    <a:solidFill>
-                      <a:srgbClr val="FFFFFF"/>
-                    </a:solidFill>
-                  </a:tcPr>
-                </a:tc>
-                <a:tc>
-                  <a:txBody>
-                    <a:bodyPr wrap="square"/>
-                    <a:lstStyle/>
-                    <a:p>
-                      <a:r>
-                        <a:rPr sz="1250" b="0">
-                          <a:solidFill>
-                            <a:srgbClr val="566573"/>
-                          </a:solidFill>
-                          <a:latin typeface="Segoe UI"/>
-                        </a:rPr>
-                        <a:t>A card number in a call is shielded</a:t>
-                      </a:r>
-                    </a:p>
-                  </a:txBody>
-                  <a:tcPr anchor="ctr" marL="91440" marR="54864" marT="18288" marB="18288">
-                    <a:solidFill>
-                      <a:srgbClr val="FFFFFF"/>
-                    </a:solidFill>
-                  </a:tcPr>
-                </a:tc>
-              </a:tr>
-              <a:tr h="603504">
-                <a:tc>
-                  <a:txBody>
-                    <a:bodyPr wrap="square"/>
-                    <a:lstStyle/>
-                    <a:p>
-                      <a:r>
-                        <a:rPr sz="1250" b="1">
-                          <a:solidFill>
-                            <a:srgbClr val="1C2733"/>
-                          </a:solidFill>
-                          <a:latin typeface="Segoe UI"/>
-                        </a:rPr>
-                        <a:t>Transparency</a:t>
-                      </a:r>
-                    </a:p>
-                  </a:txBody>
-                  <a:tcPr anchor="ctr" marL="91440" marR="54864" marT="18288" marB="18288">
-                    <a:solidFill>
-                      <a:srgbClr val="F6F8FA"/>
-                    </a:solidFill>
-                  </a:tcPr>
-                </a:tc>
-                <a:tc>
-                  <a:txBody>
-                    <a:bodyPr wrap="square"/>
-                    <a:lstStyle/>
-                    <a:p>
-                      <a:r>
-                        <a:rPr sz="1250" b="0">
-                          <a:solidFill>
-                            <a:srgbClr val="566573"/>
-                          </a:solidFill>
-                          <a:latin typeface="Segoe UI"/>
-                        </a:rPr>
-                        <a:t>Explains why it produced a result</a:t>
-                      </a:r>
-                    </a:p>
-                  </a:txBody>
-                  <a:tcPr anchor="ctr" marL="91440" marR="54864" marT="18288" marB="18288">
-                    <a:solidFill>
-                      <a:srgbClr val="F6F8FA"/>
-                    </a:solidFill>
-                  </a:tcPr>
-                </a:tc>
-                <a:tc>
-                  <a:txBody>
-                    <a:bodyPr wrap="square"/>
-                    <a:lstStyle/>
-                    <a:p>
-                      <a:r>
-                        <a:rPr sz="1250" b="0">
-                          <a:solidFill>
-                            <a:srgbClr val="566573"/>
-                          </a:solidFill>
-                          <a:latin typeface="Segoe UI"/>
-                        </a:rPr>
-                        <a:t>Each score links to the exact call moments</a:t>
-                      </a:r>
-                    </a:p>
-                  </a:txBody>
-                  <a:tcPr anchor="ctr" marL="91440" marR="54864" marT="18288" marB="18288">
-                    <a:solidFill>
-                      <a:srgbClr val="F6F8FA"/>
-                    </a:solidFill>
-                  </a:tcPr>
-                </a:tc>
-              </a:tr>
-              <a:tr h="603504">
-                <a:tc>
-                  <a:txBody>
-                    <a:bodyPr wrap="square"/>
-                    <a:lstStyle/>
-                    <a:p>
-                      <a:r>
-                        <a:rPr sz="1250" b="1">
-                          <a:solidFill>
-                            <a:srgbClr val="1C2733"/>
-                          </a:solidFill>
-                          <a:latin typeface="Segoe UI"/>
-                        </a:rPr>
-                        <a:t>Human oversight</a:t>
-                      </a:r>
-                    </a:p>
-                  </a:txBody>
-                  <a:tcPr anchor="ctr" marL="91440" marR="54864" marT="18288" marB="18288">
-                    <a:solidFill>
-                      <a:srgbClr val="FFFFFF"/>
-                    </a:solidFill>
-                  </a:tcPr>
-                </a:tc>
-                <a:tc>
-                  <a:txBody>
-                    <a:bodyPr wrap="square"/>
-                    <a:lstStyle/>
-                    <a:p>
-                      <a:r>
-                        <a:rPr sz="1250" b="0">
-                          <a:solidFill>
-                            <a:srgbClr val="566573"/>
-                          </a:solidFill>
-                          <a:latin typeface="Segoe UI"/>
-                        </a:rPr>
-                        <a:t>People stay in control</a:t>
-                      </a:r>
-                    </a:p>
-                  </a:txBody>
-                  <a:tcPr anchor="ctr" marL="91440" marR="54864" marT="18288" marB="18288">
-                    <a:solidFill>
-                      <a:srgbClr val="FFFFFF"/>
-                    </a:solidFill>
-                  </a:tcPr>
-                </a:tc>
-                <a:tc>
-                  <a:txBody>
-                    <a:bodyPr wrap="square"/>
-                    <a:lstStyle/>
-                    <a:p>
-                      <a:r>
-                        <a:rPr sz="1250" b="0">
-                          <a:solidFill>
-                            <a:srgbClr val="566573"/>
-                          </a:solidFill>
-                          <a:latin typeface="Segoe UI"/>
-                        </a:rPr>
-                        <a:t>A coach reviews before it reaches the agent</a:t>
-                      </a:r>
-                    </a:p>
-                  </a:txBody>
-                  <a:tcPr anchor="ctr" marL="91440" marR="54864" marT="18288" marB="18288">
-                    <a:solidFill>
-                      <a:srgbClr val="FFFFFF"/>
-                    </a:solidFill>
-                  </a:tcPr>
-                </a:tc>
-              </a:tr>
-              <a:tr h="603504">
-                <a:tc>
-                  <a:txBody>
-                    <a:bodyPr wrap="square"/>
-                    <a:lstStyle/>
-                    <a:p>
-                      <a:r>
-                        <a:rPr sz="1250" b="1">
-                          <a:solidFill>
-                            <a:srgbClr val="1C2733"/>
-                          </a:solidFill>
-                          <a:latin typeface="Segoe UI"/>
-                        </a:rPr>
-                        <a:t>Evidence-based</a:t>
-                      </a:r>
-                    </a:p>
-                  </a:txBody>
-                  <a:tcPr anchor="ctr" marL="91440" marR="54864" marT="18288" marB="18288">
-                    <a:solidFill>
-                      <a:srgbClr val="F6F8FA"/>
-                    </a:solidFill>
-                  </a:tcPr>
-                </a:tc>
-                <a:tc>
-                  <a:txBody>
-                    <a:bodyPr wrap="square"/>
-                    <a:lstStyle/>
-                    <a:p>
-                      <a:r>
-                        <a:rPr sz="1250" b="0">
-                          <a:solidFill>
-                            <a:srgbClr val="566573"/>
-                          </a:solidFill>
-                          <a:latin typeface="Segoe UI"/>
-                        </a:rPr>
-                        <a:t>Backed by real information</a:t>
-                      </a:r>
-                    </a:p>
-                  </a:txBody>
-                  <a:tcPr anchor="ctr" marL="91440" marR="54864" marT="18288" marB="18288">
-                    <a:solidFill>
-                      <a:srgbClr val="F6F8FA"/>
-                    </a:solidFill>
-                  </a:tcPr>
-                </a:tc>
-                <a:tc>
-                  <a:txBody>
-                    <a:bodyPr wrap="square"/>
-                    <a:lstStyle/>
-                    <a:p>
-                      <a:r>
-                        <a:rPr sz="1250" b="0">
-                          <a:solidFill>
-                            <a:srgbClr val="566573"/>
-                          </a:solidFill>
-                          <a:latin typeface="Segoe UI"/>
-                        </a:rPr>
-                        <a:t>A coaching tip must cite the call</a:t>
-                      </a:r>
-                    </a:p>
-                  </a:txBody>
-                  <a:tcPr anchor="ctr" marL="91440" marR="54864" marT="18288" marB="18288">
-                    <a:solidFill>
-                      <a:srgbClr val="F6F8FA"/>
-                    </a:solidFill>
-                  </a:tcPr>
-                </a:tc>
-              </a:tr>
-            </a:tbl>
-          </a:graphicData>
-        </a:graphic>
-      </p:graphicFrame>
+        </p:nvSpPr>
+        <p:spPr>
+          <a:xfrm>
+            <a:off x="640080" y="1737360"/>
+            <a:ext cx="5486400" cy="4114800"/>
+          </a:xfrm>
+          <a:prstGeom prst="rect">
+            <a:avLst/>
+          </a:prstGeom>
+          <a:solidFill>
+            <a:srgbClr val="EAEEF2"/>
+          </a:solidFill>
+          <a:ln w="9525">
+            <a:solidFill>
+              <a:srgbClr val="D5DBE1"/>
+            </a:solidFill>
+          </a:ln>
+          <a:effectLst/>
+        </p:spPr>
+        <p:style>
+          <a:lnRef idx="1">
+            <a:schemeClr val="accent1"/>
+          </a:lnRef>
+          <a:fillRef idx="3">
+            <a:schemeClr val="accent1"/>
+          </a:fillRef>
+          <a:effectRef idx="2">
+            <a:schemeClr val="accent1"/>
+          </a:effectRef>
+          <a:fontRef idx="minor">
+            <a:schemeClr val="lt1"/>
+          </a:fontRef>
+        </p:style>
+        <p:txBody>
+          <a:bodyPr rtlCol="0" anchor="ctr" wrap="square" lIns="146304" rIns="118872" tIns="118872" bIns="73152"/>
+          <a:lstStyle/>
+          <a:p>
+            <a:pPr algn="ctr">
+              <a:spcAft>
+                <a:spcPts val="700"/>
+              </a:spcAft>
+            </a:pPr>
+            <a:r>
+              <a:rPr sz="1250" b="1">
+                <a:solidFill>
+                  <a:srgbClr val="16324F"/>
+                </a:solidFill>
+                <a:latin typeface="Segoe UI"/>
+              </a:rPr>
+              <a:t>TODAY · THE LLMOps PLATFORM</a:t>
+            </a:r>
+          </a:p>
+          <a:p>
+            <a:pPr>
+              <a:spcAft>
+                <a:spcPts val="300"/>
+              </a:spcAft>
+            </a:pPr>
+            <a:r>
+              <a:rPr sz="1150" b="0">
+                <a:solidFill>
+                  <a:srgbClr val="566573"/>
+                </a:solidFill>
+                <a:latin typeface="Segoe UI"/>
+              </a:rPr>
+              <a:t>Prompt management (versioned prompts)</a:t>
+            </a:r>
+          </a:p>
+          <a:p>
+            <a:pPr>
+              <a:spcAft>
+                <a:spcPts val="300"/>
+              </a:spcAft>
+            </a:pPr>
+            <a:r>
+              <a:rPr sz="1150" b="0">
+                <a:solidFill>
+                  <a:srgbClr val="566573"/>
+                </a:solidFill>
+                <a:latin typeface="Segoe UI"/>
+              </a:rPr>
+              <a:t>Model management (models by config)</a:t>
+            </a:r>
+          </a:p>
+          <a:p>
+            <a:pPr>
+              <a:spcAft>
+                <a:spcPts val="300"/>
+              </a:spcAft>
+            </a:pPr>
+            <a:r>
+              <a:rPr sz="1150" b="0">
+                <a:solidFill>
+                  <a:srgbClr val="566573"/>
+                </a:solidFill>
+                <a:latin typeface="Segoe UI"/>
+              </a:rPr>
+              <a:t>Evaluation gate (quality before release)</a:t>
+            </a:r>
+          </a:p>
+          <a:p>
+            <a:pPr>
+              <a:spcAft>
+                <a:spcPts val="300"/>
+              </a:spcAft>
+            </a:pPr>
+            <a:r>
+              <a:rPr sz="1150" b="0">
+                <a:solidFill>
+                  <a:srgbClr val="566573"/>
+                </a:solidFill>
+                <a:latin typeface="Segoe UI"/>
+              </a:rPr>
+              <a:t>Monitoring (cost, speed, errors)</a:t>
+            </a:r>
+          </a:p>
+          <a:p>
+            <a:pPr>
+              <a:spcAft>
+                <a:spcPts val="300"/>
+              </a:spcAft>
+            </a:pPr>
+            <a:r>
+              <a:rPr sz="1150" b="0">
+                <a:solidFill>
+                  <a:srgbClr val="566573"/>
+                </a:solidFill>
+                <a:latin typeface="Segoe UI"/>
+              </a:rPr>
+              <a:t>Guardrails (PII detection, audit)</a:t>
+            </a:r>
+          </a:p>
+          <a:p>
+            <a:pPr>
+              <a:spcAft>
+                <a:spcPts val="300"/>
+              </a:spcAft>
+            </a:pPr>
+            <a:r>
+              <a:rPr sz="1150" b="0">
+                <a:solidFill>
+                  <a:srgbClr val="566573"/>
+                </a:solidFill>
+                <a:latin typeface="Segoe UI"/>
+              </a:rPr>
+              <a:t>Feedback loop (user ratings)</a:t>
+            </a:r>
+          </a:p>
+          <a:p>
+            <a:pPr>
+              <a:spcAft>
+                <a:spcPts val="300"/>
+              </a:spcAft>
+            </a:pPr>
+            <a:r>
+              <a:rPr sz="1150" b="0">
+                <a:solidFill>
+                  <a:srgbClr val="566573"/>
+                </a:solidFill>
+                <a:latin typeface="Segoe UI"/>
+              </a:rPr>
+              <a:t>Operational controls (limits, retries)</a:t>
+            </a:r>
+          </a:p>
+          <a:p>
+            <a:pPr>
+              <a:spcAft>
+                <a:spcPts val="300"/>
+              </a:spcAft>
+            </a:pPr>
+            <a:r>
+              <a:rPr sz="1150" b="0">
+                <a:solidFill>
+                  <a:srgbClr val="1C2733"/>
+                </a:solidFill>
+                <a:latin typeface="Segoe UI"/>
+              </a:rPr>
+              <a:t/>
+            </a:r>
+          </a:p>
+          <a:p>
+            <a:pPr>
+              <a:spcAft>
+                <a:spcPts val="300"/>
+              </a:spcAft>
+            </a:pPr>
+            <a:r>
+              <a:rPr sz="1150" b="0">
+                <a:solidFill>
+                  <a:srgbClr val="122A42"/>
+                </a:solidFill>
+                <a:latin typeface="Segoe UI"/>
+              </a:rPr>
+              <a:t>Summary: makes AI use cases run reliably.</a:t>
+            </a:r>
+          </a:p>
+        </p:txBody>
+      </p:sp>
+      <p:sp>
+        <p:nvSpPr>
+          <p:cNvPr id="5" name="Rectangle 4"/>
+          <p:cNvSpPr/>
+          <p:nvPr/>
+        </p:nvSpPr>
+        <p:spPr>
+          <a:xfrm>
+            <a:off x="6355080" y="1737360"/>
+            <a:ext cx="5212080" cy="4114800"/>
+          </a:xfrm>
+          <a:prstGeom prst="rect">
+            <a:avLst/>
+          </a:prstGeom>
+          <a:solidFill>
+            <a:srgbClr val="E8F0EA"/>
+          </a:solidFill>
+          <a:ln w="9525">
+            <a:solidFill>
+              <a:srgbClr val="D5DBE1"/>
+            </a:solidFill>
+          </a:ln>
+          <a:effectLst/>
+        </p:spPr>
+        <p:style>
+          <a:lnRef idx="1">
+            <a:schemeClr val="accent1"/>
+          </a:lnRef>
+          <a:fillRef idx="3">
+            <a:schemeClr val="accent1"/>
+          </a:fillRef>
+          <a:effectRef idx="2">
+            <a:schemeClr val="accent1"/>
+          </a:effectRef>
+          <a:fontRef idx="minor">
+            <a:schemeClr val="lt1"/>
+          </a:fontRef>
+        </p:style>
+        <p:txBody>
+          <a:bodyPr rtlCol="0" anchor="ctr" wrap="square" lIns="146304" rIns="118872" tIns="118872" bIns="73152"/>
+          <a:lstStyle/>
+          <a:p>
+            <a:pPr algn="ctr">
+              <a:spcAft>
+                <a:spcPts val="700"/>
+              </a:spcAft>
+            </a:pPr>
+            <a:r>
+              <a:rPr sz="1250" b="1">
+                <a:solidFill>
+                  <a:srgbClr val="2F6E4E"/>
+                </a:solidFill>
+                <a:latin typeface="Segoe UI"/>
+              </a:rPr>
+              <a:t>THE RESPONSIBLE-AI LAYER</a:t>
+            </a:r>
+          </a:p>
+          <a:p>
+            <a:pPr>
+              <a:spcAft>
+                <a:spcPts val="300"/>
+              </a:spcAft>
+            </a:pPr>
+            <a:r>
+              <a:rPr sz="1150" b="0">
+                <a:solidFill>
+                  <a:srgbClr val="566573"/>
+                </a:solidFill>
+                <a:latin typeface="Segoe UI"/>
+              </a:rPr>
+              <a:t>Fairness — even treatment, no hidden bias</a:t>
+            </a:r>
+          </a:p>
+          <a:p>
+            <a:pPr>
+              <a:spcAft>
+                <a:spcPts val="300"/>
+              </a:spcAft>
+            </a:pPr>
+            <a:r>
+              <a:rPr sz="1150" b="0">
+                <a:solidFill>
+                  <a:srgbClr val="566573"/>
+                </a:solidFill>
+                <a:latin typeface="Segoe UI"/>
+              </a:rPr>
+              <a:t>Safety — catch unsafe / wrong outputs</a:t>
+            </a:r>
+          </a:p>
+          <a:p>
+            <a:pPr>
+              <a:spcAft>
+                <a:spcPts val="300"/>
+              </a:spcAft>
+            </a:pPr>
+            <a:r>
+              <a:rPr sz="1150" b="0">
+                <a:solidFill>
+                  <a:srgbClr val="566573"/>
+                </a:solidFill>
+                <a:latin typeface="Segoe UI"/>
+              </a:rPr>
+              <a:t>Privacy — protect personal data</a:t>
+            </a:r>
+          </a:p>
+          <a:p>
+            <a:pPr>
+              <a:spcAft>
+                <a:spcPts val="300"/>
+              </a:spcAft>
+            </a:pPr>
+            <a:r>
+              <a:rPr sz="1150" b="0">
+                <a:solidFill>
+                  <a:srgbClr val="566573"/>
+                </a:solidFill>
+                <a:latin typeface="Segoe UI"/>
+              </a:rPr>
+              <a:t>Transparency — explain every result</a:t>
+            </a:r>
+          </a:p>
+          <a:p>
+            <a:pPr>
+              <a:spcAft>
+                <a:spcPts val="300"/>
+              </a:spcAft>
+            </a:pPr>
+            <a:r>
+              <a:rPr sz="1150" b="0">
+                <a:solidFill>
+                  <a:srgbClr val="566573"/>
+                </a:solidFill>
+                <a:latin typeface="Segoe UI"/>
+              </a:rPr>
+              <a:t>Human oversight — people stay in control</a:t>
+            </a:r>
+          </a:p>
+          <a:p>
+            <a:pPr>
+              <a:spcAft>
+                <a:spcPts val="300"/>
+              </a:spcAft>
+            </a:pPr>
+            <a:r>
+              <a:rPr sz="1150" b="0">
+                <a:solidFill>
+                  <a:srgbClr val="566573"/>
+                </a:solidFill>
+                <a:latin typeface="Segoe UI"/>
+              </a:rPr>
+              <a:t>Evidence-based — no made-up outputs</a:t>
+            </a:r>
+          </a:p>
+          <a:p>
+            <a:pPr>
+              <a:spcAft>
+                <a:spcPts val="300"/>
+              </a:spcAft>
+            </a:pPr>
+            <a:r>
+              <a:rPr sz="1150" b="0">
+                <a:solidFill>
+                  <a:srgbClr val="566573"/>
+                </a:solidFill>
+                <a:latin typeface="Segoe UI"/>
+              </a:rPr>
+              <a:t>Accountability — versioned &amp; auditable</a:t>
+            </a:r>
+          </a:p>
+          <a:p>
+            <a:pPr>
+              <a:spcAft>
+                <a:spcPts val="300"/>
+              </a:spcAft>
+            </a:pPr>
+            <a:r>
+              <a:rPr sz="1150" b="0">
+                <a:solidFill>
+                  <a:srgbClr val="1C2733"/>
+                </a:solidFill>
+                <a:latin typeface="Segoe UI"/>
+              </a:rPr>
+              <a:t/>
+            </a:r>
+          </a:p>
+          <a:p>
+            <a:pPr>
+              <a:spcAft>
+                <a:spcPts val="300"/>
+              </a:spcAft>
+            </a:pPr>
+            <a:r>
+              <a:rPr sz="1150" b="0">
+                <a:solidFill>
+                  <a:srgbClr val="2F6E4E"/>
+                </a:solidFill>
+                <a:latin typeface="Segoe UI"/>
+              </a:rPr>
+              <a:t>Summary: makes them trustworthy &amp; defensible.</a:t>
+            </a:r>
+          </a:p>
+        </p:txBody>
+      </p:sp>
+      <p:sp>
+        <p:nvSpPr>
+          <p:cNvPr id="6" name="Rectangle 5"/>
+          <p:cNvSpPr/>
+          <p:nvPr/>
+        </p:nvSpPr>
+        <p:spPr>
+          <a:xfrm>
+            <a:off x="640080" y="5943600"/>
+            <a:ext cx="10927080" cy="658368"/>
+          </a:xfrm>
+          <a:prstGeom prst="rect">
+            <a:avLst/>
+          </a:prstGeom>
+          <a:solidFill>
+            <a:srgbClr val="EAEEF2"/>
+          </a:solidFill>
+          <a:ln>
+            <a:noFill/>
+          </a:ln>
+          <a:effectLst/>
+        </p:spPr>
+        <p:style>
+          <a:lnRef idx="1">
+            <a:schemeClr val="accent1"/>
+          </a:lnRef>
+          <a:fillRef idx="3">
+            <a:schemeClr val="accent1"/>
+          </a:fillRef>
+          <a:effectRef idx="2">
+            <a:schemeClr val="accent1"/>
+          </a:effectRef>
+          <a:fontRef idx="minor">
+            <a:schemeClr val="lt1"/>
+          </a:fontRef>
+        </p:style>
+        <p:txBody>
+          <a:bodyPr rtlCol="0" anchor="ctr" wrap="square" lIns="201168" rIns="201168"/>
+          <a:lstStyle/>
+          <a:p>
+            <a:pPr algn="ctr">
+              <a:spcAft>
+                <a:spcPts val="0"/>
+              </a:spcAft>
+            </a:pPr>
+            <a:r>
+              <a:rPr sz="1350" b="1">
+                <a:solidFill>
+                  <a:srgbClr val="122A42"/>
+                </a:solidFill>
+                <a:latin typeface="Segoe UI"/>
+              </a:rPr>
+              <a:t>Responsible AI is not a separate system — it is a layer added on the platform, so every use case (APIX first) inherits it.</a:t>
+            </a:r>
+          </a:p>
+        </p:txBody>
+      </p:sp>
     </p:spTree>
   </p:cSld>
   <p:clrMapOvr>
@@ -4408,7 +4115,7 @@
 </p:sld>
 </file>
 
-<file path=ppt/slides/slide4.xml><?xml version="1.0" encoding="utf-8"?>
+<file path=ppt/slides/slide3.xml><?xml version="1.0" encoding="utf-8"?>
 <p:sld xmlns:a="http://schemas.openxmlformats.org/drawingml/2006/main" xmlns:p="http://schemas.openxmlformats.org/presentationml/2006/main" xmlns:r="http://schemas.openxmlformats.org/officeDocument/2006/relationships">
   <p:cSld>
     <p:bg>
@@ -4478,8 +4185,8 @@
         </p:nvSpPr>
         <p:spPr>
           <a:xfrm>
-            <a:off x="640080" y="365760"/>
-            <a:ext cx="11247120" cy="1234440"/>
+            <a:off x="640080" y="347472"/>
+            <a:ext cx="11247120" cy="1188720"/>
           </a:xfrm>
           <a:prstGeom prst="rect">
             <a:avLst/>
@@ -4504,7 +4211,7 @@
                 </a:solidFill>
                 <a:latin typeface="Segoe UI"/>
               </a:rPr>
-              <a:t>WHY ON THE PLATFORM</a:t>
+              <a:t>THE IDEA</a:t>
             </a:r>
           </a:p>
           <a:p>
@@ -4514,248 +4221,152 @@
               </a:spcAft>
             </a:pPr>
             <a:r>
-              <a:rPr sz="2500" b="1">
+              <a:rPr sz="2400" b="1">
                 <a:solidFill>
                   <a:srgbClr val="1C2733"/>
                 </a:solidFill>
                 <a:latin typeface="Segoe UI"/>
               </a:rPr>
-              <a:t>Build it once — every use case inherits it</a:t>
-            </a:r>
-          </a:p>
-        </p:txBody>
-      </p:sp>
-      <p:graphicFrame>
-        <p:nvGraphicFramePr>
-          <p:cNvPr id="4" name="Table 3"/>
-          <p:cNvGraphicFramePr>
-            <a:graphicFrameLocks noGrp="1"/>
-          </p:cNvGraphicFramePr>
+              <a:t>What Responsible AI is, and why it matters to the platform</a:t>
+            </a:r>
+          </a:p>
+        </p:txBody>
+      </p:sp>
+      <p:sp>
+        <p:nvSpPr>
+          <p:cNvPr id="4" name="TextBox 3"/>
+          <p:cNvSpPr txBox="1"/>
           <p:nvPr/>
-        </p:nvGraphicFramePr>
-        <p:xfrm>
-          <a:off x="640080" y="1828800"/>
-          <a:ext cx="10927080" cy="1920240"/>
-        </p:xfrm>
-        <a:graphic>
-          <a:graphicData uri="http://schemas.openxmlformats.org/drawingml/2006/table">
-            <a:tbl>
-              <a:tblPr firstRow="1">
-                <a:tableStyleId>{5C22544A-7EE6-4342-B048-85BDC9FD1C3A}</a:tableStyleId>
-              </a:tblPr>
-              <a:tblGrid>
-                <a:gridCol w="3017520"/>
-                <a:gridCol w="4846320"/>
-                <a:gridCol w="3063240"/>
-              </a:tblGrid>
-              <a:tr h="640080">
-                <a:tc>
-                  <a:txBody>
-                    <a:bodyPr wrap="square"/>
-                    <a:lstStyle/>
-                    <a:p>
-                      <a:r>
-                        <a:rPr sz="1100" b="1">
-                          <a:solidFill>
-                            <a:srgbClr val="FFFFFF"/>
-                          </a:solidFill>
-                          <a:latin typeface="Segoe UI"/>
-                        </a:rPr>
-                        <a:t>Approach</a:t>
-                      </a:r>
-                    </a:p>
-                  </a:txBody>
-                  <a:tcPr anchor="ctr" marL="91440" marR="54864" marT="18288" marB="18288">
-                    <a:solidFill>
-                      <a:srgbClr val="16324F"/>
-                    </a:solidFill>
-                  </a:tcPr>
-                </a:tc>
-                <a:tc>
-                  <a:txBody>
-                    <a:bodyPr wrap="square"/>
-                    <a:lstStyle/>
-                    <a:p>
-                      <a:r>
-                        <a:rPr sz="1100" b="1">
-                          <a:solidFill>
-                            <a:srgbClr val="FFFFFF"/>
-                          </a:solidFill>
-                          <a:latin typeface="Segoe UI"/>
-                        </a:rPr>
-                        <a:t>What it means</a:t>
-                      </a:r>
-                    </a:p>
-                  </a:txBody>
-                  <a:tcPr anchor="ctr" marL="91440" marR="54864" marT="18288" marB="18288">
-                    <a:solidFill>
-                      <a:srgbClr val="16324F"/>
-                    </a:solidFill>
-                  </a:tcPr>
-                </a:tc>
-                <a:tc>
-                  <a:txBody>
-                    <a:bodyPr wrap="square"/>
-                    <a:lstStyle/>
-                    <a:p>
-                      <a:r>
-                        <a:rPr sz="1100" b="1">
-                          <a:solidFill>
-                            <a:srgbClr val="FFFFFF"/>
-                          </a:solidFill>
-                          <a:latin typeface="Segoe UI"/>
-                        </a:rPr>
-                        <a:t>Result</a:t>
-                      </a:r>
-                    </a:p>
-                  </a:txBody>
-                  <a:tcPr anchor="ctr" marL="91440" marR="54864" marT="18288" marB="18288">
-                    <a:solidFill>
-                      <a:srgbClr val="16324F"/>
-                    </a:solidFill>
-                  </a:tcPr>
-                </a:tc>
-              </a:tr>
-              <a:tr h="640080">
-                <a:tc>
-                  <a:txBody>
-                    <a:bodyPr wrap="square"/>
-                    <a:lstStyle/>
-                    <a:p>
-                      <a:r>
-                        <a:rPr sz="1300" b="1">
-                          <a:solidFill>
-                            <a:srgbClr val="1C2733"/>
-                          </a:solidFill>
-                          <a:latin typeface="Segoe UI"/>
-                        </a:rPr>
-                        <a:t>Bolt-on per use case</a:t>
-                      </a:r>
-                    </a:p>
-                  </a:txBody>
-                  <a:tcPr anchor="ctr" marL="91440" marR="54864" marT="18288" marB="18288">
-                    <a:solidFill>
-                      <a:srgbClr val="FFFFFF"/>
-                    </a:solidFill>
-                  </a:tcPr>
-                </a:tc>
-                <a:tc>
-                  <a:txBody>
-                    <a:bodyPr wrap="square"/>
-                    <a:lstStyle/>
-                    <a:p>
-                      <a:r>
-                        <a:rPr sz="1300" b="0">
-                          <a:solidFill>
-                            <a:srgbClr val="566573"/>
-                          </a:solidFill>
-                          <a:latin typeface="Segoe UI"/>
-                        </a:rPr>
-                        <a:t>Each app builds its own checks</a:t>
-                      </a:r>
-                    </a:p>
-                  </a:txBody>
-                  <a:tcPr anchor="ctr" marL="91440" marR="54864" marT="18288" marB="18288">
-                    <a:solidFill>
-                      <a:srgbClr val="FFFFFF"/>
-                    </a:solidFill>
-                  </a:tcPr>
-                </a:tc>
-                <a:tc>
-                  <a:txBody>
-                    <a:bodyPr wrap="square"/>
-                    <a:lstStyle/>
-                    <a:p>
-                      <a:r>
-                        <a:rPr sz="1300" b="0">
-                          <a:solidFill>
-                            <a:srgbClr val="566573"/>
-                          </a:solidFill>
-                          <a:latin typeface="Segoe UI"/>
-                        </a:rPr>
-                        <a:t>Slow · inconsistent · gaps</a:t>
-                      </a:r>
-                    </a:p>
-                  </a:txBody>
-                  <a:tcPr anchor="ctr" marL="91440" marR="54864" marT="18288" marB="18288">
-                    <a:solidFill>
-                      <a:srgbClr val="FFFFFF"/>
-                    </a:solidFill>
-                  </a:tcPr>
-                </a:tc>
-              </a:tr>
-              <a:tr h="640080">
-                <a:tc>
-                  <a:txBody>
-                    <a:bodyPr wrap="square"/>
-                    <a:lstStyle/>
-                    <a:p>
-                      <a:r>
-                        <a:rPr sz="1300" b="1">
-                          <a:solidFill>
-                            <a:srgbClr val="1C2733"/>
-                          </a:solidFill>
-                          <a:latin typeface="Segoe UI"/>
-                        </a:rPr>
-                        <a:t>Platform layer  (our approach)</a:t>
-                      </a:r>
-                    </a:p>
-                  </a:txBody>
-                  <a:tcPr anchor="ctr" marL="91440" marR="54864" marT="18288" marB="18288">
-                    <a:solidFill>
-                      <a:srgbClr val="F6F8FA"/>
-                    </a:solidFill>
-                  </a:tcPr>
-                </a:tc>
-                <a:tc>
-                  <a:txBody>
-                    <a:bodyPr wrap="square"/>
-                    <a:lstStyle/>
-                    <a:p>
-                      <a:r>
-                        <a:rPr sz="1300" b="0">
-                          <a:solidFill>
-                            <a:srgbClr val="566573"/>
-                          </a:solidFill>
-                          <a:latin typeface="Segoe UI"/>
-                        </a:rPr>
-                        <a:t>Build once; every use case inherits</a:t>
-                      </a:r>
-                    </a:p>
-                  </a:txBody>
-                  <a:tcPr anchor="ctr" marL="91440" marR="54864" marT="18288" marB="18288">
-                    <a:solidFill>
-                      <a:srgbClr val="F6F8FA"/>
-                    </a:solidFill>
-                  </a:tcPr>
-                </a:tc>
-                <a:tc>
-                  <a:txBody>
-                    <a:bodyPr wrap="square"/>
-                    <a:lstStyle/>
-                    <a:p>
-                      <a:r>
-                        <a:rPr sz="1300" b="0">
-                          <a:solidFill>
-                            <a:srgbClr val="566573"/>
-                          </a:solidFill>
-                          <a:latin typeface="Segoe UI"/>
-                        </a:rPr>
-                        <a:t>Fast · consistent · auditable</a:t>
-                      </a:r>
-                    </a:p>
-                  </a:txBody>
-                  <a:tcPr anchor="ctr" marL="91440" marR="54864" marT="18288" marB="18288">
-                    <a:solidFill>
-                      <a:srgbClr val="F6F8FA"/>
-                    </a:solidFill>
-                  </a:tcPr>
-                </a:tc>
-              </a:tr>
-            </a:tbl>
-          </a:graphicData>
-        </a:graphic>
-      </p:graphicFrame>
+        </p:nvSpPr>
+        <p:spPr>
+          <a:xfrm>
+            <a:off x="685800" y="1828800"/>
+            <a:ext cx="10881360" cy="4206240"/>
+          </a:xfrm>
+          <a:prstGeom prst="rect">
+            <a:avLst/>
+          </a:prstGeom>
+          <a:noFill/>
+        </p:spPr>
+        <p:txBody>
+          <a:bodyPr wrap="square">
+            <a:spAutoFit/>
+          </a:bodyPr>
+          <a:lstStyle/>
+          <a:p>
+            <a:pPr>
+              <a:spcAft>
+                <a:spcPts val="1200"/>
+              </a:spcAft>
+            </a:pPr>
+            <a:r>
+              <a:rPr sz="1500" b="0">
+                <a:solidFill>
+                  <a:srgbClr val="1C2733"/>
+                </a:solidFill>
+                <a:latin typeface="Segoe UI"/>
+              </a:rPr>
+              <a:t>Responsible AI = a set of checks that make an AI system fair, safe, private, explainable and under human control — proven, not promised.</a:t>
+            </a:r>
+          </a:p>
+          <a:p>
+            <a:pPr>
+              <a:spcAft>
+                <a:spcPts val="1200"/>
+              </a:spcAft>
+            </a:pPr>
+            <a:r>
+              <a:rPr sz="1500" b="0">
+                <a:solidFill>
+                  <a:srgbClr val="1C2733"/>
+                </a:solidFill>
+                <a:latin typeface="Segoe UI"/>
+              </a:rPr>
+              <a:t/>
+            </a:r>
+          </a:p>
+          <a:p>
+            <a:pPr>
+              <a:spcAft>
+                <a:spcPts val="1200"/>
+              </a:spcAft>
+            </a:pPr>
+            <a:r>
+              <a:rPr sz="1500" b="0">
+                <a:solidFill>
+                  <a:srgbClr val="122A42"/>
+                </a:solidFill>
+                <a:latin typeface="Segoe UI"/>
+              </a:rPr>
+              <a:t>Value to the platform:</a:t>
+            </a:r>
+          </a:p>
+          <a:p>
+            <a:pPr>
+              <a:spcAft>
+                <a:spcPts val="1200"/>
+              </a:spcAft>
+            </a:pPr>
+            <a:r>
+              <a:rPr sz="1500" b="0">
+                <a:solidFill>
+                  <a:srgbClr val="566573"/>
+                </a:solidFill>
+                <a:latin typeface="Segoe UI"/>
+              </a:rPr>
+              <a:t>Build it once on the platform → every use case inherits it (no rebuild per app).</a:t>
+            </a:r>
+          </a:p>
+          <a:p>
+            <a:pPr>
+              <a:spcAft>
+                <a:spcPts val="1200"/>
+              </a:spcAft>
+            </a:pPr>
+            <a:r>
+              <a:rPr sz="1500" b="0">
+                <a:solidFill>
+                  <a:srgbClr val="566573"/>
+                </a:solidFill>
+                <a:latin typeface="Segoe UI"/>
+              </a:rPr>
+              <a:t>Reduces legal, reputational and operational risk before outputs reach people.</a:t>
+            </a:r>
+          </a:p>
+          <a:p>
+            <a:pPr>
+              <a:spcAft>
+                <a:spcPts val="1200"/>
+              </a:spcAft>
+            </a:pPr>
+            <a:r>
+              <a:rPr sz="1500" b="0">
+                <a:solidFill>
+                  <a:srgbClr val="566573"/>
+                </a:solidFill>
+                <a:latin typeface="Segoe UI"/>
+              </a:rPr>
+              <a:t>Turns “trust us” into “here is the check, the number, and the evidence.”</a:t>
+            </a:r>
+          </a:p>
+          <a:p>
+            <a:pPr>
+              <a:spcAft>
+                <a:spcPts val="1200"/>
+              </a:spcAft>
+            </a:pPr>
+            <a:r>
+              <a:rPr sz="1500" b="0">
+                <a:solidFill>
+                  <a:srgbClr val="566573"/>
+                </a:solidFill>
+                <a:latin typeface="Segoe UI"/>
+              </a:rPr>
+              <a:t>Prepares for tightening AI regulation, and differentiates us with clients.</a:t>
+            </a:r>
+          </a:p>
+        </p:txBody>
+      </p:sp>
       <p:sp>
         <p:nvSpPr>
           <p:cNvPr id="5" name="Rectangle 4"/>
@@ -4764,8 +4375,8 @@
         </p:nvSpPr>
         <p:spPr>
           <a:xfrm>
-            <a:off x="640080" y="3566160"/>
-            <a:ext cx="10927080" cy="914400"/>
+            <a:off x="640080" y="5852160"/>
+            <a:ext cx="10927080" cy="749808"/>
           </a:xfrm>
           <a:prstGeom prst="rect">
             <a:avLst/>
@@ -4808,98 +4419,7 @@
                 </a:solidFill>
                 <a:latin typeface="Segoe UI"/>
               </a:rPr>
-              <a:t>The value compounds:  reduces risk (legal / reputational)   ·   builds client &amp; auditor confidence   ·   prepares for AI regulation   ·   differentiates every future use case.</a:t>
-            </a:r>
-          </a:p>
-        </p:txBody>
-      </p:sp>
-      <p:sp>
-        <p:nvSpPr>
-          <p:cNvPr id="6" name="Rectangle 5"/>
-          <p:cNvSpPr/>
-          <p:nvPr/>
-        </p:nvSpPr>
-        <p:spPr>
-          <a:xfrm>
-            <a:off x="640080" y="4709160"/>
-            <a:ext cx="10927080" cy="1417320"/>
-          </a:xfrm>
-          <a:prstGeom prst="rect">
-            <a:avLst/>
-          </a:prstGeom>
-          <a:solidFill>
-            <a:srgbClr val="EAEEF2"/>
-          </a:solidFill>
-          <a:ln w="9525">
-            <a:solidFill>
-              <a:srgbClr val="D5DBE1"/>
-            </a:solidFill>
-          </a:ln>
-          <a:effectLst/>
-        </p:spPr>
-        <p:style>
-          <a:lnRef idx="1">
-            <a:schemeClr val="accent1"/>
-          </a:lnRef>
-          <a:fillRef idx="3">
-            <a:schemeClr val="accent1"/>
-          </a:fillRef>
-          <a:effectRef idx="2">
-            <a:schemeClr val="accent1"/>
-          </a:effectRef>
-          <a:fontRef idx="minor">
-            <a:schemeClr val="lt1"/>
-          </a:fontRef>
-        </p:style>
-        <p:txBody>
-          <a:bodyPr rtlCol="0" anchor="ctr" wrap="square" lIns="146304" rIns="128016" tIns="118872" bIns="91440"/>
-          <a:lstStyle/>
-          <a:p>
-            <a:pPr algn="ctr">
-              <a:spcAft>
-                <a:spcPts val="700"/>
-              </a:spcAft>
-            </a:pPr>
-            <a:r>
-              <a:rPr sz="1250" b="1">
-                <a:solidFill>
-                  <a:srgbClr val="16324F"/>
-                </a:solidFill>
-                <a:latin typeface="Segoe UI"/>
-              </a:rPr>
-              <a:t>THE ONE MOVE THAT MATTERS MOST</a:t>
-            </a:r>
-          </a:p>
-          <a:p>
-            <a:pPr>
-              <a:spcAft>
-                <a:spcPts val="300"/>
-              </a:spcAft>
-            </a:pPr>
-            <a:r>
-              <a:rPr sz="1150" b="0">
-                <a:solidFill>
-                  <a:srgbClr val="122A42"/>
-                </a:solidFill>
-                <a:latin typeface="Segoe UI"/>
-              </a:rPr>
-              <a:t>The quality check the platform already runs before releasing a change becomes a quality-AND-responsibility check.</a:t>
-            </a:r>
-          </a:p>
-          <a:p>
-            <a:pPr>
-              <a:spcAft>
-                <a:spcPts val="300"/>
-              </a:spcAft>
-            </a:pPr>
-            <a:r>
-              <a:rPr sz="1150" b="0">
-                <a:solidFill>
-                  <a:srgbClr val="566573"/>
-                </a:solidFill>
-                <a:latin typeface="Segoe UI"/>
-              </a:rPr>
-              <a:t>Same mechanism, wider protection — and it applies to every use case at once.</a:t>
+              <a:t>Especially important for APIX, because APIX uses AI to help evaluate people's work — a high-stakes case where trust must be demonstrable.</a:t>
             </a:r>
           </a:p>
         </p:txBody>
@@ -4912,7 +4432,7 @@
 </p:sld>
 </file>
 
-<file path=ppt/slides/slide5.xml><?xml version="1.0" encoding="utf-8"?>
+<file path=ppt/slides/slide4.xml><?xml version="1.0" encoding="utf-8"?>
 <p:sld xmlns:a="http://schemas.openxmlformats.org/drawingml/2006/main" xmlns:p="http://schemas.openxmlformats.org/presentationml/2006/main" xmlns:r="http://schemas.openxmlformats.org/officeDocument/2006/relationships">
   <p:cSld>
     <p:bg>
@@ -4982,8 +4502,8 @@
         </p:nvSpPr>
         <p:spPr>
           <a:xfrm>
-            <a:off x="640080" y="365760"/>
-            <a:ext cx="11247120" cy="1234440"/>
+            <a:off x="640080" y="347472"/>
+            <a:ext cx="11247120" cy="1188720"/>
           </a:xfrm>
           <a:prstGeom prst="rect">
             <a:avLst/>
@@ -5008,7 +4528,7 @@
                 </a:solidFill>
                 <a:latin typeface="Segoe UI"/>
               </a:rPr>
-              <a:t>HOW IT FITS</a:t>
+              <a:t>THE EXAMPLE USE CASE</a:t>
             </a:r>
           </a:p>
           <a:p>
@@ -5018,520 +4538,359 @@
               </a:spcAft>
             </a:pPr>
             <a:r>
-              <a:rPr sz="2500" b="1">
+              <a:rPr sz="2400" b="1">
                 <a:solidFill>
                   <a:srgbClr val="1C2733"/>
                 </a:solidFill>
                 <a:latin typeface="Segoe UI"/>
               </a:rPr>
-              <a:t>It extends the platform capabilities we already run</a:t>
-            </a:r>
-          </a:p>
-        </p:txBody>
-      </p:sp>
-      <p:graphicFrame>
-        <p:nvGraphicFramePr>
-          <p:cNvPr id="4" name="Table 3"/>
-          <p:cNvGraphicFramePr>
-            <a:graphicFrameLocks noGrp="1"/>
-          </p:cNvGraphicFramePr>
+              <a:t>The APIX AI pipeline — why it's the right example</a:t>
+            </a:r>
+          </a:p>
+        </p:txBody>
+      </p:sp>
+      <p:sp>
+        <p:nvSpPr>
+          <p:cNvPr id="4" name="TextBox 3"/>
+          <p:cNvSpPr txBox="1"/>
           <p:nvPr/>
-        </p:nvGraphicFramePr>
-        <p:xfrm>
-          <a:off x="640080" y="1828800"/>
-          <a:ext cx="10927080" cy="3968496"/>
-        </p:xfrm>
-        <a:graphic>
-          <a:graphicData uri="http://schemas.openxmlformats.org/drawingml/2006/table">
-            <a:tbl>
-              <a:tblPr firstRow="1">
-                <a:tableStyleId>{5C22544A-7EE6-4342-B048-85BDC9FD1C3A}</a:tableStyleId>
-              </a:tblPr>
-              <a:tblGrid>
-                <a:gridCol w="2651760"/>
-                <a:gridCol w="3200400"/>
-                <a:gridCol w="5074920"/>
-              </a:tblGrid>
-              <a:tr h="566928">
-                <a:tc>
-                  <a:txBody>
-                    <a:bodyPr wrap="square"/>
-                    <a:lstStyle/>
-                    <a:p>
-                      <a:r>
-                        <a:rPr sz="1100" b="1">
-                          <a:solidFill>
-                            <a:srgbClr val="FFFFFF"/>
-                          </a:solidFill>
-                          <a:latin typeface="Segoe UI"/>
-                        </a:rPr>
-                        <a:t>Platform capability</a:t>
-                      </a:r>
-                    </a:p>
-                  </a:txBody>
-                  <a:tcPr anchor="ctr" marL="91440" marR="54864" marT="18288" marB="18288">
-                    <a:solidFill>
-                      <a:srgbClr val="16324F"/>
-                    </a:solidFill>
-                  </a:tcPr>
-                </a:tc>
-                <a:tc>
-                  <a:txBody>
-                    <a:bodyPr wrap="square"/>
-                    <a:lstStyle/>
-                    <a:p>
-                      <a:r>
-                        <a:rPr sz="1100" b="1">
-                          <a:solidFill>
-                            <a:srgbClr val="FFFFFF"/>
-                          </a:solidFill>
-                          <a:latin typeface="Segoe UI"/>
-                        </a:rPr>
-                        <a:t>What it does today</a:t>
-                      </a:r>
-                    </a:p>
-                  </a:txBody>
-                  <a:tcPr anchor="ctr" marL="91440" marR="54864" marT="18288" marB="18288">
-                    <a:solidFill>
-                      <a:srgbClr val="16324F"/>
-                    </a:solidFill>
-                  </a:tcPr>
-                </a:tc>
-                <a:tc>
-                  <a:txBody>
-                    <a:bodyPr wrap="square"/>
-                    <a:lstStyle/>
-                    <a:p>
-                      <a:r>
-                        <a:rPr sz="1100" b="1">
-                          <a:solidFill>
-                            <a:srgbClr val="FFFFFF"/>
-                          </a:solidFill>
-                          <a:latin typeface="Segoe UI"/>
-                        </a:rPr>
-                        <a:t>Responsible-AI addition</a:t>
-                      </a:r>
-                    </a:p>
-                  </a:txBody>
-                  <a:tcPr anchor="ctr" marL="91440" marR="54864" marT="18288" marB="18288">
-                    <a:solidFill>
-                      <a:srgbClr val="16324F"/>
-                    </a:solidFill>
-                  </a:tcPr>
-                </a:tc>
-              </a:tr>
-              <a:tr h="566928">
-                <a:tc>
-                  <a:txBody>
-                    <a:bodyPr wrap="square"/>
-                    <a:lstStyle/>
-                    <a:p>
-                      <a:r>
-                        <a:rPr sz="1200" b="1">
-                          <a:solidFill>
-                            <a:srgbClr val="1C2733"/>
-                          </a:solidFill>
-                          <a:latin typeface="Segoe UI"/>
-                        </a:rPr>
-                        <a:t>Pre-release checks</a:t>
-                      </a:r>
-                    </a:p>
-                  </a:txBody>
-                  <a:tcPr anchor="ctr" marL="91440" marR="54864" marT="18288" marB="18288">
-                    <a:solidFill>
-                      <a:srgbClr val="FFFFFF"/>
-                    </a:solidFill>
-                  </a:tcPr>
-                </a:tc>
-                <a:tc>
-                  <a:txBody>
-                    <a:bodyPr wrap="square"/>
-                    <a:lstStyle/>
-                    <a:p>
-                      <a:r>
-                        <a:rPr sz="1200" b="0">
-                          <a:solidFill>
-                            <a:srgbClr val="566573"/>
-                          </a:solidFill>
-                          <a:latin typeface="Segoe UI"/>
-                        </a:rPr>
-                        <a:t>Scores quality before release</a:t>
-                      </a:r>
-                    </a:p>
-                  </a:txBody>
-                  <a:tcPr anchor="ctr" marL="91440" marR="54864" marT="18288" marB="18288">
-                    <a:solidFill>
-                      <a:srgbClr val="FFFFFF"/>
-                    </a:solidFill>
-                  </a:tcPr>
-                </a:tc>
-                <a:tc>
-                  <a:txBody>
-                    <a:bodyPr wrap="square"/>
-                    <a:lstStyle/>
-                    <a:p>
-                      <a:r>
-                        <a:rPr sz="1200" b="0">
-                          <a:solidFill>
-                            <a:srgbClr val="566573"/>
-                          </a:solidFill>
-                          <a:latin typeface="Segoe UI"/>
-                        </a:rPr>
-                        <a:t>Also checks fairness, safety, evidence — blocks failures</a:t>
-                      </a:r>
-                    </a:p>
-                  </a:txBody>
-                  <a:tcPr anchor="ctr" marL="91440" marR="54864" marT="18288" marB="18288">
-                    <a:solidFill>
-                      <a:srgbClr val="FFFFFF"/>
-                    </a:solidFill>
-                  </a:tcPr>
-                </a:tc>
-              </a:tr>
-              <a:tr h="566928">
-                <a:tc>
-                  <a:txBody>
-                    <a:bodyPr wrap="square"/>
-                    <a:lstStyle/>
-                    <a:p>
-                      <a:r>
-                        <a:rPr sz="1200" b="1">
-                          <a:solidFill>
-                            <a:srgbClr val="1C2733"/>
-                          </a:solidFill>
-                          <a:latin typeface="Segoe UI"/>
-                        </a:rPr>
-                        <a:t>Guardrails</a:t>
-                      </a:r>
-                    </a:p>
-                  </a:txBody>
-                  <a:tcPr anchor="ctr" marL="91440" marR="54864" marT="18288" marB="18288">
-                    <a:solidFill>
-                      <a:srgbClr val="F6F8FA"/>
-                    </a:solidFill>
-                  </a:tcPr>
-                </a:tc>
-                <a:tc>
-                  <a:txBody>
-                    <a:bodyPr wrap="square"/>
-                    <a:lstStyle/>
-                    <a:p>
-                      <a:r>
-                        <a:rPr sz="1200" b="0">
-                          <a:solidFill>
-                            <a:srgbClr val="566573"/>
-                          </a:solidFill>
-                          <a:latin typeface="Segoe UI"/>
-                        </a:rPr>
-                        <a:t>Detects sensitive data (PII)</a:t>
-                      </a:r>
-                    </a:p>
-                  </a:txBody>
-                  <a:tcPr anchor="ctr" marL="91440" marR="54864" marT="18288" marB="18288">
-                    <a:solidFill>
-                      <a:srgbClr val="F6F8FA"/>
-                    </a:solidFill>
-                  </a:tcPr>
-                </a:tc>
-                <a:tc>
-                  <a:txBody>
-                    <a:bodyPr wrap="square"/>
-                    <a:lstStyle/>
-                    <a:p>
-                      <a:r>
-                        <a:rPr sz="1200" b="0">
-                          <a:solidFill>
-                            <a:srgbClr val="566573"/>
-                          </a:solidFill>
-                          <a:latin typeface="Segoe UI"/>
-                        </a:rPr>
-                        <a:t>Adds unsafe-content checks + an audit record</a:t>
-                      </a:r>
-                    </a:p>
-                  </a:txBody>
-                  <a:tcPr anchor="ctr" marL="91440" marR="54864" marT="18288" marB="18288">
-                    <a:solidFill>
-                      <a:srgbClr val="F6F8FA"/>
-                    </a:solidFill>
-                  </a:tcPr>
-                </a:tc>
-              </a:tr>
-              <a:tr h="566928">
-                <a:tc>
-                  <a:txBody>
-                    <a:bodyPr wrap="square"/>
-                    <a:lstStyle/>
-                    <a:p>
-                      <a:r>
-                        <a:rPr sz="1200" b="1">
-                          <a:solidFill>
-                            <a:srgbClr val="1C2733"/>
-                          </a:solidFill>
-                          <a:latin typeface="Segoe UI"/>
-                        </a:rPr>
-                        <a:t>Monitoring</a:t>
-                      </a:r>
-                    </a:p>
-                  </a:txBody>
-                  <a:tcPr anchor="ctr" marL="91440" marR="54864" marT="18288" marB="18288">
-                    <a:solidFill>
-                      <a:srgbClr val="FFFFFF"/>
-                    </a:solidFill>
-                  </a:tcPr>
-                </a:tc>
-                <a:tc>
-                  <a:txBody>
-                    <a:bodyPr wrap="square"/>
-                    <a:lstStyle/>
-                    <a:p>
-                      <a:r>
-                        <a:rPr sz="1200" b="0">
-                          <a:solidFill>
-                            <a:srgbClr val="566573"/>
-                          </a:solidFill>
-                          <a:latin typeface="Segoe UI"/>
-                        </a:rPr>
-                        <a:t>Tracks cost, speed, errors</a:t>
-                      </a:r>
-                    </a:p>
-                  </a:txBody>
-                  <a:tcPr anchor="ctr" marL="91440" marR="54864" marT="18288" marB="18288">
-                    <a:solidFill>
-                      <a:srgbClr val="FFFFFF"/>
-                    </a:solidFill>
-                  </a:tcPr>
-                </a:tc>
-                <a:tc>
-                  <a:txBody>
-                    <a:bodyPr wrap="square"/>
-                    <a:lstStyle/>
-                    <a:p>
-                      <a:r>
-                        <a:rPr sz="1200" b="0">
-                          <a:solidFill>
-                            <a:srgbClr val="566573"/>
-                          </a:solidFill>
-                          <a:latin typeface="Segoe UI"/>
-                        </a:rPr>
-                        <a:t>Also tracks fairness &amp; unusual behaviour</a:t>
-                      </a:r>
-                    </a:p>
-                  </a:txBody>
-                  <a:tcPr anchor="ctr" marL="91440" marR="54864" marT="18288" marB="18288">
-                    <a:solidFill>
-                      <a:srgbClr val="FFFFFF"/>
-                    </a:solidFill>
-                  </a:tcPr>
-                </a:tc>
-              </a:tr>
-              <a:tr h="566928">
-                <a:tc>
-                  <a:txBody>
-                    <a:bodyPr wrap="square"/>
-                    <a:lstStyle/>
-                    <a:p>
-                      <a:r>
-                        <a:rPr sz="1200" b="1">
-                          <a:solidFill>
-                            <a:srgbClr val="1C2733"/>
-                          </a:solidFill>
-                          <a:latin typeface="Segoe UI"/>
-                        </a:rPr>
-                        <a:t>Feedback</a:t>
-                      </a:r>
-                    </a:p>
-                  </a:txBody>
-                  <a:tcPr anchor="ctr" marL="91440" marR="54864" marT="18288" marB="18288">
-                    <a:solidFill>
-                      <a:srgbClr val="F6F8FA"/>
-                    </a:solidFill>
-                  </a:tcPr>
-                </a:tc>
-                <a:tc>
-                  <a:txBody>
-                    <a:bodyPr wrap="square"/>
-                    <a:lstStyle/>
-                    <a:p>
-                      <a:r>
-                        <a:rPr sz="1200" b="0">
-                          <a:solidFill>
-                            <a:srgbClr val="566573"/>
-                          </a:solidFill>
-                          <a:latin typeface="Segoe UI"/>
-                        </a:rPr>
-                        <a:t>Users rate results</a:t>
-                      </a:r>
-                    </a:p>
-                  </a:txBody>
-                  <a:tcPr anchor="ctr" marL="91440" marR="54864" marT="18288" marB="18288">
-                    <a:solidFill>
-                      <a:srgbClr val="F6F8FA"/>
-                    </a:solidFill>
-                  </a:tcPr>
-                </a:tc>
-                <a:tc>
-                  <a:txBody>
-                    <a:bodyPr wrap="square"/>
-                    <a:lstStyle/>
-                    <a:p>
-                      <a:r>
-                        <a:rPr sz="1200" b="0">
-                          <a:solidFill>
-                            <a:srgbClr val="566573"/>
-                          </a:solidFill>
-                          <a:latin typeface="Segoe UI"/>
-                        </a:rPr>
-                        <a:t>Becomes a way to report &amp; challenge a result</a:t>
-                      </a:r>
-                    </a:p>
-                  </a:txBody>
-                  <a:tcPr anchor="ctr" marL="91440" marR="54864" marT="18288" marB="18288">
-                    <a:solidFill>
-                      <a:srgbClr val="F6F8FA"/>
-                    </a:solidFill>
-                  </a:tcPr>
-                </a:tc>
-              </a:tr>
-              <a:tr h="566928">
-                <a:tc>
-                  <a:txBody>
-                    <a:bodyPr wrap="square"/>
-                    <a:lstStyle/>
-                    <a:p>
-                      <a:r>
-                        <a:rPr sz="1200" b="1">
-                          <a:solidFill>
-                            <a:srgbClr val="1C2733"/>
-                          </a:solidFill>
-                          <a:latin typeface="Segoe UI"/>
-                        </a:rPr>
-                        <a:t>Model &amp; prompt mgmt</a:t>
-                      </a:r>
-                    </a:p>
-                  </a:txBody>
-                  <a:tcPr anchor="ctr" marL="91440" marR="54864" marT="18288" marB="18288">
-                    <a:solidFill>
-                      <a:srgbClr val="FFFFFF"/>
-                    </a:solidFill>
-                  </a:tcPr>
-                </a:tc>
-                <a:tc>
-                  <a:txBody>
-                    <a:bodyPr wrap="square"/>
-                    <a:lstStyle/>
-                    <a:p>
-                      <a:r>
-                        <a:rPr sz="1200" b="0">
-                          <a:solidFill>
-                            <a:srgbClr val="566573"/>
-                          </a:solidFill>
-                          <a:latin typeface="Segoe UI"/>
-                        </a:rPr>
-                        <a:t>Manages versions</a:t>
-                      </a:r>
-                    </a:p>
-                  </a:txBody>
-                  <a:tcPr anchor="ctr" marL="91440" marR="54864" marT="18288" marB="18288">
-                    <a:solidFill>
-                      <a:srgbClr val="FFFFFF"/>
-                    </a:solidFill>
-                  </a:tcPr>
-                </a:tc>
-                <a:tc>
-                  <a:txBody>
-                    <a:bodyPr wrap="square"/>
-                    <a:lstStyle/>
-                    <a:p>
-                      <a:r>
-                        <a:rPr sz="1200" b="0">
-                          <a:solidFill>
-                            <a:srgbClr val="566573"/>
-                          </a:solidFill>
-                          <a:latin typeface="Segoe UI"/>
-                        </a:rPr>
-                        <a:t>Records intended use &amp; known limits (model cards)</a:t>
-                      </a:r>
-                    </a:p>
-                  </a:txBody>
-                  <a:tcPr anchor="ctr" marL="91440" marR="54864" marT="18288" marB="18288">
-                    <a:solidFill>
-                      <a:srgbClr val="FFFFFF"/>
-                    </a:solidFill>
-                  </a:tcPr>
-                </a:tc>
-              </a:tr>
-              <a:tr h="566928">
-                <a:tc>
-                  <a:txBody>
-                    <a:bodyPr wrap="square"/>
-                    <a:lstStyle/>
-                    <a:p>
-                      <a:r>
-                        <a:rPr sz="1200" b="1">
-                          <a:solidFill>
-                            <a:srgbClr val="1C2733"/>
-                          </a:solidFill>
-                          <a:latin typeface="Segoe UI"/>
-                        </a:rPr>
-                        <a:t>Controls</a:t>
-                      </a:r>
-                    </a:p>
-                  </a:txBody>
-                  <a:tcPr anchor="ctr" marL="91440" marR="54864" marT="18288" marB="18288">
-                    <a:solidFill>
-                      <a:srgbClr val="F6F8FA"/>
-                    </a:solidFill>
-                  </a:tcPr>
-                </a:tc>
-                <a:tc>
-                  <a:txBody>
-                    <a:bodyPr wrap="square"/>
-                    <a:lstStyle/>
-                    <a:p>
-                      <a:r>
-                        <a:rPr sz="1200" b="0">
-                          <a:solidFill>
-                            <a:srgbClr val="566573"/>
-                          </a:solidFill>
-                          <a:latin typeface="Segoe UI"/>
-                        </a:rPr>
-                        <a:t>Rate limits, retries</a:t>
-                      </a:r>
-                    </a:p>
-                  </a:txBody>
-                  <a:tcPr anchor="ctr" marL="91440" marR="54864" marT="18288" marB="18288">
-                    <a:solidFill>
-                      <a:srgbClr val="F6F8FA"/>
-                    </a:solidFill>
-                  </a:tcPr>
-                </a:tc>
-                <a:tc>
-                  <a:txBody>
-                    <a:bodyPr wrap="square"/>
-                    <a:lstStyle/>
-                    <a:p>
-                      <a:r>
-                        <a:rPr sz="1200" b="0">
-                          <a:solidFill>
-                            <a:srgbClr val="566573"/>
-                          </a:solidFill>
-                          <a:latin typeface="Segoe UI"/>
-                        </a:rPr>
-                        <a:t>Human-in-the-loop + a switch to stop a bad model</a:t>
-                      </a:r>
-                    </a:p>
-                  </a:txBody>
-                  <a:tcPr anchor="ctr" marL="91440" marR="54864" marT="18288" marB="18288">
-                    <a:solidFill>
-                      <a:srgbClr val="F6F8FA"/>
-                    </a:solidFill>
-                  </a:tcPr>
-                </a:tc>
-              </a:tr>
-            </a:tbl>
-          </a:graphicData>
-        </a:graphic>
-      </p:graphicFrame>
+        </p:nvSpPr>
+        <p:spPr>
+          <a:xfrm>
+            <a:off x="685800" y="1828800"/>
+            <a:ext cx="10881360" cy="4206240"/>
+          </a:xfrm>
+          <a:prstGeom prst="rect">
+            <a:avLst/>
+          </a:prstGeom>
+          <a:noFill/>
+        </p:spPr>
+        <p:txBody>
+          <a:bodyPr wrap="square">
+            <a:spAutoFit/>
+          </a:bodyPr>
+          <a:lstStyle/>
+          <a:p>
+            <a:pPr>
+              <a:spcAft>
+                <a:spcPts val="1200"/>
+              </a:spcAft>
+            </a:pPr>
+            <a:r>
+              <a:rPr sz="1500" b="0">
+                <a:solidFill>
+                  <a:srgbClr val="1C2733"/>
+                </a:solidFill>
+                <a:latin typeface="Segoe UI"/>
+              </a:rPr>
+              <a:t>What it does: scores 100% of contact-centre calls each week into per-agent coaching.</a:t>
+            </a:r>
+          </a:p>
+          <a:p>
+            <a:pPr>
+              <a:spcAft>
+                <a:spcPts val="1200"/>
+              </a:spcAft>
+            </a:pPr>
+            <a:r>
+              <a:rPr sz="1500" b="0">
+                <a:solidFill>
+                  <a:srgbClr val="1C2733"/>
+                </a:solidFill>
+                <a:latin typeface="Segoe UI"/>
+              </a:rPr>
+              <a:t>Why RAI matters here: it evaluates people — fairness, transparency and oversight are essential.</a:t>
+            </a:r>
+          </a:p>
+          <a:p>
+            <a:pPr>
+              <a:spcAft>
+                <a:spcPts val="1200"/>
+              </a:spcAft>
+            </a:pPr>
+            <a:r>
+              <a:rPr sz="1500" b="0">
+                <a:solidFill>
+                  <a:srgbClr val="122A42"/>
+                </a:solidFill>
+                <a:latin typeface="Segoe UI"/>
+              </a:rPr>
+              <a:t>Why it's ready: two Responsible-AI foundations already exist in the pipeline —</a:t>
+            </a:r>
+          </a:p>
+        </p:txBody>
+      </p:sp>
+      <p:sp>
+        <p:nvSpPr>
+          <p:cNvPr id="5" name="Rectangle 4"/>
+          <p:cNvSpPr/>
+          <p:nvPr/>
+        </p:nvSpPr>
+        <p:spPr>
+          <a:xfrm>
+            <a:off x="640080" y="3840480"/>
+            <a:ext cx="5486400" cy="1554480"/>
+          </a:xfrm>
+          <a:prstGeom prst="rect">
+            <a:avLst/>
+          </a:prstGeom>
+          <a:solidFill>
+            <a:srgbClr val="EAEEF2"/>
+          </a:solidFill>
+          <a:ln w="9525">
+            <a:solidFill>
+              <a:srgbClr val="D5DBE1"/>
+            </a:solidFill>
+          </a:ln>
+          <a:effectLst/>
+        </p:spPr>
+        <p:style>
+          <a:lnRef idx="1">
+            <a:schemeClr val="accent1"/>
+          </a:lnRef>
+          <a:fillRef idx="3">
+            <a:schemeClr val="accent1"/>
+          </a:fillRef>
+          <a:effectRef idx="2">
+            <a:schemeClr val="accent1"/>
+          </a:effectRef>
+          <a:fontRef idx="minor">
+            <a:schemeClr val="lt1"/>
+          </a:fontRef>
+        </p:style>
+        <p:txBody>
+          <a:bodyPr rtlCol="0" anchor="ctr" wrap="square" lIns="146304" rIns="118872" tIns="118872" bIns="73152"/>
+          <a:lstStyle/>
+          <a:p>
+            <a:pPr algn="ctr">
+              <a:spcAft>
+                <a:spcPts val="700"/>
+              </a:spcAft>
+            </a:pPr>
+            <a:r>
+              <a:rPr sz="1250" b="1">
+                <a:solidFill>
+                  <a:srgbClr val="16324F"/>
+                </a:solidFill>
+                <a:latin typeface="Segoe UI"/>
+              </a:rPr>
+              <a:t>Already built · evidence</a:t>
+            </a:r>
+          </a:p>
+          <a:p>
+            <a:pPr>
+              <a:spcAft>
+                <a:spcPts val="300"/>
+              </a:spcAft>
+            </a:pPr>
+            <a:r>
+              <a:rPr sz="1150" b="0">
+                <a:solidFill>
+                  <a:srgbClr val="566573"/>
+                </a:solidFill>
+                <a:latin typeface="Segoe UI"/>
+              </a:rPr>
+              <a:t>Every AI judgment stores the exact call</a:t>
+            </a:r>
+          </a:p>
+          <a:p>
+            <a:pPr>
+              <a:spcAft>
+                <a:spcPts val="300"/>
+              </a:spcAft>
+            </a:pPr>
+            <a:r>
+              <a:rPr sz="1150" b="0">
+                <a:solidFill>
+                  <a:srgbClr val="566573"/>
+                </a:solidFill>
+                <a:latin typeface="Segoe UI"/>
+              </a:rPr>
+              <a:t>segments that justify it (segment_ids).</a:t>
+            </a:r>
+          </a:p>
+          <a:p>
+            <a:pPr>
+              <a:spcAft>
+                <a:spcPts val="300"/>
+              </a:spcAft>
+            </a:pPr>
+            <a:r>
+              <a:rPr sz="1150" b="0">
+                <a:solidFill>
+                  <a:srgbClr val="122A42"/>
+                </a:solidFill>
+                <a:latin typeface="Segoe UI"/>
+              </a:rPr>
+              <a:t>→ transparency is already in the data.</a:t>
+            </a:r>
+          </a:p>
+        </p:txBody>
+      </p:sp>
+      <p:sp>
+        <p:nvSpPr>
+          <p:cNvPr id="6" name="Rectangle 5"/>
+          <p:cNvSpPr/>
+          <p:nvPr/>
+        </p:nvSpPr>
+        <p:spPr>
+          <a:xfrm>
+            <a:off x="6355080" y="3840480"/>
+            <a:ext cx="5212080" cy="1554480"/>
+          </a:xfrm>
+          <a:prstGeom prst="rect">
+            <a:avLst/>
+          </a:prstGeom>
+          <a:solidFill>
+            <a:srgbClr val="E8F0EA"/>
+          </a:solidFill>
+          <a:ln w="9525">
+            <a:solidFill>
+              <a:srgbClr val="D5DBE1"/>
+            </a:solidFill>
+          </a:ln>
+          <a:effectLst/>
+        </p:spPr>
+        <p:style>
+          <a:lnRef idx="1">
+            <a:schemeClr val="accent1"/>
+          </a:lnRef>
+          <a:fillRef idx="3">
+            <a:schemeClr val="accent1"/>
+          </a:fillRef>
+          <a:effectRef idx="2">
+            <a:schemeClr val="accent1"/>
+          </a:effectRef>
+          <a:fontRef idx="minor">
+            <a:schemeClr val="lt1"/>
+          </a:fontRef>
+        </p:style>
+        <p:txBody>
+          <a:bodyPr rtlCol="0" anchor="ctr" wrap="square" lIns="146304" rIns="118872" tIns="118872" bIns="73152"/>
+          <a:lstStyle/>
+          <a:p>
+            <a:pPr algn="ctr">
+              <a:spcAft>
+                <a:spcPts val="700"/>
+              </a:spcAft>
+            </a:pPr>
+            <a:r>
+              <a:rPr sz="1250" b="1">
+                <a:solidFill>
+                  <a:srgbClr val="2F6E4E"/>
+                </a:solidFill>
+                <a:latin typeface="Segoe UI"/>
+              </a:rPr>
+              <a:t>Already built · human oversight</a:t>
+            </a:r>
+          </a:p>
+          <a:p>
+            <a:pPr>
+              <a:spcAft>
+                <a:spcPts val="300"/>
+              </a:spcAft>
+            </a:pPr>
+            <a:r>
+              <a:rPr sz="1150" b="0">
+                <a:solidFill>
+                  <a:srgbClr val="566573"/>
+                </a:solidFill>
+                <a:latin typeface="Segoe UI"/>
+              </a:rPr>
+              <a:t>Coaches review the AI output and rate it</a:t>
+            </a:r>
+          </a:p>
+          <a:p>
+            <a:pPr>
+              <a:spcAft>
+                <a:spcPts val="300"/>
+              </a:spcAft>
+            </a:pPr>
+            <a:r>
+              <a:rPr sz="1150" b="0">
+                <a:solidFill>
+                  <a:srgbClr val="566573"/>
+                </a:solidFill>
+                <a:latin typeface="Segoe UI"/>
+              </a:rPr>
+              <a:t>(1–5) via the feedback loop.</a:t>
+            </a:r>
+          </a:p>
+          <a:p>
+            <a:pPr>
+              <a:spcAft>
+                <a:spcPts val="300"/>
+              </a:spcAft>
+            </a:pPr>
+            <a:r>
+              <a:rPr sz="1150" b="0">
+                <a:solidFill>
+                  <a:srgbClr val="122A42"/>
+                </a:solidFill>
+                <a:latin typeface="Segoe UI"/>
+              </a:rPr>
+              <a:t>→ the AI assists; it does not decide alone.</a:t>
+            </a:r>
+          </a:p>
+        </p:txBody>
+      </p:sp>
+      <p:sp>
+        <p:nvSpPr>
+          <p:cNvPr id="7" name="Rectangle 6"/>
+          <p:cNvSpPr/>
+          <p:nvPr/>
+        </p:nvSpPr>
+        <p:spPr>
+          <a:xfrm>
+            <a:off x="640080" y="5852160"/>
+            <a:ext cx="10927080" cy="658368"/>
+          </a:xfrm>
+          <a:prstGeom prst="rect">
+            <a:avLst/>
+          </a:prstGeom>
+          <a:solidFill>
+            <a:srgbClr val="EAEEF2"/>
+          </a:solidFill>
+          <a:ln>
+            <a:noFill/>
+          </a:ln>
+          <a:effectLst/>
+        </p:spPr>
+        <p:style>
+          <a:lnRef idx="1">
+            <a:schemeClr val="accent1"/>
+          </a:lnRef>
+          <a:fillRef idx="3">
+            <a:schemeClr val="accent1"/>
+          </a:fillRef>
+          <a:effectRef idx="2">
+            <a:schemeClr val="accent1"/>
+          </a:effectRef>
+          <a:fontRef idx="minor">
+            <a:schemeClr val="lt1"/>
+          </a:fontRef>
+        </p:style>
+        <p:txBody>
+          <a:bodyPr rtlCol="0" anchor="ctr" wrap="square" lIns="201168" rIns="201168"/>
+          <a:lstStyle/>
+          <a:p>
+            <a:pPr algn="ctr">
+              <a:spcAft>
+                <a:spcPts val="0"/>
+              </a:spcAft>
+            </a:pPr>
+            <a:r>
+              <a:rPr sz="1350" b="1">
+                <a:solidFill>
+                  <a:srgbClr val="122A42"/>
+                </a:solidFill>
+                <a:latin typeface="Segoe UI"/>
+              </a:rPr>
+              <a:t>Next: a reference transcript, then Responsible AI shown in action on it — with how we implement each part.</a:t>
+            </a:r>
+          </a:p>
+        </p:txBody>
+      </p:sp>
     </p:spTree>
   </p:cSld>
   <p:clrMapOvr>
@@ -5540,7 +4899,7 @@
 </p:sld>
 </file>
 
-<file path=ppt/slides/slide6.xml><?xml version="1.0" encoding="utf-8"?>
+<file path=ppt/slides/slide5.xml><?xml version="1.0" encoding="utf-8"?>
 <p:sld xmlns:a="http://schemas.openxmlformats.org/drawingml/2006/main" xmlns:p="http://schemas.openxmlformats.org/presentationml/2006/main" xmlns:r="http://schemas.openxmlformats.org/officeDocument/2006/relationships">
   <p:cSld>
     <p:bg>
@@ -5610,8 +4969,8 @@
         </p:nvSpPr>
         <p:spPr>
           <a:xfrm>
-            <a:off x="640080" y="365760"/>
-            <a:ext cx="11247120" cy="1234440"/>
+            <a:off x="640080" y="347472"/>
+            <a:ext cx="11247120" cy="1188720"/>
           </a:xfrm>
           <a:prstGeom prst="rect">
             <a:avLst/>
@@ -5636,7 +4995,7 @@
                 </a:solidFill>
                 <a:latin typeface="Segoe UI"/>
               </a:rPr>
-              <a:t>EXAMPLE USE CASE · APIX AI PIPELINE</a:t>
+              <a:t>REFERENCE TRANSCRIPT</a:t>
             </a:r>
           </a:p>
           <a:p>
@@ -5646,178 +5005,38 @@
               </a:spcAft>
             </a:pPr>
             <a:r>
-              <a:rPr sz="2500" b="1">
+              <a:rPr sz="2400" b="1">
                 <a:solidFill>
                   <a:srgbClr val="1C2733"/>
                 </a:solidFill>
                 <a:latin typeface="Segoe UI"/>
               </a:rPr>
-              <a:t>Why it matters most where AI scores people</a:t>
-            </a:r>
-          </a:p>
-        </p:txBody>
-      </p:sp>
-      <p:sp>
-        <p:nvSpPr>
-          <p:cNvPr id="4" name="TextBox 3"/>
-          <p:cNvSpPr txBox="1"/>
+              <a:t>One mock call we'll refer to throughout (illustrative)</a:t>
+            </a:r>
+          </a:p>
+        </p:txBody>
+      </p:sp>
+      <p:sp>
+        <p:nvSpPr>
+          <p:cNvPr id="4" name="Rectangle 3"/>
+          <p:cNvSpPr/>
           <p:nvPr/>
         </p:nvSpPr>
         <p:spPr>
           <a:xfrm>
-            <a:off x="685800" y="1554480"/>
-            <a:ext cx="10881360" cy="548640"/>
-          </a:xfrm>
-          <a:prstGeom prst="rect">
-            <a:avLst/>
-          </a:prstGeom>
-          <a:noFill/>
-        </p:spPr>
-        <p:txBody>
-          <a:bodyPr wrap="square">
-            <a:spAutoFit/>
-          </a:bodyPr>
-          <a:lstStyle/>
-          <a:p>
-            <a:pPr>
-              <a:spcAft>
-                <a:spcPts val="0"/>
-              </a:spcAft>
-            </a:pPr>
-            <a:r>
-              <a:rPr sz="1400" b="0">
-                <a:solidFill>
-                  <a:srgbClr val="566573"/>
-                </a:solidFill>
-                <a:latin typeface="Segoe UI"/>
-              </a:rPr>
-              <a:t>The APIX AI pipeline uses AI to help evaluate agents' work — a high-stakes case. It is also already well suited to Responsible AI:</a:t>
-            </a:r>
-          </a:p>
-        </p:txBody>
-      </p:sp>
-      <p:sp>
-        <p:nvSpPr>
-          <p:cNvPr id="5" name="TextBox 4"/>
-          <p:cNvSpPr txBox="1"/>
-          <p:nvPr/>
-        </p:nvSpPr>
-        <p:spPr>
-          <a:xfrm>
-            <a:off x="685800" y="2148840"/>
-            <a:ext cx="10881360" cy="4023360"/>
-          </a:xfrm>
-          <a:prstGeom prst="rect">
-            <a:avLst/>
-          </a:prstGeom>
-          <a:noFill/>
-        </p:spPr>
-        <p:txBody>
-          <a:bodyPr wrap="square">
-            <a:spAutoFit/>
-          </a:bodyPr>
-          <a:lstStyle/>
-          <a:p>
-            <a:pPr>
-              <a:spcAft>
-                <a:spcPts val="1300"/>
-              </a:spcAft>
-            </a:pPr>
-            <a:r>
-              <a:rPr sz="1500" b="0">
-                <a:solidFill>
-                  <a:srgbClr val="1C2733"/>
-                </a:solidFill>
-                <a:latin typeface="Segoe UI"/>
-              </a:rPr>
-              <a:t>Fairness — check scores don't disadvantage any group (e.g. non-native speakers)</a:t>
-            </a:r>
-          </a:p>
-          <a:p>
-            <a:pPr>
-              <a:spcAft>
-                <a:spcPts val="1300"/>
-              </a:spcAft>
-            </a:pPr>
-            <a:r>
-              <a:rPr sz="1500" b="0">
-                <a:solidFill>
-                  <a:srgbClr val="1C2733"/>
-                </a:solidFill>
-                <a:latin typeface="Segoe UI"/>
-              </a:rPr>
-              <a:t>Transparency — every score already carries the exact call moments behind it</a:t>
-            </a:r>
-          </a:p>
-          <a:p>
-            <a:pPr>
-              <a:spcAft>
-                <a:spcPts val="1300"/>
-              </a:spcAft>
-            </a:pPr>
-            <a:r>
-              <a:rPr sz="1500" b="0">
-                <a:solidFill>
-                  <a:srgbClr val="1C2733"/>
-                </a:solidFill>
-                <a:latin typeface="Segoe UI"/>
-              </a:rPr>
-              <a:t>Human oversight — coaches review; the AI assists, it doesn't decide alone</a:t>
-            </a:r>
-          </a:p>
-          <a:p>
-            <a:pPr>
-              <a:spcAft>
-                <a:spcPts val="1300"/>
-              </a:spcAft>
-            </a:pPr>
-            <a:r>
-              <a:rPr sz="1500" b="0">
-                <a:solidFill>
-                  <a:srgbClr val="1C2733"/>
-                </a:solidFill>
-                <a:latin typeface="Segoe UI"/>
-              </a:rPr>
-              <a:t>Privacy — customer details in recordings are protected</a:t>
-            </a:r>
-          </a:p>
-          <a:p>
-            <a:pPr>
-              <a:spcAft>
-                <a:spcPts val="1300"/>
-              </a:spcAft>
-            </a:pPr>
-            <a:r>
-              <a:rPr sz="1500" b="0">
-                <a:solidFill>
-                  <a:srgbClr val="1C2733"/>
-                </a:solidFill>
-                <a:latin typeface="Segoe UI"/>
-              </a:rPr>
-              <a:t>Evidence-based — coaching is tied to what actually happened on the call</a:t>
-            </a:r>
-          </a:p>
-        </p:txBody>
-      </p:sp>
-      <p:sp>
-        <p:nvSpPr>
-          <p:cNvPr id="6" name="Rectangle 5"/>
-          <p:cNvSpPr/>
-          <p:nvPr/>
-        </p:nvSpPr>
-        <p:spPr>
-          <a:xfrm>
-            <a:off x="640080" y="5486400"/>
-            <a:ext cx="10927080" cy="822960"/>
+            <a:off x="640080" y="1737360"/>
+            <a:ext cx="7498079" cy="4114800"/>
           </a:xfrm>
           <a:prstGeom prst="rect">
             <a:avLst/>
           </a:prstGeom>
           <a:solidFill>
-            <a:srgbClr val="E8F0EA"/>
+            <a:srgbClr val="F3F1EC"/>
           </a:solidFill>
-          <a:ln>
-            <a:noFill/>
+          <a:ln w="9525">
+            <a:solidFill>
+              <a:srgbClr val="D5DBE1"/>
+            </a:solidFill>
           </a:ln>
           <a:effectLst/>
         </p:spPr>
@@ -5836,22 +5055,401 @@
           </a:fontRef>
         </p:style>
         <p:txBody>
-          <a:bodyPr rtlCol="0" anchor="ctr" wrap="square" lIns="201168" rIns="201168"/>
+          <a:bodyPr rtlCol="0" anchor="ctr" wrap="square" lIns="146304" rIns="118872" tIns="118872" bIns="73152"/>
           <a:lstStyle/>
           <a:p>
             <a:pPr algn="ctr">
               <a:spcAft>
-                <a:spcPts val="0"/>
-              </a:spcAft>
-            </a:pPr>
-            <a:r>
-              <a:rPr sz="1400" b="1">
-                <a:solidFill>
-                  <a:srgbClr val="2F6E4E"/>
-                </a:solidFill>
-                <a:latin typeface="Segoe UI"/>
-              </a:rPr>
-              <a:t>Because APIX already keeps the evidence and keeps coaches in the loop, it shows Responsible AI in practice — a template the next use case reuses.</a:t>
+                <a:spcPts val="700"/>
+              </a:spcAft>
+            </a:pPr>
+            <a:r>
+              <a:rPr sz="1250" b="1">
+                <a:solidFill>
+                  <a:srgbClr val="122A42"/>
+                </a:solidFill>
+                <a:latin typeface="Segoe UI"/>
+              </a:rPr>
+              <a:t>MOCK CALL TRANSCRIPT — APIX example</a:t>
+            </a:r>
+          </a:p>
+          <a:p>
+            <a:pPr>
+              <a:spcAft>
+                <a:spcPts val="200"/>
+              </a:spcAft>
+            </a:pPr>
+            <a:r>
+              <a:rPr sz="1150" b="0">
+                <a:solidFill>
+                  <a:srgbClr val="1C2733"/>
+                </a:solidFill>
+                <a:latin typeface="Consolas"/>
+              </a:rPr>
+              <a:t>[1] Agent: Verizon, this is Priya. How can I help?</a:t>
+            </a:r>
+          </a:p>
+          <a:p>
+            <a:pPr>
+              <a:spcAft>
+                <a:spcPts val="200"/>
+              </a:spcAft>
+            </a:pPr>
+            <a:r>
+              <a:rPr sz="1150" b="0">
+                <a:solidFill>
+                  <a:srgbClr val="1C2733"/>
+                </a:solidFill>
+                <a:latin typeface="Consolas"/>
+              </a:rPr>
+              <a:t>[2] Cust : My new phone won't activate and I've been on</a:t>
+            </a:r>
+          </a:p>
+          <a:p>
+            <a:pPr>
+              <a:spcAft>
+                <a:spcPts val="200"/>
+              </a:spcAft>
+            </a:pPr>
+            <a:r>
+              <a:rPr sz="1150" b="0">
+                <a:solidFill>
+                  <a:srgbClr val="1C2733"/>
+                </a:solidFill>
+                <a:latin typeface="Consolas"/>
+              </a:rPr>
+              <a:t>           hold forever. My card number is 4147 8992...</a:t>
+            </a:r>
+          </a:p>
+          <a:p>
+            <a:pPr>
+              <a:spcAft>
+                <a:spcPts val="200"/>
+              </a:spcAft>
+            </a:pPr>
+            <a:r>
+              <a:rPr sz="1150" b="0">
+                <a:solidFill>
+                  <a:srgbClr val="1C2733"/>
+                </a:solidFill>
+                <a:latin typeface="Consolas"/>
+              </a:rPr>
+              <a:t>[3] Agent: No need to read the full number — I can see the</a:t>
+            </a:r>
+          </a:p>
+          <a:p>
+            <a:pPr>
+              <a:spcAft>
+                <a:spcPts val="200"/>
+              </a:spcAft>
+            </a:pPr>
+            <a:r>
+              <a:rPr sz="1150" b="0">
+                <a:solidFill>
+                  <a:srgbClr val="1C2733"/>
+                </a:solidFill>
+                <a:latin typeface="Consolas"/>
+              </a:rPr>
+              <a:t>           account. Let me stop you there.</a:t>
+            </a:r>
+          </a:p>
+          <a:p>
+            <a:pPr>
+              <a:spcAft>
+                <a:spcPts val="200"/>
+              </a:spcAft>
+            </a:pPr>
+            <a:r>
+              <a:rPr sz="1150" b="0">
+                <a:solidFill>
+                  <a:srgbClr val="1C2733"/>
+                </a:solidFill>
+                <a:latin typeface="Consolas"/>
+              </a:rPr>
+              <a:t>[4] Cust : Okay. I'm just really frustrated.</a:t>
+            </a:r>
+          </a:p>
+          <a:p>
+            <a:pPr>
+              <a:spcAft>
+                <a:spcPts val="200"/>
+              </a:spcAft>
+            </a:pPr>
+            <a:r>
+              <a:rPr sz="1150" b="0">
+                <a:solidFill>
+                  <a:srgbClr val="1C2733"/>
+                </a:solidFill>
+                <a:latin typeface="Consolas"/>
+              </a:rPr>
+              <a:t>[5] Agent: I completely understand. Let me fix this now.</a:t>
+            </a:r>
+          </a:p>
+          <a:p>
+            <a:pPr>
+              <a:spcAft>
+                <a:spcPts val="200"/>
+              </a:spcAft>
+            </a:pPr>
+            <a:r>
+              <a:rPr sz="1150" b="0">
+                <a:solidFill>
+                  <a:srgbClr val="1C2733"/>
+                </a:solidFill>
+                <a:latin typeface="Consolas"/>
+              </a:rPr>
+              <a:t>[6] Agent: I've pushed the activation and credited the wait</a:t>
+            </a:r>
+          </a:p>
+          <a:p>
+            <a:pPr>
+              <a:spcAft>
+                <a:spcPts val="200"/>
+              </a:spcAft>
+            </a:pPr>
+            <a:r>
+              <a:rPr sz="1150" b="0">
+                <a:solidFill>
+                  <a:srgbClr val="1C2733"/>
+                </a:solidFill>
+                <a:latin typeface="Consolas"/>
+              </a:rPr>
+              <a:t>           time. You're all set.</a:t>
+            </a:r>
+          </a:p>
+          <a:p>
+            <a:pPr>
+              <a:spcAft>
+                <a:spcPts val="200"/>
+              </a:spcAft>
+            </a:pPr>
+            <a:r>
+              <a:rPr sz="1150" b="0">
+                <a:solidFill>
+                  <a:srgbClr val="1C2733"/>
+                </a:solidFill>
+                <a:latin typeface="Consolas"/>
+              </a:rPr>
+              <a:t>[7] Cust : Oh, thank you — that's a relief.</a:t>
+            </a:r>
+          </a:p>
+        </p:txBody>
+      </p:sp>
+      <p:sp>
+        <p:nvSpPr>
+          <p:cNvPr id="5" name="Rectangle 4"/>
+          <p:cNvSpPr/>
+          <p:nvPr/>
+        </p:nvSpPr>
+        <p:spPr>
+          <a:xfrm>
+            <a:off x="8321040" y="1737360"/>
+            <a:ext cx="3246120" cy="4114800"/>
+          </a:xfrm>
+          <a:prstGeom prst="rect">
+            <a:avLst/>
+          </a:prstGeom>
+          <a:solidFill>
+            <a:srgbClr val="EAEEF2"/>
+          </a:solidFill>
+          <a:ln w="9525">
+            <a:solidFill>
+              <a:srgbClr val="D5DBE1"/>
+            </a:solidFill>
+          </a:ln>
+          <a:effectLst/>
+        </p:spPr>
+        <p:style>
+          <a:lnRef idx="1">
+            <a:schemeClr val="accent1"/>
+          </a:lnRef>
+          <a:fillRef idx="3">
+            <a:schemeClr val="accent1"/>
+          </a:fillRef>
+          <a:effectRef idx="2">
+            <a:schemeClr val="accent1"/>
+          </a:effectRef>
+          <a:fontRef idx="minor">
+            <a:schemeClr val="lt1"/>
+          </a:fontRef>
+        </p:style>
+        <p:txBody>
+          <a:bodyPr rtlCol="0" anchor="ctr" wrap="square" lIns="146304" rIns="118872" tIns="118872" bIns="73152"/>
+          <a:lstStyle/>
+          <a:p>
+            <a:pPr algn="ctr">
+              <a:spcAft>
+                <a:spcPts val="700"/>
+              </a:spcAft>
+            </a:pPr>
+            <a:r>
+              <a:rPr sz="1250" b="1">
+                <a:solidFill>
+                  <a:srgbClr val="16324F"/>
+                </a:solidFill>
+                <a:latin typeface="Segoe UI"/>
+              </a:rPr>
+              <a:t>WHAT'S IN THIS CALL</a:t>
+            </a:r>
+          </a:p>
+          <a:p>
+            <a:pPr>
+              <a:spcAft>
+                <a:spcPts val="300"/>
+              </a:spcAft>
+            </a:pPr>
+            <a:r>
+              <a:rPr sz="1150" b="0">
+                <a:solidFill>
+                  <a:srgbClr val="566573"/>
+                </a:solidFill>
+                <a:latin typeface="Segoe UI"/>
+              </a:rPr>
+              <a:t>Card number spoken  [2]</a:t>
+            </a:r>
+          </a:p>
+          <a:p>
+            <a:pPr>
+              <a:spcAft>
+                <a:spcPts val="300"/>
+              </a:spcAft>
+            </a:pPr>
+            <a:r>
+              <a:rPr sz="1150" b="0">
+                <a:solidFill>
+                  <a:srgbClr val="566573"/>
+                </a:solidFill>
+                <a:latin typeface="Segoe UI"/>
+              </a:rPr>
+              <a:t>Agent deflects it   [3]</a:t>
+            </a:r>
+          </a:p>
+          <a:p>
+            <a:pPr>
+              <a:spcAft>
+                <a:spcPts val="300"/>
+              </a:spcAft>
+            </a:pPr>
+            <a:r>
+              <a:rPr sz="1150" b="0">
+                <a:solidFill>
+                  <a:srgbClr val="566573"/>
+                </a:solidFill>
+                <a:latin typeface="Segoe UI"/>
+              </a:rPr>
+              <a:t>Frustration         [4]</a:t>
+            </a:r>
+          </a:p>
+          <a:p>
+            <a:pPr>
+              <a:spcAft>
+                <a:spcPts val="300"/>
+              </a:spcAft>
+            </a:pPr>
+            <a:r>
+              <a:rPr sz="1150" b="0">
+                <a:solidFill>
+                  <a:srgbClr val="566573"/>
+                </a:solidFill>
+                <a:latin typeface="Segoe UI"/>
+              </a:rPr>
+              <a:t>Empathy             [5]</a:t>
+            </a:r>
+          </a:p>
+          <a:p>
+            <a:pPr>
+              <a:spcAft>
+                <a:spcPts val="300"/>
+              </a:spcAft>
+            </a:pPr>
+            <a:r>
+              <a:rPr sz="1150" b="0">
+                <a:solidFill>
+                  <a:srgbClr val="566573"/>
+                </a:solidFill>
+                <a:latin typeface="Segoe UI"/>
+              </a:rPr>
+              <a:t>Ownership           [5-6]</a:t>
+            </a:r>
+          </a:p>
+          <a:p>
+            <a:pPr>
+              <a:spcAft>
+                <a:spcPts val="300"/>
+              </a:spcAft>
+            </a:pPr>
+            <a:r>
+              <a:rPr sz="1150" b="0">
+                <a:solidFill>
+                  <a:srgbClr val="566573"/>
+                </a:solidFill>
+                <a:latin typeface="Segoe UI"/>
+              </a:rPr>
+              <a:t>Resolution          [6]</a:t>
+            </a:r>
+          </a:p>
+          <a:p>
+            <a:pPr>
+              <a:spcAft>
+                <a:spcPts val="300"/>
+              </a:spcAft>
+            </a:pPr>
+            <a:r>
+              <a:rPr sz="1150" b="0">
+                <a:solidFill>
+                  <a:srgbClr val="566573"/>
+                </a:solidFill>
+                <a:latin typeface="Segoe UI"/>
+              </a:rPr>
+              <a:t>Positive close      [7]</a:t>
+            </a:r>
+          </a:p>
+          <a:p>
+            <a:pPr>
+              <a:spcAft>
+                <a:spcPts val="300"/>
+              </a:spcAft>
+            </a:pPr>
+            <a:r>
+              <a:rPr sz="1150" b="0">
+                <a:solidFill>
+                  <a:srgbClr val="1C2733"/>
+                </a:solidFill>
+                <a:latin typeface="Segoe UI"/>
+              </a:rPr>
+              <a:t/>
+            </a:r>
+          </a:p>
+          <a:p>
+            <a:pPr>
+              <a:spcAft>
+                <a:spcPts val="300"/>
+              </a:spcAft>
+            </a:pPr>
+            <a:r>
+              <a:rPr sz="1150" b="0">
+                <a:solidFill>
+                  <a:srgbClr val="122A42"/>
+                </a:solidFill>
+                <a:latin typeface="Segoe UI"/>
+              </a:rPr>
+              <a:t>Every RAI point next</a:t>
+            </a:r>
+          </a:p>
+          <a:p>
+            <a:pPr>
+              <a:spcAft>
+                <a:spcPts val="300"/>
+              </a:spcAft>
+            </a:pPr>
+            <a:r>
+              <a:rPr sz="1150" b="0">
+                <a:solidFill>
+                  <a:srgbClr val="122A42"/>
+                </a:solidFill>
+                <a:latin typeface="Segoe UI"/>
+              </a:rPr>
+              <a:t>maps to a line here.</a:t>
             </a:r>
           </a:p>
         </p:txBody>
@@ -5864,7 +5462,7 @@
 </p:sld>
 </file>
 
-<file path=ppt/slides/slide7.xml><?xml version="1.0" encoding="utf-8"?>
+<file path=ppt/slides/slide6.xml><?xml version="1.0" encoding="utf-8"?>
 <p:sld xmlns:a="http://schemas.openxmlformats.org/drawingml/2006/main" xmlns:p="http://schemas.openxmlformats.org/presentationml/2006/main" xmlns:r="http://schemas.openxmlformats.org/officeDocument/2006/relationships">
   <p:cSld>
     <p:bg>
@@ -5934,8 +5532,8 @@
         </p:nvSpPr>
         <p:spPr>
           <a:xfrm>
-            <a:off x="640080" y="365760"/>
-            <a:ext cx="11247120" cy="1234440"/>
+            <a:off x="640080" y="347472"/>
+            <a:ext cx="11247120" cy="1188720"/>
           </a:xfrm>
           <a:prstGeom prst="rect">
             <a:avLst/>
@@ -5960,7 +5558,7 @@
                 </a:solidFill>
                 <a:latin typeface="Segoe UI"/>
               </a:rPr>
-              <a:t>WORKED EXAMPLE</a:t>
+              <a:t>RESPONSIBLE AI IN ACTION  (1 / 2)</a:t>
             </a:r>
           </a:p>
           <a:p>
@@ -5970,204 +5568,385 @@
               </a:spcAft>
             </a:pPr>
             <a:r>
-              <a:rPr sz="2500" b="1">
+              <a:rPr sz="2400" b="1">
                 <a:solidFill>
                   <a:srgbClr val="1C2733"/>
                 </a:solidFill>
                 <a:latin typeface="Segoe UI"/>
               </a:rPr>
-              <a:t>Transparency on a real call — every score has its evidence</a:t>
-            </a:r>
-          </a:p>
-        </p:txBody>
-      </p:sp>
-      <p:sp>
-        <p:nvSpPr>
-          <p:cNvPr id="4" name="Rectangle 3"/>
-          <p:cNvSpPr/>
+              <a:t>On this call: what it catches, and how we build it</a:t>
+            </a:r>
+          </a:p>
+        </p:txBody>
+      </p:sp>
+      <p:graphicFrame>
+        <p:nvGraphicFramePr>
+          <p:cNvPr id="4" name="Table 3"/>
+          <p:cNvGraphicFramePr>
+            <a:graphicFrameLocks noGrp="1"/>
+          </p:cNvGraphicFramePr>
           <p:nvPr/>
-        </p:nvSpPr>
-        <p:spPr>
-          <a:xfrm>
-            <a:off x="640080" y="1737360"/>
-            <a:ext cx="6126480" cy="4069080"/>
-          </a:xfrm>
-          <a:prstGeom prst="rect">
-            <a:avLst/>
-          </a:prstGeom>
-          <a:solidFill>
-            <a:srgbClr val="F3F1EC"/>
-          </a:solidFill>
-          <a:ln w="9525">
-            <a:solidFill>
-              <a:srgbClr val="D5DBE1"/>
-            </a:solidFill>
-          </a:ln>
-          <a:effectLst/>
-        </p:spPr>
-        <p:style>
-          <a:lnRef idx="1">
-            <a:schemeClr val="accent1"/>
-          </a:lnRef>
-          <a:fillRef idx="3">
-            <a:schemeClr val="accent1"/>
-          </a:fillRef>
-          <a:effectRef idx="2">
-            <a:schemeClr val="accent1"/>
-          </a:effectRef>
-          <a:fontRef idx="minor">
-            <a:schemeClr val="lt1"/>
-          </a:fontRef>
-        </p:style>
-        <p:txBody>
-          <a:bodyPr rtlCol="0" anchor="ctr" wrap="square" lIns="146304" rIns="128016" tIns="118872" bIns="91440"/>
-          <a:lstStyle/>
-          <a:p>
-            <a:pPr algn="ctr">
-              <a:spcAft>
-                <a:spcPts val="700"/>
-              </a:spcAft>
-            </a:pPr>
-            <a:r>
-              <a:rPr sz="1250" b="1">
-                <a:solidFill>
-                  <a:srgbClr val="122A42"/>
-                </a:solidFill>
-                <a:latin typeface="Segoe UI"/>
-              </a:rPr>
-              <a:t>MOCK CALL TRANSCRIPT — APIX example (illustrative)</a:t>
-            </a:r>
-          </a:p>
-          <a:p>
-            <a:pPr>
-              <a:spcAft>
-                <a:spcPts val="300"/>
-              </a:spcAft>
-            </a:pPr>
-            <a:r>
-              <a:rPr sz="1150" b="0">
-                <a:solidFill>
-                  <a:srgbClr val="1C2733"/>
-                </a:solidFill>
-                <a:latin typeface="Consolas"/>
-              </a:rPr>
-              <a:t>[10] Cust : My phone died right before an</a:t>
-            </a:r>
-          </a:p>
-          <a:p>
-            <a:pPr>
-              <a:spcAft>
-                <a:spcPts val="300"/>
-              </a:spcAft>
-            </a:pPr>
-            <a:r>
-              <a:rPr sz="1150" b="0">
-                <a:solidFill>
-                  <a:srgbClr val="1C2733"/>
-                </a:solidFill>
-                <a:latin typeface="Consolas"/>
-              </a:rPr>
-              <a:t>            important call. I'm really stressed.</a:t>
-            </a:r>
-          </a:p>
-          <a:p>
-            <a:pPr>
-              <a:spcAft>
-                <a:spcPts val="300"/>
-              </a:spcAft>
-            </a:pPr>
-            <a:r>
-              <a:rPr sz="1150" b="0">
-                <a:solidFill>
-                  <a:srgbClr val="1C2733"/>
-                </a:solidFill>
-                <a:latin typeface="Consolas"/>
-              </a:rPr>
-              <a:t>[11] Agent: I completely understand how</a:t>
-            </a:r>
-          </a:p>
-          <a:p>
-            <a:pPr>
-              <a:spcAft>
-                <a:spcPts val="300"/>
-              </a:spcAft>
-            </a:pPr>
-            <a:r>
-              <a:rPr sz="1150" b="0">
-                <a:solidFill>
-                  <a:srgbClr val="1C2733"/>
-                </a:solidFill>
-                <a:latin typeface="Consolas"/>
-              </a:rPr>
-              <a:t>            frustrating that is — let me sort</a:t>
-            </a:r>
-          </a:p>
-          <a:p>
-            <a:pPr>
-              <a:spcAft>
-                <a:spcPts val="300"/>
-              </a:spcAft>
-            </a:pPr>
-            <a:r>
-              <a:rPr sz="1150" b="0">
-                <a:solidFill>
-                  <a:srgbClr val="1C2733"/>
-                </a:solidFill>
-                <a:latin typeface="Consolas"/>
-              </a:rPr>
-              <a:t>            this out for you right now.</a:t>
-            </a:r>
-          </a:p>
-          <a:p>
-            <a:pPr>
-              <a:spcAft>
-                <a:spcPts val="300"/>
-              </a:spcAft>
-            </a:pPr>
-            <a:r>
-              <a:rPr sz="1150" b="0">
-                <a:solidFill>
-                  <a:srgbClr val="1C2733"/>
-                </a:solidFill>
-                <a:latin typeface="Consolas"/>
-              </a:rPr>
-              <a:t>[12] Agent: I've fast-tracked a replacement for</a:t>
-            </a:r>
-          </a:p>
-          <a:p>
-            <a:pPr>
-              <a:spcAft>
-                <a:spcPts val="300"/>
-              </a:spcAft>
-            </a:pPr>
-            <a:r>
-              <a:rPr sz="1150" b="0">
-                <a:solidFill>
-                  <a:srgbClr val="1C2733"/>
-                </a:solidFill>
-                <a:latin typeface="Consolas"/>
-              </a:rPr>
-              <a:t>            tomorrow and added a credit.</a:t>
-            </a:r>
-          </a:p>
-          <a:p>
-            <a:pPr>
-              <a:spcAft>
-                <a:spcPts val="300"/>
-              </a:spcAft>
-            </a:pPr>
-            <a:r>
-              <a:rPr sz="1150" b="0">
-                <a:solidFill>
-                  <a:srgbClr val="1C2733"/>
-                </a:solidFill>
-                <a:latin typeface="Consolas"/>
-              </a:rPr>
-              <a:t>[13] Cust : Thank you, that really helps.</a:t>
-            </a:r>
-          </a:p>
-        </p:txBody>
-      </p:sp>
+        </p:nvGraphicFramePr>
+        <p:xfrm>
+          <a:off x="640080" y="1783080"/>
+          <a:ext cx="10927080" cy="5257800"/>
+        </p:xfrm>
+        <a:graphic>
+          <a:graphicData uri="http://schemas.openxmlformats.org/drawingml/2006/table">
+            <a:tbl>
+              <a:tblPr firstRow="1">
+                <a:tableStyleId>{5C22544A-7EE6-4342-B048-85BDC9FD1C3A}</a:tableStyleId>
+              </a:tblPr>
+              <a:tblGrid>
+                <a:gridCol w="1737360"/>
+                <a:gridCol w="4297680"/>
+                <a:gridCol w="4892040"/>
+              </a:tblGrid>
+              <a:tr h="1051560">
+                <a:tc>
+                  <a:txBody>
+                    <a:bodyPr wrap="square"/>
+                    <a:lstStyle/>
+                    <a:p>
+                      <a:r>
+                        <a:rPr sz="1050" b="1">
+                          <a:solidFill>
+                            <a:srgbClr val="FFFFFF"/>
+                          </a:solidFill>
+                          <a:latin typeface="Segoe UI"/>
+                        </a:rPr>
+                        <a:t>Dimension</a:t>
+                      </a:r>
+                    </a:p>
+                  </a:txBody>
+                  <a:tcPr anchor="ctr" marL="82296" marR="54864" marT="27432" marB="27432">
+                    <a:solidFill>
+                      <a:srgbClr val="16324F"/>
+                    </a:solidFill>
+                  </a:tcPr>
+                </a:tc>
+                <a:tc>
+                  <a:txBody>
+                    <a:bodyPr wrap="square"/>
+                    <a:lstStyle/>
+                    <a:p>
+                      <a:r>
+                        <a:rPr sz="1050" b="1">
+                          <a:solidFill>
+                            <a:srgbClr val="FFFFFF"/>
+                          </a:solidFill>
+                          <a:latin typeface="Segoe UI"/>
+                        </a:rPr>
+                        <a:t>On the reference call (example)</a:t>
+                      </a:r>
+                    </a:p>
+                  </a:txBody>
+                  <a:tcPr anchor="ctr" marL="82296" marR="54864" marT="27432" marB="27432">
+                    <a:solidFill>
+                      <a:srgbClr val="16324F"/>
+                    </a:solidFill>
+                  </a:tcPr>
+                </a:tc>
+                <a:tc>
+                  <a:txBody>
+                    <a:bodyPr wrap="square"/>
+                    <a:lstStyle/>
+                    <a:p>
+                      <a:r>
+                        <a:rPr sz="1050" b="1">
+                          <a:solidFill>
+                            <a:srgbClr val="FFFFFF"/>
+                          </a:solidFill>
+                          <a:latin typeface="Segoe UI"/>
+                        </a:rPr>
+                        <a:t>How we implement it (in the pipeline)</a:t>
+                      </a:r>
+                    </a:p>
+                  </a:txBody>
+                  <a:tcPr anchor="ctr" marL="82296" marR="54864" marT="27432" marB="27432">
+                    <a:solidFill>
+                      <a:srgbClr val="16324F"/>
+                    </a:solidFill>
+                  </a:tcPr>
+                </a:tc>
+              </a:tr>
+              <a:tr h="1051560">
+                <a:tc>
+                  <a:txBody>
+                    <a:bodyPr wrap="square"/>
+                    <a:lstStyle/>
+                    <a:p>
+                      <a:r>
+                        <a:rPr sz="1100" b="1">
+                          <a:solidFill>
+                            <a:srgbClr val="1C2733"/>
+                          </a:solidFill>
+                          <a:latin typeface="Segoe UI"/>
+                        </a:rPr>
+                        <a:t>Transparency</a:t>
+                      </a:r>
+                    </a:p>
+                  </a:txBody>
+                  <a:tcPr anchor="ctr" marL="82296" marR="54864" marT="27432" marB="27432">
+                    <a:solidFill>
+                      <a:srgbClr val="FFFFFF"/>
+                    </a:solidFill>
+                  </a:tcPr>
+                </a:tc>
+                <a:tc>
+                  <a:txBody>
+                    <a:bodyPr wrap="square"/>
+                    <a:lstStyle/>
+                    <a:p>
+                      <a:r>
+                        <a:rPr sz="1100" b="0">
+                          <a:solidFill>
+                            <a:srgbClr val="566573"/>
+                          </a:solidFill>
+                          <a:latin typeface="Consolas"/>
+                        </a:rPr>
+                        <a:t>empathy = 0.9  ← line 5;  experience = Good  ← line 7</a:t>
+                      </a:r>
+                    </a:p>
+                  </a:txBody>
+                  <a:tcPr anchor="ctr" marL="82296" marR="54864" marT="27432" marB="27432">
+                    <a:solidFill>
+                      <a:srgbClr val="FFFFFF"/>
+                    </a:solidFill>
+                  </a:tcPr>
+                </a:tc>
+                <a:tc>
+                  <a:txBody>
+                    <a:bodyPr wrap="square"/>
+                    <a:lstStyle/>
+                    <a:p>
+                      <a:r>
+                        <a:rPr sz="1100" b="0">
+                          <a:solidFill>
+                            <a:srgbClr val="566573"/>
+                          </a:solidFill>
+                          <a:latin typeface="Segoe UI"/>
+                        </a:rPr>
+                        <a:t>Each analysis field already stores segment_ids; render those lines beside the score in the coaching UI.</a:t>
+                      </a:r>
+                    </a:p>
+                  </a:txBody>
+                  <a:tcPr anchor="ctr" marL="82296" marR="54864" marT="27432" marB="27432">
+                    <a:solidFill>
+                      <a:srgbClr val="FFFFFF"/>
+                    </a:solidFill>
+                  </a:tcPr>
+                </a:tc>
+              </a:tr>
+              <a:tr h="1051560">
+                <a:tc>
+                  <a:txBody>
+                    <a:bodyPr wrap="square"/>
+                    <a:lstStyle/>
+                    <a:p>
+                      <a:r>
+                        <a:rPr sz="1100" b="1">
+                          <a:solidFill>
+                            <a:srgbClr val="1C2733"/>
+                          </a:solidFill>
+                          <a:latin typeface="Segoe UI"/>
+                        </a:rPr>
+                        <a:t>Evidence /
+groundedness</a:t>
+                      </a:r>
+                    </a:p>
+                  </a:txBody>
+                  <a:tcPr anchor="ctr" marL="82296" marR="54864" marT="27432" marB="27432">
+                    <a:solidFill>
+                      <a:srgbClr val="F6F8FA"/>
+                    </a:solidFill>
+                  </a:tcPr>
+                </a:tc>
+                <a:tc>
+                  <a:txBody>
+                    <a:bodyPr wrap="square"/>
+                    <a:lstStyle/>
+                    <a:p>
+                      <a:r>
+                        <a:rPr sz="1100" b="0">
+                          <a:solidFill>
+                            <a:srgbClr val="566573"/>
+                          </a:solidFill>
+                          <a:latin typeface="Consolas"/>
+                        </a:rPr>
+                        <a:t>A tip “agent lacked empathy” has no supporting line → blocked</a:t>
+                      </a:r>
+                    </a:p>
+                  </a:txBody>
+                  <a:tcPr anchor="ctr" marL="82296" marR="54864" marT="27432" marB="27432">
+                    <a:solidFill>
+                      <a:srgbClr val="F6F8FA"/>
+                    </a:solidFill>
+                  </a:tcPr>
+                </a:tc>
+                <a:tc>
+                  <a:txBody>
+                    <a:bodyPr wrap="square"/>
+                    <a:lstStyle/>
+                    <a:p>
+                      <a:r>
+                        <a:rPr sz="1100" b="0">
+                          <a:solidFill>
+                            <a:srgbClr val="566573"/>
+                          </a:solidFill>
+                          <a:latin typeface="Segoe UI"/>
+                        </a:rPr>
+                        <a:t>Pydantic model_validator rejects any positive judgment or tip without a valid segment_id (enforced at analysis output).</a:t>
+                      </a:r>
+                    </a:p>
+                  </a:txBody>
+                  <a:tcPr anchor="ctr" marL="82296" marR="54864" marT="27432" marB="27432">
+                    <a:solidFill>
+                      <a:srgbClr val="F6F8FA"/>
+                    </a:solidFill>
+                  </a:tcPr>
+                </a:tc>
+              </a:tr>
+              <a:tr h="1051560">
+                <a:tc>
+                  <a:txBody>
+                    <a:bodyPr wrap="square"/>
+                    <a:lstStyle/>
+                    <a:p>
+                      <a:r>
+                        <a:rPr sz="1100" b="1">
+                          <a:solidFill>
+                            <a:srgbClr val="1C2733"/>
+                          </a:solidFill>
+                          <a:latin typeface="Segoe UI"/>
+                        </a:rPr>
+                        <a:t>Privacy</a:t>
+                      </a:r>
+                    </a:p>
+                  </a:txBody>
+                  <a:tcPr anchor="ctr" marL="82296" marR="54864" marT="27432" marB="27432">
+                    <a:solidFill>
+                      <a:srgbClr val="FFFFFF"/>
+                    </a:solidFill>
+                  </a:tcPr>
+                </a:tc>
+                <a:tc>
+                  <a:txBody>
+                    <a:bodyPr wrap="square"/>
+                    <a:lstStyle/>
+                    <a:p>
+                      <a:r>
+                        <a:rPr sz="1100" b="0">
+                          <a:solidFill>
+                            <a:srgbClr val="566573"/>
+                          </a:solidFill>
+                          <a:latin typeface="Consolas"/>
+                        </a:rPr>
+                        <a:t>Card number on line 2 is detected and masked</a:t>
+                      </a:r>
+                    </a:p>
+                  </a:txBody>
+                  <a:tcPr anchor="ctr" marL="82296" marR="54864" marT="27432" marB="27432">
+                    <a:solidFill>
+                      <a:srgbClr val="FFFFFF"/>
+                    </a:solidFill>
+                  </a:tcPr>
+                </a:tc>
+                <a:tc>
+                  <a:txBody>
+                    <a:bodyPr wrap="square"/>
+                    <a:lstStyle/>
+                    <a:p>
+                      <a:r>
+                        <a:rPr sz="1100" b="0">
+                          <a:solidFill>
+                            <a:srgbClr val="566573"/>
+                          </a:solidFill>
+                          <a:latin typeface="Segoe UI"/>
+                        </a:rPr>
+                        <a:t>PII detection + redaction in the denoise / guardrail step; store only redacted text; log the hit for audit.</a:t>
+                      </a:r>
+                    </a:p>
+                  </a:txBody>
+                  <a:tcPr anchor="ctr" marL="82296" marR="54864" marT="27432" marB="27432">
+                    <a:solidFill>
+                      <a:srgbClr val="FFFFFF"/>
+                    </a:solidFill>
+                  </a:tcPr>
+                </a:tc>
+              </a:tr>
+              <a:tr h="1051560">
+                <a:tc>
+                  <a:txBody>
+                    <a:bodyPr wrap="square"/>
+                    <a:lstStyle/>
+                    <a:p>
+                      <a:r>
+                        <a:rPr sz="1100" b="1">
+                          <a:solidFill>
+                            <a:srgbClr val="1C2733"/>
+                          </a:solidFill>
+                          <a:latin typeface="Segoe UI"/>
+                        </a:rPr>
+                        <a:t>Safety</a:t>
+                      </a:r>
+                    </a:p>
+                  </a:txBody>
+                  <a:tcPr anchor="ctr" marL="82296" marR="54864" marT="27432" marB="27432">
+                    <a:solidFill>
+                      <a:srgbClr val="F6F8FA"/>
+                    </a:solidFill>
+                  </a:tcPr>
+                </a:tc>
+                <a:tc>
+                  <a:txBody>
+                    <a:bodyPr wrap="square"/>
+                    <a:lstStyle/>
+                    <a:p>
+                      <a:r>
+                        <a:rPr sz="1100" b="0">
+                          <a:solidFill>
+                            <a:srgbClr val="566573"/>
+                          </a:solidFill>
+                          <a:latin typeface="Consolas"/>
+                        </a:rPr>
+                        <a:t>A coaching note with inappropriate wording is held</a:t>
+                      </a:r>
+                    </a:p>
+                  </a:txBody>
+                  <a:tcPr anchor="ctr" marL="82296" marR="54864" marT="27432" marB="27432">
+                    <a:solidFill>
+                      <a:srgbClr val="F6F8FA"/>
+                    </a:solidFill>
+                  </a:tcPr>
+                </a:tc>
+                <a:tc>
+                  <a:txBody>
+                    <a:bodyPr wrap="square"/>
+                    <a:lstStyle/>
+                    <a:p>
+                      <a:r>
+                        <a:rPr sz="1100" b="0">
+                          <a:solidFill>
+                            <a:srgbClr val="566573"/>
+                          </a:solidFill>
+                          <a:latin typeface="Segoe UI"/>
+                        </a:rPr>
+                        <a:t>Every model output passes a content-safety guardrail before it is saved; flagged items go to review.</a:t>
+                      </a:r>
+                    </a:p>
+                  </a:txBody>
+                  <a:tcPr anchor="ctr" marL="82296" marR="54864" marT="27432" marB="27432">
+                    <a:solidFill>
+                      <a:srgbClr val="F6F8FA"/>
+                    </a:solidFill>
+                  </a:tcPr>
+                </a:tc>
+              </a:tr>
+            </a:tbl>
+          </a:graphicData>
+        </a:graphic>
+      </p:graphicFrame>
       <p:sp>
         <p:nvSpPr>
           <p:cNvPr id="5" name="Rectangle 4"/>
@@ -6176,211 +5955,8 @@
         </p:nvSpPr>
         <p:spPr>
           <a:xfrm>
-            <a:off x="6949440" y="1737360"/>
-            <a:ext cx="4617720" cy="4069080"/>
-          </a:xfrm>
-          <a:prstGeom prst="rect">
-            <a:avLst/>
-          </a:prstGeom>
-          <a:solidFill>
-            <a:srgbClr val="EAEEF2"/>
-          </a:solidFill>
-          <a:ln w="9525">
-            <a:solidFill>
-              <a:srgbClr val="D5DBE1"/>
-            </a:solidFill>
-          </a:ln>
-          <a:effectLst/>
-        </p:spPr>
-        <p:style>
-          <a:lnRef idx="1">
-            <a:schemeClr val="accent1"/>
-          </a:lnRef>
-          <a:fillRef idx="3">
-            <a:schemeClr val="accent1"/>
-          </a:fillRef>
-          <a:effectRef idx="2">
-            <a:schemeClr val="accent1"/>
-          </a:effectRef>
-          <a:fontRef idx="minor">
-            <a:schemeClr val="lt1"/>
-          </a:fontRef>
-        </p:style>
-        <p:txBody>
-          <a:bodyPr rtlCol="0" anchor="ctr" wrap="square" lIns="146304" rIns="128016" tIns="118872" bIns="91440"/>
-          <a:lstStyle/>
-          <a:p>
-            <a:pPr algn="ctr">
-              <a:spcAft>
-                <a:spcPts val="700"/>
-              </a:spcAft>
-            </a:pPr>
-            <a:r>
-              <a:rPr sz="1250" b="1">
-                <a:solidFill>
-                  <a:srgbClr val="16324F"/>
-                </a:solidFill>
-                <a:latin typeface="Segoe UI"/>
-              </a:rPr>
-              <a:t>WHAT RESPONSIBLE AI ADDS</a:t>
-            </a:r>
-          </a:p>
-          <a:p>
-            <a:pPr>
-              <a:spcAft>
-                <a:spcPts val="300"/>
-              </a:spcAft>
-            </a:pPr>
-            <a:r>
-              <a:rPr sz="1150" b="0">
-                <a:solidFill>
-                  <a:srgbClr val="566573"/>
-                </a:solidFill>
-                <a:latin typeface="Segoe UI"/>
-              </a:rPr>
-              <a:t>The pipeline scores this call:</a:t>
-            </a:r>
-          </a:p>
-          <a:p>
-            <a:pPr>
-              <a:spcAft>
-                <a:spcPts val="300"/>
-              </a:spcAft>
-            </a:pPr>
-            <a:r>
-              <a:rPr sz="1150" b="0">
-                <a:solidFill>
-                  <a:srgbClr val="122A42"/>
-                </a:solidFill>
-                <a:latin typeface="Consolas"/>
-              </a:rPr>
-              <a:t>empathy    = 0.9   ← line 11</a:t>
-            </a:r>
-          </a:p>
-          <a:p>
-            <a:pPr>
-              <a:spcAft>
-                <a:spcPts val="300"/>
-              </a:spcAft>
-            </a:pPr>
-            <a:r>
-              <a:rPr sz="1150" b="0">
-                <a:solidFill>
-                  <a:srgbClr val="122A42"/>
-                </a:solidFill>
-                <a:latin typeface="Consolas"/>
-              </a:rPr>
-              <a:t>ownership  = yes   ← line 12</a:t>
-            </a:r>
-          </a:p>
-          <a:p>
-            <a:pPr>
-              <a:spcAft>
-                <a:spcPts val="300"/>
-              </a:spcAft>
-            </a:pPr>
-            <a:r>
-              <a:rPr sz="1150" b="0">
-                <a:solidFill>
-                  <a:srgbClr val="122A42"/>
-                </a:solidFill>
-                <a:latin typeface="Consolas"/>
-              </a:rPr>
-              <a:t>experience = Good  ← line 13</a:t>
-            </a:r>
-          </a:p>
-          <a:p>
-            <a:pPr>
-              <a:spcAft>
-                <a:spcPts val="300"/>
-              </a:spcAft>
-            </a:pPr>
-            <a:r>
-              <a:rPr sz="1150" b="0">
-                <a:solidFill>
-                  <a:srgbClr val="1C2733"/>
-                </a:solidFill>
-                <a:latin typeface="Segoe UI"/>
-              </a:rPr>
-              <a:t/>
-            </a:r>
-          </a:p>
-          <a:p>
-            <a:pPr>
-              <a:spcAft>
-                <a:spcPts val="300"/>
-              </a:spcAft>
-            </a:pPr>
-            <a:r>
-              <a:rPr sz="1150" b="0">
-                <a:solidFill>
-                  <a:srgbClr val="2F6E4E"/>
-                </a:solidFill>
-                <a:latin typeface="Segoe UI"/>
-              </a:rPr>
-              <a:t>Transparency — the agent sees the</a:t>
-            </a:r>
-          </a:p>
-          <a:p>
-            <a:pPr>
-              <a:spcAft>
-                <a:spcPts val="300"/>
-              </a:spcAft>
-            </a:pPr>
-            <a:r>
-              <a:rPr sz="1150" b="0">
-                <a:solidFill>
-                  <a:srgbClr val="566573"/>
-                </a:solidFill>
-                <a:latin typeface="Segoe UI"/>
-              </a:rPr>
-              <a:t>exact lines behind each score.</a:t>
-            </a:r>
-          </a:p>
-          <a:p>
-            <a:pPr>
-              <a:spcAft>
-                <a:spcPts val="300"/>
-              </a:spcAft>
-            </a:pPr>
-            <a:r>
-              <a:rPr sz="1150" b="0">
-                <a:solidFill>
-                  <a:srgbClr val="2F6E4E"/>
-                </a:solidFill>
-                <a:latin typeface="Segoe UI"/>
-              </a:rPr>
-              <a:t>Contestable — if they disagree they</a:t>
-            </a:r>
-          </a:p>
-          <a:p>
-            <a:pPr>
-              <a:spcAft>
-                <a:spcPts val="300"/>
-              </a:spcAft>
-            </a:pPr>
-            <a:r>
-              <a:rPr sz="1150" b="0">
-                <a:solidFill>
-                  <a:srgbClr val="566573"/>
-                </a:solidFill>
-                <a:latin typeface="Segoe UI"/>
-              </a:rPr>
-              <a:t>can challenge it, evidence in view.</a:t>
-            </a:r>
-          </a:p>
-        </p:txBody>
-      </p:sp>
-      <p:sp>
-        <p:nvSpPr>
-          <p:cNvPr id="6" name="Rectangle 5"/>
-          <p:cNvSpPr/>
-          <p:nvPr/>
-        </p:nvSpPr>
-        <p:spPr>
-          <a:xfrm>
-            <a:off x="640080" y="5943600"/>
-            <a:ext cx="10927080" cy="749808"/>
+            <a:off x="640080" y="6263640"/>
+            <a:ext cx="10927080" cy="457200"/>
           </a:xfrm>
           <a:prstGeom prst="rect">
             <a:avLst/>
@@ -6423,7 +5999,7 @@
                 </a:solidFill>
                 <a:latin typeface="Segoe UI"/>
               </a:rPr>
-              <a:t>No score without evidence — plus a fairness check on top (native vs non-native averages 0.86 vs 0.71 → flagged for review). That is what makes AI that evaluates people defensible.</a:t>
+              <a:t>Every row is a real check we can build on the pipeline we already have — not a slogan.</a:t>
             </a:r>
           </a:p>
         </p:txBody>
@@ -6436,7 +6012,7 @@
 </p:sld>
 </file>
 
-<file path=ppt/slides/slide8.xml><?xml version="1.0" encoding="utf-8"?>
+<file path=ppt/slides/slide7.xml><?xml version="1.0" encoding="utf-8"?>
 <p:sld xmlns:a="http://schemas.openxmlformats.org/drawingml/2006/main" xmlns:p="http://schemas.openxmlformats.org/presentationml/2006/main" xmlns:r="http://schemas.openxmlformats.org/officeDocument/2006/relationships">
   <p:cSld>
     <p:bg>
@@ -6506,8 +6082,8 @@
         </p:nvSpPr>
         <p:spPr>
           <a:xfrm>
-            <a:off x="640080" y="365760"/>
-            <a:ext cx="11247120" cy="1234440"/>
+            <a:off x="640080" y="347472"/>
+            <a:ext cx="11247120" cy="1188720"/>
           </a:xfrm>
           <a:prstGeom prst="rect">
             <a:avLst/>
@@ -6532,7 +6108,7 @@
                 </a:solidFill>
                 <a:latin typeface="Segoe UI"/>
               </a:rPr>
-              <a:t>THE PATH</a:t>
+              <a:t>RESPONSIBLE AI IN ACTION  (2 / 2)</a:t>
             </a:r>
           </a:p>
           <a:p>
@@ -6542,38 +6118,404 @@
               </a:spcAft>
             </a:pPr>
             <a:r>
-              <a:rPr sz="2500" b="1">
+              <a:rPr sz="2400" b="1">
                 <a:solidFill>
                   <a:srgbClr val="1C2733"/>
                 </a:solidFill>
                 <a:latin typeface="Segoe UI"/>
               </a:rPr>
-              <a:t>From protected today to governed and trusted</a:t>
-            </a:r>
-          </a:p>
-        </p:txBody>
-      </p:sp>
-      <p:sp>
-        <p:nvSpPr>
-          <p:cNvPr id="4" name="Rectangle 3"/>
+              <a:t>Beyond one call: fairness, oversight, assurance</a:t>
+            </a:r>
+          </a:p>
+        </p:txBody>
+      </p:sp>
+      <p:graphicFrame>
+        <p:nvGraphicFramePr>
+          <p:cNvPr id="4" name="Table 3"/>
+          <p:cNvGraphicFramePr>
+            <a:graphicFrameLocks noGrp="1"/>
+          </p:cNvGraphicFramePr>
+          <p:nvPr/>
+        </p:nvGraphicFramePr>
+        <p:xfrm>
+          <a:off x="640080" y="1783080"/>
+          <a:ext cx="10927080" cy="5257800"/>
+        </p:xfrm>
+        <a:graphic>
+          <a:graphicData uri="http://schemas.openxmlformats.org/drawingml/2006/table">
+            <a:tbl>
+              <a:tblPr firstRow="1">
+                <a:tableStyleId>{5C22544A-7EE6-4342-B048-85BDC9FD1C3A}</a:tableStyleId>
+              </a:tblPr>
+              <a:tblGrid>
+                <a:gridCol w="1554480"/>
+                <a:gridCol w="3657600"/>
+                <a:gridCol w="5715000"/>
+              </a:tblGrid>
+              <a:tr h="1051560">
+                <a:tc>
+                  <a:txBody>
+                    <a:bodyPr wrap="square"/>
+                    <a:lstStyle/>
+                    <a:p>
+                      <a:r>
+                        <a:rPr sz="1050" b="1">
+                          <a:solidFill>
+                            <a:srgbClr val="FFFFFF"/>
+                          </a:solidFill>
+                          <a:latin typeface="Segoe UI"/>
+                        </a:rPr>
+                        <a:t>Dimension</a:t>
+                      </a:r>
+                    </a:p>
+                  </a:txBody>
+                  <a:tcPr anchor="ctr" marL="82296" marR="54864" marT="27432" marB="27432">
+                    <a:solidFill>
+                      <a:srgbClr val="16324F"/>
+                    </a:solidFill>
+                  </a:tcPr>
+                </a:tc>
+                <a:tc>
+                  <a:txBody>
+                    <a:bodyPr wrap="square"/>
+                    <a:lstStyle/>
+                    <a:p>
+                      <a:r>
+                        <a:rPr sz="1050" b="1">
+                          <a:solidFill>
+                            <a:srgbClr val="FFFFFF"/>
+                          </a:solidFill>
+                          <a:latin typeface="Segoe UI"/>
+                        </a:rPr>
+                        <a:t>Example</a:t>
+                      </a:r>
+                    </a:p>
+                  </a:txBody>
+                  <a:tcPr anchor="ctr" marL="82296" marR="54864" marT="27432" marB="27432">
+                    <a:solidFill>
+                      <a:srgbClr val="16324F"/>
+                    </a:solidFill>
+                  </a:tcPr>
+                </a:tc>
+                <a:tc>
+                  <a:txBody>
+                    <a:bodyPr wrap="square"/>
+                    <a:lstStyle/>
+                    <a:p>
+                      <a:r>
+                        <a:rPr sz="1050" b="1">
+                          <a:solidFill>
+                            <a:srgbClr val="FFFFFF"/>
+                          </a:solidFill>
+                          <a:latin typeface="Segoe UI"/>
+                        </a:rPr>
+                        <a:t>How we implement it</a:t>
+                      </a:r>
+                    </a:p>
+                  </a:txBody>
+                  <a:tcPr anchor="ctr" marL="82296" marR="54864" marT="27432" marB="27432">
+                    <a:solidFill>
+                      <a:srgbClr val="16324F"/>
+                    </a:solidFill>
+                  </a:tcPr>
+                </a:tc>
+              </a:tr>
+              <a:tr h="1051560">
+                <a:tc>
+                  <a:txBody>
+                    <a:bodyPr wrap="square"/>
+                    <a:lstStyle/>
+                    <a:p>
+                      <a:r>
+                        <a:rPr sz="1100" b="1">
+                          <a:solidFill>
+                            <a:srgbClr val="1C2733"/>
+                          </a:solidFill>
+                          <a:latin typeface="Segoe UI"/>
+                        </a:rPr>
+                        <a:t>Fairness</a:t>
+                      </a:r>
+                    </a:p>
+                  </a:txBody>
+                  <a:tcPr anchor="ctr" marL="82296" marR="54864" marT="27432" marB="27432">
+                    <a:solidFill>
+                      <a:srgbClr val="FFFFFF"/>
+                    </a:solidFill>
+                  </a:tcPr>
+                </a:tc>
+                <a:tc>
+                  <a:txBody>
+                    <a:bodyPr wrap="square"/>
+                    <a:lstStyle/>
+                    <a:p>
+                      <a:r>
+                        <a:rPr sz="1100" b="0">
+                          <a:solidFill>
+                            <a:srgbClr val="566573"/>
+                          </a:solidFill>
+                          <a:latin typeface="Segoe UI"/>
+                        </a:rPr>
+                        <a:t>Language-proficiency avg: native 0.86 vs non-native 0.71 → flagged</a:t>
+                      </a:r>
+                    </a:p>
+                  </a:txBody>
+                  <a:tcPr anchor="ctr" marL="82296" marR="54864" marT="27432" marB="27432">
+                    <a:solidFill>
+                      <a:srgbClr val="FFFFFF"/>
+                    </a:solidFill>
+                  </a:tcPr>
+                </a:tc>
+                <a:tc>
+                  <a:txBody>
+                    <a:bodyPr wrap="square"/>
+                    <a:lstStyle/>
+                    <a:p>
+                      <a:r>
+                        <a:rPr sz="1100" b="0">
+                          <a:solidFill>
+                            <a:srgbClr val="566573"/>
+                          </a:solidFill>
+                          <a:latin typeface="Segoe UI"/>
+                        </a:rPr>
+                        <a:t>Group the weekly score table by agent segment (tenure / language / program); compute disparity; flag beyond a threshold; block a prompt in the gate if it worsens it.</a:t>
+                      </a:r>
+                    </a:p>
+                  </a:txBody>
+                  <a:tcPr anchor="ctr" marL="82296" marR="54864" marT="27432" marB="27432">
+                    <a:solidFill>
+                      <a:srgbClr val="FFFFFF"/>
+                    </a:solidFill>
+                  </a:tcPr>
+                </a:tc>
+              </a:tr>
+              <a:tr h="1051560">
+                <a:tc>
+                  <a:txBody>
+                    <a:bodyPr wrap="square"/>
+                    <a:lstStyle/>
+                    <a:p>
+                      <a:r>
+                        <a:rPr sz="1100" b="1">
+                          <a:solidFill>
+                            <a:srgbClr val="1C2733"/>
+                          </a:solidFill>
+                          <a:latin typeface="Segoe UI"/>
+                        </a:rPr>
+                        <a:t>Human
+oversight</a:t>
+                      </a:r>
+                    </a:p>
+                  </a:txBody>
+                  <a:tcPr anchor="ctr" marL="82296" marR="54864" marT="27432" marB="27432">
+                    <a:solidFill>
+                      <a:srgbClr val="F6F8FA"/>
+                    </a:solidFill>
+                  </a:tcPr>
+                </a:tc>
+                <a:tc>
+                  <a:txBody>
+                    <a:bodyPr wrap="square"/>
+                    <a:lstStyle/>
+                    <a:p>
+                      <a:r>
+                        <a:rPr sz="1100" b="0">
+                          <a:solidFill>
+                            <a:srgbClr val="566573"/>
+                          </a:solidFill>
+                          <a:latin typeface="Segoe UI"/>
+                        </a:rPr>
+                        <a:t>Agent disputes the frustration/escalation call</a:t>
+                      </a:r>
+                    </a:p>
+                  </a:txBody>
+                  <a:tcPr anchor="ctr" marL="82296" marR="54864" marT="27432" marB="27432">
+                    <a:solidFill>
+                      <a:srgbClr val="F6F8FA"/>
+                    </a:solidFill>
+                  </a:tcPr>
+                </a:tc>
+                <a:tc>
+                  <a:txBody>
+                    <a:bodyPr wrap="square"/>
+                    <a:lstStyle/>
+                    <a:p>
+                      <a:r>
+                        <a:rPr sz="1100" b="0">
+                          <a:solidFill>
+                            <a:srgbClr val="566573"/>
+                          </a:solidFill>
+                          <a:latin typeface="Segoe UI"/>
+                        </a:rPr>
+                        <a:t>A “contest” action in the feedback loop reopens the record for a reviewer; scores are advisory until reviewed.</a:t>
+                      </a:r>
+                    </a:p>
+                  </a:txBody>
+                  <a:tcPr anchor="ctr" marL="82296" marR="54864" marT="27432" marB="27432">
+                    <a:solidFill>
+                      <a:srgbClr val="F6F8FA"/>
+                    </a:solidFill>
+                  </a:tcPr>
+                </a:tc>
+              </a:tr>
+              <a:tr h="1051560">
+                <a:tc>
+                  <a:txBody>
+                    <a:bodyPr wrap="square"/>
+                    <a:lstStyle/>
+                    <a:p>
+                      <a:r>
+                        <a:rPr sz="1100" b="1">
+                          <a:solidFill>
+                            <a:srgbClr val="1C2733"/>
+                          </a:solidFill>
+                          <a:latin typeface="Segoe UI"/>
+                        </a:rPr>
+                        <a:t>Reliability</a:t>
+                      </a:r>
+                    </a:p>
+                  </a:txBody>
+                  <a:tcPr anchor="ctr" marL="82296" marR="54864" marT="27432" marB="27432">
+                    <a:solidFill>
+                      <a:srgbClr val="FFFFFF"/>
+                    </a:solidFill>
+                  </a:tcPr>
+                </a:tc>
+                <a:tc>
+                  <a:txBody>
+                    <a:bodyPr wrap="square"/>
+                    <a:lstStyle/>
+                    <a:p>
+                      <a:r>
+                        <a:rPr sz="1100" b="0">
+                          <a:solidFill>
+                            <a:srgbClr val="566573"/>
+                          </a:solidFill>
+                          <a:latin typeface="Segoe UI"/>
+                        </a:rPr>
+                        <a:t>The same call must score the same across prompt versions</a:t>
+                      </a:r>
+                    </a:p>
+                  </a:txBody>
+                  <a:tcPr anchor="ctr" marL="82296" marR="54864" marT="27432" marB="27432">
+                    <a:solidFill>
+                      <a:srgbClr val="FFFFFF"/>
+                    </a:solidFill>
+                  </a:tcPr>
+                </a:tc>
+                <a:tc>
+                  <a:txBody>
+                    <a:bodyPr wrap="square"/>
+                    <a:lstStyle/>
+                    <a:p>
+                      <a:r>
+                        <a:rPr sz="1100" b="0">
+                          <a:solidFill>
+                            <a:srgbClr val="566573"/>
+                          </a:solidFill>
+                          <a:latin typeface="Segoe UI"/>
+                        </a:rPr>
+                        <a:t>Golden-data evaluation gate: per-field precision / recall vs certified labels; a prompt below threshold is rejected before deploy.</a:t>
+                      </a:r>
+                    </a:p>
+                  </a:txBody>
+                  <a:tcPr anchor="ctr" marL="82296" marR="54864" marT="27432" marB="27432">
+                    <a:solidFill>
+                      <a:srgbClr val="FFFFFF"/>
+                    </a:solidFill>
+                  </a:tcPr>
+                </a:tc>
+              </a:tr>
+              <a:tr h="1051560">
+                <a:tc>
+                  <a:txBody>
+                    <a:bodyPr wrap="square"/>
+                    <a:lstStyle/>
+                    <a:p>
+                      <a:r>
+                        <a:rPr sz="1100" b="1">
+                          <a:solidFill>
+                            <a:srgbClr val="1C2733"/>
+                          </a:solidFill>
+                          <a:latin typeface="Segoe UI"/>
+                        </a:rPr>
+                        <a:t>Accountability</a:t>
+                      </a:r>
+                    </a:p>
+                  </a:txBody>
+                  <a:tcPr anchor="ctr" marL="82296" marR="54864" marT="27432" marB="27432">
+                    <a:solidFill>
+                      <a:srgbClr val="F6F8FA"/>
+                    </a:solidFill>
+                  </a:tcPr>
+                </a:tc>
+                <a:tc>
+                  <a:txBody>
+                    <a:bodyPr wrap="square"/>
+                    <a:lstStyle/>
+                    <a:p>
+                      <a:r>
+                        <a:rPr sz="1100" b="0">
+                          <a:solidFill>
+                            <a:srgbClr val="566573"/>
+                          </a:solidFill>
+                          <a:latin typeface="Segoe UI"/>
+                        </a:rPr>
+                        <a:t>“Which model &amp; prompt produced this score?”</a:t>
+                      </a:r>
+                    </a:p>
+                  </a:txBody>
+                  <a:tcPr anchor="ctr" marL="82296" marR="54864" marT="27432" marB="27432">
+                    <a:solidFill>
+                      <a:srgbClr val="F6F8FA"/>
+                    </a:solidFill>
+                  </a:tcPr>
+                </a:tc>
+                <a:tc>
+                  <a:txBody>
+                    <a:bodyPr wrap="square"/>
+                    <a:lstStyle/>
+                    <a:p>
+                      <a:r>
+                        <a:rPr sz="1100" b="0">
+                          <a:solidFill>
+                            <a:srgbClr val="566573"/>
+                          </a:solidFill>
+                          <a:latin typeface="Segoe UI"/>
+                        </a:rPr>
+                        <a:t>Stamp every output with model + prompt version (model cards); keep an audit log via monitoring; nothing ships unlogged.</a:t>
+                      </a:r>
+                    </a:p>
+                  </a:txBody>
+                  <a:tcPr anchor="ctr" marL="82296" marR="54864" marT="27432" marB="27432">
+                    <a:solidFill>
+                      <a:srgbClr val="F6F8FA"/>
+                    </a:solidFill>
+                  </a:tcPr>
+                </a:tc>
+              </a:tr>
+            </a:tbl>
+          </a:graphicData>
+        </a:graphic>
+      </p:graphicFrame>
+      <p:sp>
+        <p:nvSpPr>
+          <p:cNvPr id="5" name="Rectangle 4"/>
           <p:cNvSpPr/>
           <p:nvPr/>
         </p:nvSpPr>
         <p:spPr>
           <a:xfrm>
-            <a:off x="640080" y="1828800"/>
-            <a:ext cx="5486400" cy="2286000"/>
+            <a:off x="640080" y="6263640"/>
+            <a:ext cx="10927080" cy="457200"/>
           </a:xfrm>
           <a:prstGeom prst="rect">
             <a:avLst/>
           </a:prstGeom>
           <a:solidFill>
-            <a:srgbClr val="F2EBDE"/>
+            <a:srgbClr val="EAEEF2"/>
           </a:solidFill>
-          <a:ln w="9525">
-            <a:solidFill>
-              <a:srgbClr val="D5DBE1"/>
-            </a:solidFill>
+          <a:ln>
+            <a:noFill/>
           </a:ln>
           <a:effectLst/>
         </p:spPr>
@@ -6592,95 +6534,71 @@
           </a:fontRef>
         </p:style>
         <p:txBody>
-          <a:bodyPr rtlCol="0" anchor="ctr" wrap="square" lIns="146304" rIns="128016" tIns="118872" bIns="91440"/>
+          <a:bodyPr rtlCol="0" anchor="ctr" wrap="square" lIns="201168" rIns="201168"/>
           <a:lstStyle/>
           <a:p>
             <a:pPr algn="ctr">
               <a:spcAft>
-                <a:spcPts val="700"/>
+                <a:spcPts val="0"/>
               </a:spcAft>
             </a:pPr>
             <a:r>
               <a:rPr sz="1250" b="1">
                 <a:solidFill>
-                  <a:srgbClr val="8A5A1B"/>
-                </a:solidFill>
-                <a:latin typeface="Segoe UI"/>
-              </a:rPr>
-              <a:t>TODAY · protected</a:t>
-            </a:r>
-          </a:p>
-          <a:p>
-            <a:pPr>
-              <a:spcAft>
-                <a:spcPts val="300"/>
-              </a:spcAft>
-            </a:pPr>
-            <a:r>
-              <a:rPr sz="1150" b="0">
-                <a:solidFill>
-                  <a:srgbClr val="566573"/>
-                </a:solidFill>
-                <a:latin typeface="Segoe UI"/>
-              </a:rPr>
-              <a:t>Data protection (PII detection)</a:t>
-            </a:r>
-          </a:p>
-          <a:p>
-            <a:pPr>
-              <a:spcAft>
-                <a:spcPts val="300"/>
-              </a:spcAft>
-            </a:pPr>
-            <a:r>
-              <a:rPr sz="1150" b="0">
-                <a:solidFill>
-                  <a:srgbClr val="566573"/>
-                </a:solidFill>
-                <a:latin typeface="Segoe UI"/>
-              </a:rPr>
-              <a:t>Basic safety checks</a:t>
-            </a:r>
-          </a:p>
-          <a:p>
-            <a:pPr>
-              <a:spcAft>
-                <a:spcPts val="300"/>
-              </a:spcAft>
-            </a:pPr>
-            <a:r>
-              <a:rPr sz="1150" b="0">
-                <a:solidFill>
-                  <a:srgbClr val="566573"/>
-                </a:solidFill>
-                <a:latin typeface="Segoe UI"/>
-              </a:rPr>
-              <a:t>Reliable operations</a:t>
-            </a:r>
-          </a:p>
-        </p:txBody>
-      </p:sp>
-      <p:sp>
-        <p:nvSpPr>
-          <p:cNvPr id="5" name="Rectangle 4"/>
+                  <a:srgbClr val="122A42"/>
+                </a:solidFill>
+                <a:latin typeface="Segoe UI"/>
+              </a:rPr>
+              <a:t>~8 categories, each with a concrete example and a concrete build — proof, not just presentation.</a:t>
+            </a:r>
+          </a:p>
+        </p:txBody>
+      </p:sp>
+    </p:spTree>
+  </p:cSld>
+  <p:clrMapOvr>
+    <a:masterClrMapping/>
+  </p:clrMapOvr>
+</p:sld>
+</file>
+
+<file path=ppt/slides/slide8.xml><?xml version="1.0" encoding="utf-8"?>
+<p:sld xmlns:a="http://schemas.openxmlformats.org/drawingml/2006/main" xmlns:p="http://schemas.openxmlformats.org/presentationml/2006/main" xmlns:r="http://schemas.openxmlformats.org/officeDocument/2006/relationships">
+  <p:cSld>
+    <p:bg>
+      <p:bgPr>
+        <a:solidFill>
+          <a:srgbClr val="FFFFFF"/>
+        </a:solidFill>
+        <a:effectLst/>
+      </p:bgPr>
+    </p:bg>
+    <p:spTree>
+      <p:nvGrpSpPr>
+        <p:cNvPr id="1" name=""/>
+        <p:cNvGrpSpPr/>
+        <p:nvPr/>
+      </p:nvGrpSpPr>
+      <p:grpSpPr/>
+      <p:sp>
+        <p:nvSpPr>
+          <p:cNvPr id="2" name="Rectangle 1"/>
           <p:cNvSpPr/>
           <p:nvPr/>
         </p:nvSpPr>
         <p:spPr>
           <a:xfrm>
-            <a:off x="6355080" y="1828800"/>
-            <a:ext cx="5212080" cy="2286000"/>
+            <a:off x="0" y="0"/>
+            <a:ext cx="12191695" cy="128016"/>
           </a:xfrm>
           <a:prstGeom prst="rect">
             <a:avLst/>
           </a:prstGeom>
           <a:solidFill>
-            <a:srgbClr val="E8F0EA"/>
+            <a:srgbClr val="16324F"/>
           </a:solidFill>
-          <a:ln w="9525">
-            <a:solidFill>
-              <a:srgbClr val="D5DBE1"/>
-            </a:solidFill>
+          <a:ln>
+            <a:noFill/>
           </a:ln>
           <a:effectLst/>
         </p:spPr>
@@ -6699,85 +6617,79 @@
           </a:fontRef>
         </p:style>
         <p:txBody>
-          <a:bodyPr rtlCol="0" anchor="ctr" wrap="square" lIns="146304" rIns="128016" tIns="118872" bIns="91440"/>
+          <a:bodyPr rtlCol="0" anchor="ctr"/>
           <a:lstStyle/>
           <a:p>
-            <a:pPr algn="ctr">
-              <a:spcAft>
-                <a:spcPts val="700"/>
-              </a:spcAft>
-            </a:pPr>
-            <a:r>
-              <a:rPr sz="1250" b="1">
-                <a:solidFill>
-                  <a:srgbClr val="2F6E4E"/>
-                </a:solidFill>
-                <a:latin typeface="Segoe UI"/>
-              </a:rPr>
-              <a:t>NEXT · governed &amp; trusted</a:t>
-            </a:r>
-          </a:p>
-          <a:p>
-            <a:pPr>
-              <a:spcAft>
-                <a:spcPts val="300"/>
-              </a:spcAft>
-            </a:pPr>
-            <a:r>
-              <a:rPr sz="1150" b="0">
-                <a:solidFill>
-                  <a:srgbClr val="566573"/>
-                </a:solidFill>
-                <a:latin typeface="Segoe UI"/>
-              </a:rPr>
-              <a:t>Fairness checks in the release gate</a:t>
-            </a:r>
-          </a:p>
-          <a:p>
-            <a:pPr>
-              <a:spcAft>
-                <a:spcPts val="300"/>
-              </a:spcAft>
-            </a:pPr>
-            <a:r>
-              <a:rPr sz="1150" b="0">
-                <a:solidFill>
-                  <a:srgbClr val="566573"/>
-                </a:solidFill>
-                <a:latin typeface="Segoe UI"/>
-              </a:rPr>
-              <a:t>Evidence + contestability for every score</a:t>
-            </a:r>
-          </a:p>
-          <a:p>
-            <a:pPr>
-              <a:spcAft>
-                <a:spcPts val="300"/>
-              </a:spcAft>
-            </a:pPr>
-            <a:r>
-              <a:rPr sz="1150" b="0">
-                <a:solidFill>
-                  <a:srgbClr val="566573"/>
-                </a:solidFill>
-                <a:latin typeface="Segoe UI"/>
-              </a:rPr>
-              <a:t>Model cards; fairness monitoring</a:t>
+            <a:pPr algn="ctr"/>
+          </a:p>
+        </p:txBody>
+      </p:sp>
+      <p:sp>
+        <p:nvSpPr>
+          <p:cNvPr id="3" name="TextBox 2"/>
+          <p:cNvSpPr txBox="1"/>
+          <p:nvPr/>
+        </p:nvSpPr>
+        <p:spPr>
+          <a:xfrm>
+            <a:off x="640080" y="347472"/>
+            <a:ext cx="11247120" cy="1188720"/>
+          </a:xfrm>
+          <a:prstGeom prst="rect">
+            <a:avLst/>
+          </a:prstGeom>
+          <a:noFill/>
+        </p:spPr>
+        <p:txBody>
+          <a:bodyPr wrap="square">
+            <a:spAutoFit/>
+          </a:bodyPr>
+          <a:lstStyle/>
+          <a:p>
+            <a:pPr>
+              <a:spcAft>
+                <a:spcPts val="400"/>
+              </a:spcAft>
+            </a:pPr>
+            <a:r>
+              <a:rPr sz="1200" b="1">
+                <a:solidFill>
+                  <a:srgbClr val="16324F"/>
+                </a:solidFill>
+                <a:latin typeface="Segoe UI"/>
+              </a:rPr>
+              <a:t>WHAT WE ARE GOING TO DO</a:t>
+            </a:r>
+          </a:p>
+          <a:p>
+            <a:pPr>
+              <a:spcAft>
+                <a:spcPts val="0"/>
+              </a:spcAft>
+            </a:pPr>
+            <a:r>
+              <a:rPr sz="2400" b="1">
+                <a:solidFill>
+                  <a:srgbClr val="1C2733"/>
+                </a:solidFill>
+                <a:latin typeface="Segoe UI"/>
+              </a:rPr>
+              <a:t>A phased plan — each phase reuses the platform</a:t>
             </a:r>
           </a:p>
         </p:txBody>
       </p:sp>
       <p:graphicFrame>
         <p:nvGraphicFramePr>
-          <p:cNvPr id="6" name="Table 5"/>
+          <p:cNvPr id="4" name="Table 3"/>
           <p:cNvGraphicFramePr>
             <a:graphicFrameLocks noGrp="1"/>
           </p:cNvGraphicFramePr>
           <p:nvPr/>
         </p:nvGraphicFramePr>
         <p:xfrm>
-          <a:off x="640080" y="4343400"/>
-          <a:ext cx="10927080" cy="2011680"/>
+          <a:off x="640080" y="1783080"/>
+          <a:ext cx="10927080" cy="4800600"/>
         </p:xfrm>
         <a:graphic>
           <a:graphicData uri="http://schemas.openxmlformats.org/drawingml/2006/table">
@@ -6786,27 +6698,28 @@
                 <a:tableStyleId>{5C22544A-7EE6-4342-B048-85BDC9FD1C3A}</a:tableStyleId>
               </a:tblPr>
               <a:tblGrid>
-                <a:gridCol w="8778240"/>
-                <a:gridCol w="2148840"/>
+                <a:gridCol w="2103120"/>
+                <a:gridCol w="5760720"/>
+                <a:gridCol w="3063240"/>
               </a:tblGrid>
-              <a:tr h="402336">
+              <a:tr h="960120">
                 <a:tc>
                   <a:txBody>
                     <a:bodyPr wrap="square"/>
                     <a:lstStyle/>
                     <a:p>
                       <a:r>
-                        <a:rPr sz="1150" b="1">
+                        <a:rPr sz="1050" b="1">
                           <a:solidFill>
                             <a:srgbClr val="FFFFFF"/>
                           </a:solidFill>
                           <a:latin typeface="Segoe UI"/>
                         </a:rPr>
-                        <a:t>Next steps — start with APIX, reuse for every use case</a:t>
+                        <a:t>Phase</a:t>
                       </a:r>
                     </a:p>
                   </a:txBody>
-                  <a:tcPr anchor="ctr" marL="91440" marR="54864" marT="18288" marB="18288">
+                  <a:tcPr anchor="ctr" marL="82296" marR="54864" marT="27432" marB="27432">
                     <a:solidFill>
                       <a:srgbClr val="16324F"/>
                     </a:solidFill>
@@ -6818,41 +6731,63 @@
                     <a:lstStyle/>
                     <a:p>
                       <a:r>
-                        <a:rPr sz="1150" b="1">
+                        <a:rPr sz="1050" b="1">
                           <a:solidFill>
                             <a:srgbClr val="FFFFFF"/>
                           </a:solidFill>
                           <a:latin typeface="Segoe UI"/>
                         </a:rPr>
-                        <a:t/>
+                        <a:t>What we build</a:t>
                       </a:r>
                     </a:p>
                   </a:txBody>
-                  <a:tcPr anchor="ctr" marL="91440" marR="54864" marT="18288" marB="18288">
+                  <a:tcPr anchor="ctr" marL="82296" marR="54864" marT="27432" marB="27432">
+                    <a:solidFill>
+                      <a:srgbClr val="16324F"/>
+                    </a:solidFill>
+                  </a:tcPr>
+                </a:tc>
+                <a:tc>
+                  <a:txBody>
+                    <a:bodyPr wrap="square"/>
+                    <a:lstStyle/>
+                    <a:p>
+                      <a:r>
+                        <a:rPr sz="1050" b="1">
+                          <a:solidFill>
+                            <a:srgbClr val="FFFFFF"/>
+                          </a:solidFill>
+                          <a:latin typeface="Segoe UI"/>
+                        </a:rPr>
+                        <a:t>Reuses / touches</a:t>
+                      </a:r>
+                    </a:p>
+                  </a:txBody>
+                  <a:tcPr anchor="ctr" marL="82296" marR="54864" marT="27432" marB="27432">
                     <a:solidFill>
                       <a:srgbClr val="16324F"/>
                     </a:solidFill>
                   </a:tcPr>
                 </a:tc>
               </a:tr>
-              <a:tr h="402336">
+              <a:tr h="960120">
                 <a:tc>
                   <a:txBody>
                     <a:bodyPr wrap="square"/>
                     <a:lstStyle/>
                     <a:p>
                       <a:r>
-                        <a:rPr sz="1300" b="0">
+                        <a:rPr sz="1100" b="1">
                           <a:solidFill>
-                            <a:srgbClr val="566573"/>
+                            <a:srgbClr val="1C2733"/>
                           </a:solidFill>
                           <a:latin typeface="Segoe UI"/>
                         </a:rPr>
-                        <a:t>1 · Fairness check on APIX scores across agent groups</a:t>
+                        <a:t>1 · Foundation</a:t>
                       </a:r>
                     </a:p>
                   </a:txBody>
-                  <a:tcPr anchor="ctr" marL="91440" marR="54864" marT="18288" marB="18288">
+                  <a:tcPr anchor="ctr" marL="82296" marR="54864" marT="27432" marB="27432">
                     <a:solidFill>
                       <a:srgbClr val="FFFFFF"/>
                     </a:solidFill>
@@ -6864,41 +6799,63 @@
                     <a:lstStyle/>
                     <a:p>
                       <a:r>
-                        <a:rPr sz="1300" b="0">
+                        <a:rPr sz="1100" b="0">
                           <a:solidFill>
                             <a:srgbClr val="566573"/>
                           </a:solidFill>
                           <a:latin typeface="Segoe UI"/>
                         </a:rPr>
-                        <a:t/>
+                        <a:t>Evidence validators (no score without a line) + surface evidence in the UI; stamp model/prompt versions</a:t>
                       </a:r>
                     </a:p>
                   </a:txBody>
-                  <a:tcPr anchor="ctr" marL="91440" marR="54864" marT="18288" marB="18288">
+                  <a:tcPr anchor="ctr" marL="82296" marR="54864" marT="27432" marB="27432">
+                    <a:solidFill>
+                      <a:srgbClr val="FFFFFF"/>
+                    </a:solidFill>
+                  </a:tcPr>
+                </a:tc>
+                <a:tc>
+                  <a:txBody>
+                    <a:bodyPr wrap="square"/>
+                    <a:lstStyle/>
+                    <a:p>
+                      <a:r>
+                        <a:rPr sz="1100" b="0">
+                          <a:solidFill>
+                            <a:srgbClr val="566573"/>
+                          </a:solidFill>
+                          <a:latin typeface="Segoe UI"/>
+                        </a:rPr>
+                        <a:t>analysis schema · dashboard · model mgmt</a:t>
+                      </a:r>
+                    </a:p>
+                  </a:txBody>
+                  <a:tcPr anchor="ctr" marL="82296" marR="54864" marT="27432" marB="27432">
                     <a:solidFill>
                       <a:srgbClr val="FFFFFF"/>
                     </a:solidFill>
                   </a:tcPr>
                 </a:tc>
               </a:tr>
-              <a:tr h="402336">
+              <a:tr h="960120">
                 <a:tc>
                   <a:txBody>
                     <a:bodyPr wrap="square"/>
                     <a:lstStyle/>
                     <a:p>
                       <a:r>
-                        <a:rPr sz="1300" b="0">
+                        <a:rPr sz="1100" b="1">
                           <a:solidFill>
-                            <a:srgbClr val="566573"/>
+                            <a:srgbClr val="1C2733"/>
                           </a:solidFill>
                           <a:latin typeface="Segoe UI"/>
                         </a:rPr>
-                        <a:t>2 · Evidence check so every coaching point cites the call</a:t>
+                        <a:t>2 · Fairness</a:t>
                       </a:r>
                     </a:p>
                   </a:txBody>
-                  <a:tcPr anchor="ctr" marL="91440" marR="54864" marT="18288" marB="18288">
+                  <a:tcPr anchor="ctr" marL="82296" marR="54864" marT="27432" marB="27432">
                     <a:solidFill>
                       <a:srgbClr val="F6F8FA"/>
                     </a:solidFill>
@@ -6910,41 +6867,63 @@
                     <a:lstStyle/>
                     <a:p>
                       <a:r>
-                        <a:rPr sz="1300" b="0">
+                        <a:rPr sz="1100" b="0">
                           <a:solidFill>
                             <a:srgbClr val="566573"/>
                           </a:solidFill>
                           <a:latin typeface="Segoe UI"/>
                         </a:rPr>
-                        <a:t/>
+                        <a:t>Score-disparity check across agent segments; add fairness to the release gate</a:t>
                       </a:r>
                     </a:p>
                   </a:txBody>
-                  <a:tcPr anchor="ctr" marL="91440" marR="54864" marT="18288" marB="18288">
+                  <a:tcPr anchor="ctr" marL="82296" marR="54864" marT="27432" marB="27432">
+                    <a:solidFill>
+                      <a:srgbClr val="F6F8FA"/>
+                    </a:solidFill>
+                  </a:tcPr>
+                </a:tc>
+                <a:tc>
+                  <a:txBody>
+                    <a:bodyPr wrap="square"/>
+                    <a:lstStyle/>
+                    <a:p>
+                      <a:r>
+                        <a:rPr sz="1100" b="0">
+                          <a:solidFill>
+                            <a:srgbClr val="566573"/>
+                          </a:solidFill>
+                          <a:latin typeface="Segoe UI"/>
+                        </a:rPr>
+                        <a:t>KPI output · evaluation gate · monitoring</a:t>
+                      </a:r>
+                    </a:p>
+                  </a:txBody>
+                  <a:tcPr anchor="ctr" marL="82296" marR="54864" marT="27432" marB="27432">
                     <a:solidFill>
                       <a:srgbClr val="F6F8FA"/>
                     </a:solidFill>
                   </a:tcPr>
                 </a:tc>
               </a:tr>
-              <a:tr h="402336">
+              <a:tr h="960120">
                 <a:tc>
                   <a:txBody>
                     <a:bodyPr wrap="square"/>
                     <a:lstStyle/>
                     <a:p>
                       <a:r>
-                        <a:rPr sz="1300" b="0">
+                        <a:rPr sz="1100" b="1">
                           <a:solidFill>
-                            <a:srgbClr val="566573"/>
+                            <a:srgbClr val="1C2733"/>
                           </a:solidFill>
                           <a:latin typeface="Segoe UI"/>
                         </a:rPr>
-                        <a:t>3 · A one-page “model card” per model (purpose + limits)</a:t>
+                        <a:t>3 · Safety &amp; privacy</a:t>
                       </a:r>
                     </a:p>
                   </a:txBody>
-                  <a:tcPr anchor="ctr" marL="91440" marR="54864" marT="18288" marB="18288">
+                  <a:tcPr anchor="ctr" marL="82296" marR="54864" marT="27432" marB="27432">
                     <a:solidFill>
                       <a:srgbClr val="FFFFFF"/>
                     </a:solidFill>
@@ -6956,41 +6935,63 @@
                     <a:lstStyle/>
                     <a:p>
                       <a:r>
-                        <a:rPr sz="1300" b="0">
+                        <a:rPr sz="1100" b="0">
                           <a:solidFill>
                             <a:srgbClr val="566573"/>
                           </a:solidFill>
                           <a:latin typeface="Segoe UI"/>
                         </a:rPr>
-                        <a:t/>
+                        <a:t>Formalise content-safety + PII redaction with audit logging</a:t>
                       </a:r>
                     </a:p>
                   </a:txBody>
-                  <a:tcPr anchor="ctr" marL="91440" marR="54864" marT="18288" marB="18288">
+                  <a:tcPr anchor="ctr" marL="82296" marR="54864" marT="27432" marB="27432">
+                    <a:solidFill>
+                      <a:srgbClr val="FFFFFF"/>
+                    </a:solidFill>
+                  </a:tcPr>
+                </a:tc>
+                <a:tc>
+                  <a:txBody>
+                    <a:bodyPr wrap="square"/>
+                    <a:lstStyle/>
+                    <a:p>
+                      <a:r>
+                        <a:rPr sz="1100" b="0">
+                          <a:solidFill>
+                            <a:srgbClr val="566573"/>
+                          </a:solidFill>
+                          <a:latin typeface="Segoe UI"/>
+                        </a:rPr>
+                        <a:t>guardrails · denoise step</a:t>
+                      </a:r>
+                    </a:p>
+                  </a:txBody>
+                  <a:tcPr anchor="ctr" marL="82296" marR="54864" marT="27432" marB="27432">
                     <a:solidFill>
                       <a:srgbClr val="FFFFFF"/>
                     </a:solidFill>
                   </a:tcPr>
                 </a:tc>
               </a:tr>
-              <a:tr h="402336">
+              <a:tr h="960120">
                 <a:tc>
                   <a:txBody>
                     <a:bodyPr wrap="square"/>
                     <a:lstStyle/>
                     <a:p>
                       <a:r>
-                        <a:rPr sz="1300" b="0">
+                        <a:rPr sz="1100" b="1">
                           <a:solidFill>
-                            <a:srgbClr val="566573"/>
+                            <a:srgbClr val="1C2733"/>
                           </a:solidFill>
                           <a:latin typeface="Segoe UI"/>
                         </a:rPr>
-                        <a:t>4 · Extend the release gate to include fairness &amp; safety</a:t>
+                        <a:t>4 · Oversight &amp; assurance</a:t>
                       </a:r>
                     </a:p>
                   </a:txBody>
-                  <a:tcPr anchor="ctr" marL="91440" marR="54864" marT="18288" marB="18288">
+                  <a:tcPr anchor="ctr" marL="82296" marR="54864" marT="27432" marB="27432">
                     <a:solidFill>
                       <a:srgbClr val="F6F8FA"/>
                     </a:solidFill>
@@ -7002,17 +7003,569 @@
                     <a:lstStyle/>
                     <a:p>
                       <a:r>
-                        <a:rPr sz="1300" b="0">
+                        <a:rPr sz="1100" b="0">
                           <a:solidFill>
                             <a:srgbClr val="566573"/>
                           </a:solidFill>
                           <a:latin typeface="Segoe UI"/>
                         </a:rPr>
-                        <a:t/>
+                        <a:t>Contest / appeal workflow; golden-data gate live with thresholds</a:t>
                       </a:r>
                     </a:p>
                   </a:txBody>
-                  <a:tcPr anchor="ctr" marL="91440" marR="54864" marT="18288" marB="18288">
+                  <a:tcPr anchor="ctr" marL="82296" marR="54864" marT="27432" marB="27432">
+                    <a:solidFill>
+                      <a:srgbClr val="F6F8FA"/>
+                    </a:solidFill>
+                  </a:tcPr>
+                </a:tc>
+                <a:tc>
+                  <a:txBody>
+                    <a:bodyPr wrap="square"/>
+                    <a:lstStyle/>
+                    <a:p>
+                      <a:r>
+                        <a:rPr sz="1100" b="0">
+                          <a:solidFill>
+                            <a:srgbClr val="566573"/>
+                          </a:solidFill>
+                          <a:latin typeface="Segoe UI"/>
+                        </a:rPr>
+                        <a:t>feedback loop · evaluation gate · golden data</a:t>
+                      </a:r>
+                    </a:p>
+                  </a:txBody>
+                  <a:tcPr anchor="ctr" marL="82296" marR="54864" marT="27432" marB="27432">
+                    <a:solidFill>
+                      <a:srgbClr val="F6F8FA"/>
+                    </a:solidFill>
+                  </a:tcPr>
+                </a:tc>
+              </a:tr>
+            </a:tbl>
+          </a:graphicData>
+        </a:graphic>
+      </p:graphicFrame>
+      <p:sp>
+        <p:nvSpPr>
+          <p:cNvPr id="5" name="Rectangle 4"/>
+          <p:cNvSpPr/>
+          <p:nvPr/>
+        </p:nvSpPr>
+        <p:spPr>
+          <a:xfrm>
+            <a:off x="640080" y="6035040"/>
+            <a:ext cx="10927080" cy="548640"/>
+          </a:xfrm>
+          <a:prstGeom prst="rect">
+            <a:avLst/>
+          </a:prstGeom>
+          <a:solidFill>
+            <a:srgbClr val="EAEEF2"/>
+          </a:solidFill>
+          <a:ln>
+            <a:noFill/>
+          </a:ln>
+          <a:effectLst/>
+        </p:spPr>
+        <p:style>
+          <a:lnRef idx="1">
+            <a:schemeClr val="accent1"/>
+          </a:lnRef>
+          <a:fillRef idx="3">
+            <a:schemeClr val="accent1"/>
+          </a:fillRef>
+          <a:effectRef idx="2">
+            <a:schemeClr val="accent1"/>
+          </a:effectRef>
+          <a:fontRef idx="minor">
+            <a:schemeClr val="lt1"/>
+          </a:fontRef>
+        </p:style>
+        <p:txBody>
+          <a:bodyPr rtlCol="0" anchor="ctr" wrap="square" lIns="201168" rIns="201168"/>
+          <a:lstStyle/>
+          <a:p>
+            <a:pPr algn="ctr">
+              <a:spcAft>
+                <a:spcPts val="0"/>
+              </a:spcAft>
+            </a:pPr>
+            <a:r>
+              <a:rPr sz="1250" b="1">
+                <a:solidFill>
+                  <a:srgbClr val="122A42"/>
+                </a:solidFill>
+                <a:latin typeface="Segoe UI"/>
+              </a:rPr>
+              <a:t>Start with Phase 1 (highest trust, lowest effort — the evidence is already in the data) and grow from there.</a:t>
+            </a:r>
+          </a:p>
+        </p:txBody>
+      </p:sp>
+    </p:spTree>
+  </p:cSld>
+  <p:clrMapOvr>
+    <a:masterClrMapping/>
+  </p:clrMapOvr>
+</p:sld>
+</file>
+
+<file path=ppt/slides/slide9.xml><?xml version="1.0" encoding="utf-8"?>
+<p:sld xmlns:a="http://schemas.openxmlformats.org/drawingml/2006/main" xmlns:p="http://schemas.openxmlformats.org/presentationml/2006/main" xmlns:r="http://schemas.openxmlformats.org/officeDocument/2006/relationships">
+  <p:cSld>
+    <p:bg>
+      <p:bgPr>
+        <a:solidFill>
+          <a:srgbClr val="FFFFFF"/>
+        </a:solidFill>
+        <a:effectLst/>
+      </p:bgPr>
+    </p:bg>
+    <p:spTree>
+      <p:nvGrpSpPr>
+        <p:cNvPr id="1" name=""/>
+        <p:cNvGrpSpPr/>
+        <p:nvPr/>
+      </p:nvGrpSpPr>
+      <p:grpSpPr/>
+      <p:sp>
+        <p:nvSpPr>
+          <p:cNvPr id="2" name="Rectangle 1"/>
+          <p:cNvSpPr/>
+          <p:nvPr/>
+        </p:nvSpPr>
+        <p:spPr>
+          <a:xfrm>
+            <a:off x="0" y="0"/>
+            <a:ext cx="12191695" cy="128016"/>
+          </a:xfrm>
+          <a:prstGeom prst="rect">
+            <a:avLst/>
+          </a:prstGeom>
+          <a:solidFill>
+            <a:srgbClr val="16324F"/>
+          </a:solidFill>
+          <a:ln>
+            <a:noFill/>
+          </a:ln>
+          <a:effectLst/>
+        </p:spPr>
+        <p:style>
+          <a:lnRef idx="1">
+            <a:schemeClr val="accent1"/>
+          </a:lnRef>
+          <a:fillRef idx="3">
+            <a:schemeClr val="accent1"/>
+          </a:fillRef>
+          <a:effectRef idx="2">
+            <a:schemeClr val="accent1"/>
+          </a:effectRef>
+          <a:fontRef idx="minor">
+            <a:schemeClr val="lt1"/>
+          </a:fontRef>
+        </p:style>
+        <p:txBody>
+          <a:bodyPr rtlCol="0" anchor="ctr"/>
+          <a:lstStyle/>
+          <a:p>
+            <a:pPr algn="ctr"/>
+          </a:p>
+        </p:txBody>
+      </p:sp>
+      <p:sp>
+        <p:nvSpPr>
+          <p:cNvPr id="3" name="TextBox 2"/>
+          <p:cNvSpPr txBox="1"/>
+          <p:nvPr/>
+        </p:nvSpPr>
+        <p:spPr>
+          <a:xfrm>
+            <a:off x="640080" y="347472"/>
+            <a:ext cx="11247120" cy="1188720"/>
+          </a:xfrm>
+          <a:prstGeom prst="rect">
+            <a:avLst/>
+          </a:prstGeom>
+          <a:noFill/>
+        </p:spPr>
+        <p:txBody>
+          <a:bodyPr wrap="square">
+            <a:spAutoFit/>
+          </a:bodyPr>
+          <a:lstStyle/>
+          <a:p>
+            <a:pPr>
+              <a:spcAft>
+                <a:spcPts val="400"/>
+              </a:spcAft>
+            </a:pPr>
+            <a:r>
+              <a:rPr sz="1200" b="1">
+                <a:solidFill>
+                  <a:srgbClr val="16324F"/>
+                </a:solidFill>
+                <a:latin typeface="Segoe UI"/>
+              </a:rPr>
+              <a:t>WHO THIS IS FOR</a:t>
+            </a:r>
+          </a:p>
+          <a:p>
+            <a:pPr>
+              <a:spcAft>
+                <a:spcPts val="0"/>
+              </a:spcAft>
+            </a:pPr>
+            <a:r>
+              <a:rPr sz="2400" b="1">
+                <a:solidFill>
+                  <a:srgbClr val="1C2733"/>
+                </a:solidFill>
+                <a:latin typeface="Segoe UI"/>
+              </a:rPr>
+              <a:t>The intended users, and what each does</a:t>
+            </a:r>
+          </a:p>
+        </p:txBody>
+      </p:sp>
+      <p:graphicFrame>
+        <p:nvGraphicFramePr>
+          <p:cNvPr id="4" name="Table 3"/>
+          <p:cNvGraphicFramePr>
+            <a:graphicFrameLocks noGrp="1"/>
+          </p:cNvGraphicFramePr>
+          <p:nvPr/>
+        </p:nvGraphicFramePr>
+        <p:xfrm>
+          <a:off x="640080" y="1783080"/>
+          <a:ext cx="10927080" cy="4608576"/>
+        </p:xfrm>
+        <a:graphic>
+          <a:graphicData uri="http://schemas.openxmlformats.org/drawingml/2006/table">
+            <a:tbl>
+              <a:tblPr firstRow="1">
+                <a:tableStyleId>{5C22544A-7EE6-4342-B048-85BDC9FD1C3A}</a:tableStyleId>
+              </a:tblPr>
+              <a:tblGrid>
+                <a:gridCol w="3291840"/>
+                <a:gridCol w="7635240"/>
+              </a:tblGrid>
+              <a:tr h="658368">
+                <a:tc>
+                  <a:txBody>
+                    <a:bodyPr wrap="square"/>
+                    <a:lstStyle/>
+                    <a:p>
+                      <a:r>
+                        <a:rPr sz="1100" b="1">
+                          <a:solidFill>
+                            <a:srgbClr val="FFFFFF"/>
+                          </a:solidFill>
+                          <a:latin typeface="Segoe UI"/>
+                        </a:rPr>
+                        <a:t>Role</a:t>
+                      </a:r>
+                    </a:p>
+                  </a:txBody>
+                  <a:tcPr anchor="ctr" marL="82296" marR="54864" marT="27432" marB="27432">
+                    <a:solidFill>
+                      <a:srgbClr val="16324F"/>
+                    </a:solidFill>
+                  </a:tcPr>
+                </a:tc>
+                <a:tc>
+                  <a:txBody>
+                    <a:bodyPr wrap="square"/>
+                    <a:lstStyle/>
+                    <a:p>
+                      <a:r>
+                        <a:rPr sz="1100" b="1">
+                          <a:solidFill>
+                            <a:srgbClr val="FFFFFF"/>
+                          </a:solidFill>
+                          <a:latin typeface="Segoe UI"/>
+                        </a:rPr>
+                        <a:t>What they do with Responsible AI</a:t>
+                      </a:r>
+                    </a:p>
+                  </a:txBody>
+                  <a:tcPr anchor="ctr" marL="82296" marR="54864" marT="27432" marB="27432">
+                    <a:solidFill>
+                      <a:srgbClr val="16324F"/>
+                    </a:solidFill>
+                  </a:tcPr>
+                </a:tc>
+              </a:tr>
+              <a:tr h="658368">
+                <a:tc>
+                  <a:txBody>
+                    <a:bodyPr wrap="square"/>
+                    <a:lstStyle/>
+                    <a:p>
+                      <a:r>
+                        <a:rPr sz="1200" b="1">
+                          <a:solidFill>
+                            <a:srgbClr val="1C2733"/>
+                          </a:solidFill>
+                          <a:latin typeface="Segoe UI"/>
+                        </a:rPr>
+                        <a:t>Coaches / QA reviewers</a:t>
+                      </a:r>
+                    </a:p>
+                  </a:txBody>
+                  <a:tcPr anchor="ctr" marL="82296" marR="54864" marT="27432" marB="27432">
+                    <a:solidFill>
+                      <a:srgbClr val="FFFFFF"/>
+                    </a:solidFill>
+                  </a:tcPr>
+                </a:tc>
+                <a:tc>
+                  <a:txBody>
+                    <a:bodyPr wrap="square"/>
+                    <a:lstStyle/>
+                    <a:p>
+                      <a:r>
+                        <a:rPr sz="1200" b="0">
+                          <a:solidFill>
+                            <a:srgbClr val="566573"/>
+                          </a:solidFill>
+                          <a:latin typeface="Segoe UI"/>
+                        </a:rPr>
+                        <a:t>Review AI scores with the evidence; override or contest; rate outputs (feedback)</a:t>
+                      </a:r>
+                    </a:p>
+                  </a:txBody>
+                  <a:tcPr anchor="ctr" marL="82296" marR="54864" marT="27432" marB="27432">
+                    <a:solidFill>
+                      <a:srgbClr val="FFFFFF"/>
+                    </a:solidFill>
+                  </a:tcPr>
+                </a:tc>
+              </a:tr>
+              <a:tr h="658368">
+                <a:tc>
+                  <a:txBody>
+                    <a:bodyPr wrap="square"/>
+                    <a:lstStyle/>
+                    <a:p>
+                      <a:r>
+                        <a:rPr sz="1200" b="1">
+                          <a:solidFill>
+                            <a:srgbClr val="1C2733"/>
+                          </a:solidFill>
+                          <a:latin typeface="Segoe UI"/>
+                        </a:rPr>
+                        <a:t>Prompt / maintenance engineers</a:t>
+                      </a:r>
+                    </a:p>
+                  </a:txBody>
+                  <a:tcPr anchor="ctr" marL="82296" marR="54864" marT="27432" marB="27432">
+                    <a:solidFill>
+                      <a:srgbClr val="F6F8FA"/>
+                    </a:solidFill>
+                  </a:tcPr>
+                </a:tc>
+                <a:tc>
+                  <a:txBody>
+                    <a:bodyPr wrap="square"/>
+                    <a:lstStyle/>
+                    <a:p>
+                      <a:r>
+                        <a:rPr sz="1200" b="0">
+                          <a:solidFill>
+                            <a:srgbClr val="566573"/>
+                          </a:solidFill>
+                          <a:latin typeface="Segoe UI"/>
+                        </a:rPr>
+                        <a:t>Maintain prompts; run the quality-and-fairness gate; act on feedback</a:t>
+                      </a:r>
+                    </a:p>
+                  </a:txBody>
+                  <a:tcPr anchor="ctr" marL="82296" marR="54864" marT="27432" marB="27432">
+                    <a:solidFill>
+                      <a:srgbClr val="F6F8FA"/>
+                    </a:solidFill>
+                  </a:tcPr>
+                </a:tc>
+              </a:tr>
+              <a:tr h="658368">
+                <a:tc>
+                  <a:txBody>
+                    <a:bodyPr wrap="square"/>
+                    <a:lstStyle/>
+                    <a:p>
+                      <a:r>
+                        <a:rPr sz="1200" b="1">
+                          <a:solidFill>
+                            <a:srgbClr val="1C2733"/>
+                          </a:solidFill>
+                          <a:latin typeface="Segoe UI"/>
+                        </a:rPr>
+                        <a:t>Data / ML engineers</a:t>
+                      </a:r>
+                    </a:p>
+                  </a:txBody>
+                  <a:tcPr anchor="ctr" marL="82296" marR="54864" marT="27432" marB="27432">
+                    <a:solidFill>
+                      <a:srgbClr val="FFFFFF"/>
+                    </a:solidFill>
+                  </a:tcPr>
+                </a:tc>
+                <a:tc>
+                  <a:txBody>
+                    <a:bodyPr wrap="square"/>
+                    <a:lstStyle/>
+                    <a:p>
+                      <a:r>
+                        <a:rPr sz="1200" b="0">
+                          <a:solidFill>
+                            <a:srgbClr val="566573"/>
+                          </a:solidFill>
+                          <a:latin typeface="Segoe UI"/>
+                        </a:rPr>
+                        <a:t>Build the validators, fairness checks and guardrails; maintain the golden dataset</a:t>
+                      </a:r>
+                    </a:p>
+                  </a:txBody>
+                  <a:tcPr anchor="ctr" marL="82296" marR="54864" marT="27432" marB="27432">
+                    <a:solidFill>
+                      <a:srgbClr val="FFFFFF"/>
+                    </a:solidFill>
+                  </a:tcPr>
+                </a:tc>
+              </a:tr>
+              <a:tr h="658368">
+                <a:tc>
+                  <a:txBody>
+                    <a:bodyPr wrap="square"/>
+                    <a:lstStyle/>
+                    <a:p>
+                      <a:r>
+                        <a:rPr sz="1200" b="1">
+                          <a:solidFill>
+                            <a:srgbClr val="1C2733"/>
+                          </a:solidFill>
+                          <a:latin typeface="Segoe UI"/>
+                        </a:rPr>
+                        <a:t>Program managers / leadership</a:t>
+                      </a:r>
+                    </a:p>
+                  </a:txBody>
+                  <a:tcPr anchor="ctr" marL="82296" marR="54864" marT="27432" marB="27432">
+                    <a:solidFill>
+                      <a:srgbClr val="F6F8FA"/>
+                    </a:solidFill>
+                  </a:tcPr>
+                </a:tc>
+                <a:tc>
+                  <a:txBody>
+                    <a:bodyPr wrap="square"/>
+                    <a:lstStyle/>
+                    <a:p>
+                      <a:r>
+                        <a:rPr sz="1200" b="0">
+                          <a:solidFill>
+                            <a:srgbClr val="566573"/>
+                          </a:solidFill>
+                          <a:latin typeface="Segoe UI"/>
+                        </a:rPr>
+                        <a:t>Set acceptance thresholds; review fairness &amp; drift reports; sign off</a:t>
+                      </a:r>
+                    </a:p>
+                  </a:txBody>
+                  <a:tcPr anchor="ctr" marL="82296" marR="54864" marT="27432" marB="27432">
+                    <a:solidFill>
+                      <a:srgbClr val="F6F8FA"/>
+                    </a:solidFill>
+                  </a:tcPr>
+                </a:tc>
+              </a:tr>
+              <a:tr h="658368">
+                <a:tc>
+                  <a:txBody>
+                    <a:bodyPr wrap="square"/>
+                    <a:lstStyle/>
+                    <a:p>
+                      <a:r>
+                        <a:rPr sz="1200" b="1">
+                          <a:solidFill>
+                            <a:srgbClr val="1C2733"/>
+                          </a:solidFill>
+                          <a:latin typeface="Segoe UI"/>
+                        </a:rPr>
+                        <a:t>Compliance / risk</a:t>
+                      </a:r>
+                    </a:p>
+                  </a:txBody>
+                  <a:tcPr anchor="ctr" marL="82296" marR="54864" marT="27432" marB="27432">
+                    <a:solidFill>
+                      <a:srgbClr val="FFFFFF"/>
+                    </a:solidFill>
+                  </a:tcPr>
+                </a:tc>
+                <a:tc>
+                  <a:txBody>
+                    <a:bodyPr wrap="square"/>
+                    <a:lstStyle/>
+                    <a:p>
+                      <a:r>
+                        <a:rPr sz="1200" b="0">
+                          <a:solidFill>
+                            <a:srgbClr val="566573"/>
+                          </a:solidFill>
+                          <a:latin typeface="Segoe UI"/>
+                        </a:rPr>
+                        <a:t>Use the audit log, model cards and incident records</a:t>
+                      </a:r>
+                    </a:p>
+                  </a:txBody>
+                  <a:tcPr anchor="ctr" marL="82296" marR="54864" marT="27432" marB="27432">
+                    <a:solidFill>
+                      <a:srgbClr val="FFFFFF"/>
+                    </a:solidFill>
+                  </a:tcPr>
+                </a:tc>
+              </a:tr>
+              <a:tr h="658368">
+                <a:tc>
+                  <a:txBody>
+                    <a:bodyPr wrap="square"/>
+                    <a:lstStyle/>
+                    <a:p>
+                      <a:r>
+                        <a:rPr sz="1200" b="1">
+                          <a:solidFill>
+                            <a:srgbClr val="1C2733"/>
+                          </a:solidFill>
+                          <a:latin typeface="Segoe UI"/>
+                        </a:rPr>
+                        <a:t>Agents (the people scored)</a:t>
+                      </a:r>
+                    </a:p>
+                  </a:txBody>
+                  <a:tcPr anchor="ctr" marL="82296" marR="54864" marT="27432" marB="27432">
+                    <a:solidFill>
+                      <a:srgbClr val="F6F8FA"/>
+                    </a:solidFill>
+                  </a:tcPr>
+                </a:tc>
+                <a:tc>
+                  <a:txBody>
+                    <a:bodyPr wrap="square"/>
+                    <a:lstStyle/>
+                    <a:p>
+                      <a:r>
+                        <a:rPr sz="1200" b="0">
+                          <a:solidFill>
+                            <a:srgbClr val="566573"/>
+                          </a:solidFill>
+                          <a:latin typeface="Segoe UI"/>
+                        </a:rPr>
+                        <a:t>See why they were scored; raise a challenge</a:t>
+                      </a:r>
+                    </a:p>
+                  </a:txBody>
+                  <a:tcPr anchor="ctr" marL="82296" marR="54864" marT="27432" marB="27432">
                     <a:solidFill>
                       <a:srgbClr val="F6F8FA"/>
                     </a:solidFill>
